--- a/ppt/VishvaksenMachana_X25173421_offshore-wind-farm.pptx
+++ b/ppt/VishvaksenMachana_X25173421_offshore-wind-farm.pptx
@@ -1163,7 +1163,7 @@
           <a:bodyPr wrap="square" rtlCol="0" anchor="t"/>
           <a:lstStyle/>
           <a:p>
-            <a:pPr algn="l" indent="0" marL="0">
+            <a:pPr indent="0" marL="0">
               <a:buNone/>
             </a:pPr>
             <a:r>
@@ -1314,7 +1314,7 @@
               <a:buNone/>
             </a:pPr>
             <a:r>
-              <a:rPr lang="en-US" sz="1400" b="1" dirty="0">
+              <a:rPr lang="en-US" sz="1350" b="1" dirty="0">
                 <a:solidFill>
                   <a:srgbClr val="EBB13C"/>
                 </a:solidFill>
@@ -1324,7 +1324,7 @@
               </a:rPr>
               <a:t>Gearbox &lt; 2.5 bar</a:t>
             </a:r>
-            <a:endParaRPr lang="en-US" sz="1400" dirty="0"/>
+            <a:endParaRPr lang="en-US" sz="1350" dirty="0"/>
           </a:p>
         </p:txBody>
       </p:sp>
@@ -1380,7 +1380,7 @@
               <a:buNone/>
             </a:pPr>
             <a:r>
-              <a:rPr lang="en-US" sz="1400" b="1" dirty="0">
+              <a:rPr lang="en-US" sz="1350" b="1" dirty="0">
                 <a:solidFill>
                   <a:srgbClr val="EBB13C"/>
                 </a:solidFill>
@@ -1390,7 +1390,7 @@
               </a:rPr>
               <a:t>10 streams · 2 turbines</a:t>
             </a:r>
-            <a:endParaRPr lang="en-US" sz="1400" dirty="0"/>
+            <a:endParaRPr lang="en-US" sz="1350" dirty="0"/>
           </a:p>
         </p:txBody>
       </p:sp>
@@ -1446,7 +1446,7 @@
               <a:buNone/>
             </a:pPr>
             <a:r>
-              <a:rPr lang="en-US" sz="1400" b="1" dirty="0">
+              <a:rPr lang="en-US" sz="1350" b="1" dirty="0">
                 <a:solidFill>
                   <a:srgbClr val="EBB13C"/>
                 </a:solidFill>
@@ -1456,7 +1456,7 @@
               </a:rPr>
               <a:t>edge alert rules</a:t>
             </a:r>
-            <a:endParaRPr lang="en-US" sz="1400" dirty="0"/>
+            <a:endParaRPr lang="en-US" sz="1350" dirty="0"/>
           </a:p>
         </p:txBody>
       </p:sp>
@@ -1578,12 +1578,12 @@
         </p:nvSpPr>
         <p:spPr>
           <a:xfrm>
-            <a:off x="640080" y="2468880"/>
-            <a:ext cx="1572768" cy="1371600"/>
+            <a:off x="640080" y="1874520"/>
+            <a:ext cx="2286000" cy="1280160"/>
           </a:xfrm>
           <a:prstGeom prst="roundRect">
             <a:avLst>
-              <a:gd name="adj" fmla="val 6667"/>
+              <a:gd name="adj" fmla="val 7143"/>
             </a:avLst>
           </a:prstGeom>
           <a:solidFill>
@@ -1605,8 +1605,8 @@
         </p:nvSpPr>
         <p:spPr>
           <a:xfrm>
-            <a:off x="1325880" y="2670048"/>
-            <a:ext cx="201168" cy="201168"/>
+            <a:off x="1691640" y="2039112"/>
+            <a:ext cx="182880" cy="182880"/>
           </a:xfrm>
           <a:prstGeom prst="ellipse">
             <a:avLst/>
@@ -1625,8 +1625,8 @@
         </p:nvSpPr>
         <p:spPr>
           <a:xfrm>
-            <a:off x="594360" y="2926080"/>
-            <a:ext cx="1664208" cy="411480"/>
+            <a:off x="612648" y="2258568"/>
+            <a:ext cx="2340864" cy="365760"/>
           </a:xfrm>
           <a:prstGeom prst="rect">
             <a:avLst/>
@@ -1664,8 +1664,8 @@
         </p:nvSpPr>
         <p:spPr>
           <a:xfrm>
-            <a:off x="621792" y="3310128"/>
-            <a:ext cx="1609344" cy="457200"/>
+            <a:off x="640080" y="2606040"/>
+            <a:ext cx="2286000" cy="411480"/>
           </a:xfrm>
           <a:prstGeom prst="rect">
             <a:avLst/>
@@ -1703,8 +1703,733 @@
         </p:nvSpPr>
         <p:spPr>
           <a:xfrm>
-            <a:off x="2231136" y="3154680"/>
-            <a:ext cx="258409" cy="0"/>
+            <a:off x="2944368" y="2514600"/>
+            <a:ext cx="1975104" cy="0"/>
+          </a:xfrm>
+          <a:prstGeom prst="line">
+            <a:avLst/>
+          </a:prstGeom>
+          <a:noFill/>
+          <a:ln w="25400">
+            <a:solidFill>
+              <a:srgbClr val="4FA6BE"/>
+            </a:solidFill>
+            <a:prstDash val="solid"/>
+            <a:headEnd type="none"/>
+            <a:tailEnd type="triangle"/>
+          </a:ln>
+        </p:spPr>
+      </p:sp>
+      <p:sp>
+        <p:nvSpPr>
+          <p:cNvPr id="8" name="Shape 6"/>
+          <p:cNvSpPr/>
+          <p:nvPr/>
+        </p:nvSpPr>
+        <p:spPr>
+          <a:xfrm>
+            <a:off x="4937760" y="1874520"/>
+            <a:ext cx="2286000" cy="1280160"/>
+          </a:xfrm>
+          <a:prstGeom prst="roundRect">
+            <a:avLst>
+              <a:gd name="adj" fmla="val 7143"/>
+            </a:avLst>
+          </a:prstGeom>
+          <a:solidFill>
+            <a:srgbClr val="EDF4F7"/>
+          </a:solidFill>
+          <a:ln w="19050">
+            <a:solidFill>
+              <a:srgbClr val="4FA6BE"/>
+            </a:solidFill>
+            <a:prstDash val="solid"/>
+          </a:ln>
+        </p:spPr>
+      </p:sp>
+      <p:sp>
+        <p:nvSpPr>
+          <p:cNvPr id="9" name="Shape 7"/>
+          <p:cNvSpPr/>
+          <p:nvPr/>
+        </p:nvSpPr>
+        <p:spPr>
+          <a:xfrm>
+            <a:off x="5989320" y="2039112"/>
+            <a:ext cx="182880" cy="182880"/>
+          </a:xfrm>
+          <a:prstGeom prst="ellipse">
+            <a:avLst/>
+          </a:prstGeom>
+          <a:solidFill>
+            <a:srgbClr val="4FA6BE"/>
+          </a:solidFill>
+          <a:ln/>
+        </p:spPr>
+      </p:sp>
+      <p:sp>
+        <p:nvSpPr>
+          <p:cNvPr id="10" name="Text 8"/>
+          <p:cNvSpPr/>
+          <p:nvPr/>
+        </p:nvSpPr>
+        <p:spPr>
+          <a:xfrm>
+            <a:off x="4910328" y="2258568"/>
+            <a:ext cx="2340864" cy="365760"/>
+          </a:xfrm>
+          <a:prstGeom prst="rect">
+            <a:avLst/>
+          </a:prstGeom>
+          <a:noFill/>
+          <a:ln/>
+        </p:spPr>
+        <p:txBody>
+          <a:bodyPr wrap="square" lIns="0" tIns="0" rIns="0" bIns="0" rtlCol="0" anchor="ctr"/>
+          <a:lstStyle/>
+          <a:p>
+            <a:pPr algn="ctr" indent="0" marL="0">
+              <a:buNone/>
+            </a:pPr>
+            <a:r>
+              <a:rPr lang="en-US" sz="1450" b="1" dirty="0">
+                <a:solidFill>
+                  <a:srgbClr val="102A38"/>
+                </a:solidFill>
+                <a:latin typeface="Calibri" pitchFamily="34" charset="0"/>
+                <a:ea typeface="Calibri" pitchFamily="34" charset="-122"/>
+                <a:cs typeface="Calibri" pitchFamily="34" charset="-120"/>
+              </a:rPr>
+              <a:t>Fog gateway</a:t>
+            </a:r>
+            <a:endParaRPr lang="en-US" sz="1450" dirty="0"/>
+          </a:p>
+        </p:txBody>
+      </p:sp>
+      <p:sp>
+        <p:nvSpPr>
+          <p:cNvPr id="11" name="Text 9"/>
+          <p:cNvSpPr/>
+          <p:nvPr/>
+        </p:nvSpPr>
+        <p:spPr>
+          <a:xfrm>
+            <a:off x="4937760" y="2606040"/>
+            <a:ext cx="2286000" cy="411480"/>
+          </a:xfrm>
+          <a:prstGeom prst="rect">
+            <a:avLst/>
+          </a:prstGeom>
+          <a:noFill/>
+          <a:ln/>
+        </p:spPr>
+        <p:txBody>
+          <a:bodyPr wrap="square" lIns="0" tIns="0" rIns="0" bIns="0" rtlCol="0" anchor="t"/>
+          <a:lstStyle/>
+          <a:p>
+            <a:pPr algn="ctr" indent="0" marL="0">
+              <a:buNone/>
+            </a:pPr>
+            <a:r>
+              <a:rPr lang="en-US" sz="1050" dirty="0">
+                <a:solidFill>
+                  <a:srgbClr val="567480"/>
+                </a:solidFill>
+                <a:latin typeface="Calibri" pitchFamily="34" charset="0"/>
+                <a:ea typeface="Calibri" pitchFamily="34" charset="-122"/>
+                <a:cs typeface="Calibri" pitchFamily="34" charset="-120"/>
+              </a:rPr>
+              <a:t>windows · 4 rules</a:t>
+            </a:r>
+            <a:endParaRPr lang="en-US" sz="1050" dirty="0"/>
+          </a:p>
+        </p:txBody>
+      </p:sp>
+      <p:sp>
+        <p:nvSpPr>
+          <p:cNvPr id="12" name="Shape 10"/>
+          <p:cNvSpPr/>
+          <p:nvPr/>
+        </p:nvSpPr>
+        <p:spPr>
+          <a:xfrm>
+            <a:off x="7242048" y="2514600"/>
+            <a:ext cx="1975104" cy="0"/>
+          </a:xfrm>
+          <a:prstGeom prst="line">
+            <a:avLst/>
+          </a:prstGeom>
+          <a:noFill/>
+          <a:ln w="25400">
+            <a:solidFill>
+              <a:srgbClr val="4FA6BE"/>
+            </a:solidFill>
+            <a:prstDash val="solid"/>
+            <a:headEnd type="none"/>
+            <a:tailEnd type="triangle"/>
+          </a:ln>
+        </p:spPr>
+      </p:sp>
+      <p:sp>
+        <p:nvSpPr>
+          <p:cNvPr id="13" name="Shape 11"/>
+          <p:cNvSpPr/>
+          <p:nvPr/>
+        </p:nvSpPr>
+        <p:spPr>
+          <a:xfrm>
+            <a:off x="9235440" y="1874520"/>
+            <a:ext cx="2286000" cy="1280160"/>
+          </a:xfrm>
+          <a:prstGeom prst="roundRect">
+            <a:avLst>
+              <a:gd name="adj" fmla="val 7143"/>
+            </a:avLst>
+          </a:prstGeom>
+          <a:solidFill>
+            <a:srgbClr val="EDF4F7"/>
+          </a:solidFill>
+          <a:ln w="19050">
+            <a:solidFill>
+              <a:srgbClr val="0F5E7E"/>
+            </a:solidFill>
+            <a:prstDash val="solid"/>
+          </a:ln>
+        </p:spPr>
+      </p:sp>
+      <p:sp>
+        <p:nvSpPr>
+          <p:cNvPr id="14" name="Shape 12"/>
+          <p:cNvSpPr/>
+          <p:nvPr/>
+        </p:nvSpPr>
+        <p:spPr>
+          <a:xfrm>
+            <a:off x="10287000" y="2039112"/>
+            <a:ext cx="182880" cy="182880"/>
+          </a:xfrm>
+          <a:prstGeom prst="ellipse">
+            <a:avLst/>
+          </a:prstGeom>
+          <a:solidFill>
+            <a:srgbClr val="0F5E7E"/>
+          </a:solidFill>
+          <a:ln/>
+        </p:spPr>
+      </p:sp>
+      <p:sp>
+        <p:nvSpPr>
+          <p:cNvPr id="15" name="Text 13"/>
+          <p:cNvSpPr/>
+          <p:nvPr/>
+        </p:nvSpPr>
+        <p:spPr>
+          <a:xfrm>
+            <a:off x="9208008" y="2258568"/>
+            <a:ext cx="2340864" cy="365760"/>
+          </a:xfrm>
+          <a:prstGeom prst="rect">
+            <a:avLst/>
+          </a:prstGeom>
+          <a:noFill/>
+          <a:ln/>
+        </p:spPr>
+        <p:txBody>
+          <a:bodyPr wrap="square" lIns="0" tIns="0" rIns="0" bIns="0" rtlCol="0" anchor="ctr"/>
+          <a:lstStyle/>
+          <a:p>
+            <a:pPr algn="ctr" indent="0" marL="0">
+              <a:buNone/>
+            </a:pPr>
+            <a:r>
+              <a:rPr lang="en-US" sz="1450" b="1" dirty="0">
+                <a:solidFill>
+                  <a:srgbClr val="102A38"/>
+                </a:solidFill>
+                <a:latin typeface="Calibri" pitchFamily="34" charset="0"/>
+                <a:ea typeface="Calibri" pitchFamily="34" charset="-122"/>
+                <a:cs typeface="Calibri" pitchFamily="34" charset="-120"/>
+              </a:rPr>
+              <a:t>Amazon SQS</a:t>
+            </a:r>
+            <a:endParaRPr lang="en-US" sz="1450" dirty="0"/>
+          </a:p>
+        </p:txBody>
+      </p:sp>
+      <p:sp>
+        <p:nvSpPr>
+          <p:cNvPr id="16" name="Text 14"/>
+          <p:cNvSpPr/>
+          <p:nvPr/>
+        </p:nvSpPr>
+        <p:spPr>
+          <a:xfrm>
+            <a:off x="9235440" y="2606040"/>
+            <a:ext cx="2286000" cy="411480"/>
+          </a:xfrm>
+          <a:prstGeom prst="rect">
+            <a:avLst/>
+          </a:prstGeom>
+          <a:noFill/>
+          <a:ln/>
+        </p:spPr>
+        <p:txBody>
+          <a:bodyPr wrap="square" lIns="0" tIns="0" rIns="0" bIns="0" rtlCol="0" anchor="t"/>
+          <a:lstStyle/>
+          <a:p>
+            <a:pPr algn="ctr" indent="0" marL="0">
+              <a:buNone/>
+            </a:pPr>
+            <a:r>
+              <a:rPr lang="en-US" sz="1050" dirty="0">
+                <a:solidFill>
+                  <a:srgbClr val="567480"/>
+                </a:solidFill>
+                <a:latin typeface="Calibri" pitchFamily="34" charset="0"/>
+                <a:ea typeface="Calibri" pitchFamily="34" charset="-122"/>
+                <a:cs typeface="Calibri" pitchFamily="34" charset="-120"/>
+              </a:rPr>
+              <a:t>1 batched call / cycle</a:t>
+            </a:r>
+            <a:endParaRPr lang="en-US" sz="1050" dirty="0"/>
+          </a:p>
+        </p:txBody>
+      </p:sp>
+      <p:sp>
+        <p:nvSpPr>
+          <p:cNvPr id="17" name="Shape 15"/>
+          <p:cNvSpPr/>
+          <p:nvPr/>
+        </p:nvSpPr>
+        <p:spPr>
+          <a:xfrm>
+            <a:off x="9235440" y="3520440"/>
+            <a:ext cx="2286000" cy="1280160"/>
+          </a:xfrm>
+          <a:prstGeom prst="roundRect">
+            <a:avLst>
+              <a:gd name="adj" fmla="val 7143"/>
+            </a:avLst>
+          </a:prstGeom>
+          <a:solidFill>
+            <a:srgbClr val="EDF4F7"/>
+          </a:solidFill>
+          <a:ln w="19050">
+            <a:solidFill>
+              <a:srgbClr val="0F5E7E"/>
+            </a:solidFill>
+            <a:prstDash val="solid"/>
+          </a:ln>
+        </p:spPr>
+      </p:sp>
+      <p:sp>
+        <p:nvSpPr>
+          <p:cNvPr id="18" name="Shape 16"/>
+          <p:cNvSpPr/>
+          <p:nvPr/>
+        </p:nvSpPr>
+        <p:spPr>
+          <a:xfrm>
+            <a:off x="10287000" y="3685032"/>
+            <a:ext cx="182880" cy="182880"/>
+          </a:xfrm>
+          <a:prstGeom prst="ellipse">
+            <a:avLst/>
+          </a:prstGeom>
+          <a:solidFill>
+            <a:srgbClr val="0F5E7E"/>
+          </a:solidFill>
+          <a:ln/>
+        </p:spPr>
+      </p:sp>
+      <p:sp>
+        <p:nvSpPr>
+          <p:cNvPr id="19" name="Text 17"/>
+          <p:cNvSpPr/>
+          <p:nvPr/>
+        </p:nvSpPr>
+        <p:spPr>
+          <a:xfrm>
+            <a:off x="9208008" y="3904488"/>
+            <a:ext cx="2340864" cy="365760"/>
+          </a:xfrm>
+          <a:prstGeom prst="rect">
+            <a:avLst/>
+          </a:prstGeom>
+          <a:noFill/>
+          <a:ln/>
+        </p:spPr>
+        <p:txBody>
+          <a:bodyPr wrap="square" lIns="0" tIns="0" rIns="0" bIns="0" rtlCol="0" anchor="ctr"/>
+          <a:lstStyle/>
+          <a:p>
+            <a:pPr algn="ctr" indent="0" marL="0">
+              <a:buNone/>
+            </a:pPr>
+            <a:r>
+              <a:rPr lang="en-US" sz="1450" b="1" dirty="0">
+                <a:solidFill>
+                  <a:srgbClr val="102A38"/>
+                </a:solidFill>
+                <a:latin typeface="Calibri" pitchFamily="34" charset="0"/>
+                <a:ea typeface="Calibri" pitchFamily="34" charset="-122"/>
+                <a:cs typeface="Calibri" pitchFamily="34" charset="-120"/>
+              </a:rPr>
+              <a:t>AWS Lambda</a:t>
+            </a:r>
+            <a:endParaRPr lang="en-US" sz="1450" dirty="0"/>
+          </a:p>
+        </p:txBody>
+      </p:sp>
+      <p:sp>
+        <p:nvSpPr>
+          <p:cNvPr id="20" name="Text 18"/>
+          <p:cNvSpPr/>
+          <p:nvPr/>
+        </p:nvSpPr>
+        <p:spPr>
+          <a:xfrm>
+            <a:off x="9235440" y="4251960"/>
+            <a:ext cx="2286000" cy="411480"/>
+          </a:xfrm>
+          <a:prstGeom prst="rect">
+            <a:avLst/>
+          </a:prstGeom>
+          <a:noFill/>
+          <a:ln/>
+        </p:spPr>
+        <p:txBody>
+          <a:bodyPr wrap="square" lIns="0" tIns="0" rIns="0" bIns="0" rtlCol="0" anchor="t"/>
+          <a:lstStyle/>
+          <a:p>
+            <a:pPr algn="ctr" indent="0" marL="0">
+              <a:buNone/>
+            </a:pPr>
+            <a:r>
+              <a:rPr lang="en-US" sz="1050" dirty="0">
+                <a:solidFill>
+                  <a:srgbClr val="567480"/>
+                </a:solidFill>
+                <a:latin typeface="Calibri" pitchFamily="34" charset="0"/>
+                <a:ea typeface="Calibri" pitchFamily="34" charset="-122"/>
+                <a:cs typeface="Calibri" pitchFamily="34" charset="-120"/>
+              </a:rPr>
+              <a:t>nodejs20 ingest</a:t>
+            </a:r>
+            <a:endParaRPr lang="en-US" sz="1050" dirty="0"/>
+          </a:p>
+        </p:txBody>
+      </p:sp>
+      <p:sp>
+        <p:nvSpPr>
+          <p:cNvPr id="21" name="Shape 19"/>
+          <p:cNvSpPr/>
+          <p:nvPr/>
+        </p:nvSpPr>
+        <p:spPr>
+          <a:xfrm>
+            <a:off x="7242048" y="4160520"/>
+            <a:ext cx="1975104" cy="0"/>
+          </a:xfrm>
+          <a:prstGeom prst="line">
+            <a:avLst/>
+          </a:prstGeom>
+          <a:noFill/>
+          <a:ln w="25400">
+            <a:solidFill>
+              <a:srgbClr val="4FA6BE"/>
+            </a:solidFill>
+            <a:prstDash val="solid"/>
+            <a:headEnd type="triangle"/>
+            <a:tailEnd type="oval"/>
+          </a:ln>
+        </p:spPr>
+      </p:sp>
+      <p:sp>
+        <p:nvSpPr>
+          <p:cNvPr id="22" name="Shape 20"/>
+          <p:cNvSpPr/>
+          <p:nvPr/>
+        </p:nvSpPr>
+        <p:spPr>
+          <a:xfrm>
+            <a:off x="4937760" y="3520440"/>
+            <a:ext cx="2286000" cy="1280160"/>
+          </a:xfrm>
+          <a:prstGeom prst="roundRect">
+            <a:avLst>
+              <a:gd name="adj" fmla="val 7143"/>
+            </a:avLst>
+          </a:prstGeom>
+          <a:solidFill>
+            <a:srgbClr val="EDF4F7"/>
+          </a:solidFill>
+          <a:ln w="19050">
+            <a:solidFill>
+              <a:srgbClr val="0F5E7E"/>
+            </a:solidFill>
+            <a:prstDash val="solid"/>
+          </a:ln>
+        </p:spPr>
+      </p:sp>
+      <p:sp>
+        <p:nvSpPr>
+          <p:cNvPr id="23" name="Shape 21"/>
+          <p:cNvSpPr/>
+          <p:nvPr/>
+        </p:nvSpPr>
+        <p:spPr>
+          <a:xfrm>
+            <a:off x="5989320" y="3685032"/>
+            <a:ext cx="182880" cy="182880"/>
+          </a:xfrm>
+          <a:prstGeom prst="ellipse">
+            <a:avLst/>
+          </a:prstGeom>
+          <a:solidFill>
+            <a:srgbClr val="0F5E7E"/>
+          </a:solidFill>
+          <a:ln/>
+        </p:spPr>
+      </p:sp>
+      <p:sp>
+        <p:nvSpPr>
+          <p:cNvPr id="24" name="Text 22"/>
+          <p:cNvSpPr/>
+          <p:nvPr/>
+        </p:nvSpPr>
+        <p:spPr>
+          <a:xfrm>
+            <a:off x="4910328" y="3904488"/>
+            <a:ext cx="2340864" cy="365760"/>
+          </a:xfrm>
+          <a:prstGeom prst="rect">
+            <a:avLst/>
+          </a:prstGeom>
+          <a:noFill/>
+          <a:ln/>
+        </p:spPr>
+        <p:txBody>
+          <a:bodyPr wrap="square" lIns="0" tIns="0" rIns="0" bIns="0" rtlCol="0" anchor="ctr"/>
+          <a:lstStyle/>
+          <a:p>
+            <a:pPr algn="ctr" indent="0" marL="0">
+              <a:buNone/>
+            </a:pPr>
+            <a:r>
+              <a:rPr lang="en-US" sz="1450" b="1" dirty="0">
+                <a:solidFill>
+                  <a:srgbClr val="102A38"/>
+                </a:solidFill>
+                <a:latin typeface="Calibri" pitchFamily="34" charset="0"/>
+                <a:ea typeface="Calibri" pitchFamily="34" charset="-122"/>
+                <a:cs typeface="Calibri" pitchFamily="34" charset="-120"/>
+              </a:rPr>
+              <a:t>DynamoDB</a:t>
+            </a:r>
+            <a:endParaRPr lang="en-US" sz="1450" dirty="0"/>
+          </a:p>
+        </p:txBody>
+      </p:sp>
+      <p:sp>
+        <p:nvSpPr>
+          <p:cNvPr id="25" name="Text 23"/>
+          <p:cNvSpPr/>
+          <p:nvPr/>
+        </p:nvSpPr>
+        <p:spPr>
+          <a:xfrm>
+            <a:off x="4937760" y="4251960"/>
+            <a:ext cx="2286000" cy="411480"/>
+          </a:xfrm>
+          <a:prstGeom prst="rect">
+            <a:avLst/>
+          </a:prstGeom>
+          <a:noFill/>
+          <a:ln/>
+        </p:spPr>
+        <p:txBody>
+          <a:bodyPr wrap="square" lIns="0" tIns="0" rIns="0" bIns="0" rtlCol="0" anchor="t"/>
+          <a:lstStyle/>
+          <a:p>
+            <a:pPr algn="ctr" indent="0" marL="0">
+              <a:buNone/>
+            </a:pPr>
+            <a:r>
+              <a:rPr lang="en-US" sz="1050" dirty="0">
+                <a:solidFill>
+                  <a:srgbClr val="567480"/>
+                </a:solidFill>
+                <a:latin typeface="Calibri" pitchFamily="34" charset="0"/>
+                <a:ea typeface="Calibri" pitchFamily="34" charset="-122"/>
+                <a:cs typeface="Calibri" pitchFamily="34" charset="-120"/>
+              </a:rPr>
+              <a:t>time-ordered store</a:t>
+            </a:r>
+            <a:endParaRPr lang="en-US" sz="1050" dirty="0"/>
+          </a:p>
+        </p:txBody>
+      </p:sp>
+      <p:sp>
+        <p:nvSpPr>
+          <p:cNvPr id="26" name="Shape 24"/>
+          <p:cNvSpPr/>
+          <p:nvPr/>
+        </p:nvSpPr>
+        <p:spPr>
+          <a:xfrm>
+            <a:off x="2944368" y="4160520"/>
+            <a:ext cx="1975104" cy="0"/>
+          </a:xfrm>
+          <a:prstGeom prst="line">
+            <a:avLst/>
+          </a:prstGeom>
+          <a:noFill/>
+          <a:ln w="25400">
+            <a:solidFill>
+              <a:srgbClr val="4FA6BE"/>
+            </a:solidFill>
+            <a:prstDash val="solid"/>
+            <a:headEnd type="triangle"/>
+            <a:tailEnd type="oval"/>
+          </a:ln>
+        </p:spPr>
+      </p:sp>
+      <p:sp>
+        <p:nvSpPr>
+          <p:cNvPr id="27" name="Shape 25"/>
+          <p:cNvSpPr/>
+          <p:nvPr/>
+        </p:nvSpPr>
+        <p:spPr>
+          <a:xfrm>
+            <a:off x="640080" y="3520440"/>
+            <a:ext cx="2286000" cy="1280160"/>
+          </a:xfrm>
+          <a:prstGeom prst="roundRect">
+            <a:avLst>
+              <a:gd name="adj" fmla="val 7143"/>
+            </a:avLst>
+          </a:prstGeom>
+          <a:solidFill>
+            <a:srgbClr val="EDF4F7"/>
+          </a:solidFill>
+          <a:ln w="19050">
+            <a:solidFill>
+              <a:srgbClr val="1E86A6"/>
+            </a:solidFill>
+            <a:prstDash val="solid"/>
+          </a:ln>
+        </p:spPr>
+      </p:sp>
+      <p:sp>
+        <p:nvSpPr>
+          <p:cNvPr id="28" name="Shape 26"/>
+          <p:cNvSpPr/>
+          <p:nvPr/>
+        </p:nvSpPr>
+        <p:spPr>
+          <a:xfrm>
+            <a:off x="1691640" y="3685032"/>
+            <a:ext cx="182880" cy="182880"/>
+          </a:xfrm>
+          <a:prstGeom prst="ellipse">
+            <a:avLst/>
+          </a:prstGeom>
+          <a:solidFill>
+            <a:srgbClr val="1E86A6"/>
+          </a:solidFill>
+          <a:ln/>
+        </p:spPr>
+      </p:sp>
+      <p:sp>
+        <p:nvSpPr>
+          <p:cNvPr id="29" name="Text 27"/>
+          <p:cNvSpPr/>
+          <p:nvPr/>
+        </p:nvSpPr>
+        <p:spPr>
+          <a:xfrm>
+            <a:off x="612648" y="3904488"/>
+            <a:ext cx="2340864" cy="365760"/>
+          </a:xfrm>
+          <a:prstGeom prst="rect">
+            <a:avLst/>
+          </a:prstGeom>
+          <a:noFill/>
+          <a:ln/>
+        </p:spPr>
+        <p:txBody>
+          <a:bodyPr wrap="square" lIns="0" tIns="0" rIns="0" bIns="0" rtlCol="0" anchor="ctr"/>
+          <a:lstStyle/>
+          <a:p>
+            <a:pPr algn="ctr" indent="0" marL="0">
+              <a:buNone/>
+            </a:pPr>
+            <a:r>
+              <a:rPr lang="en-US" sz="1450" b="1" dirty="0">
+                <a:solidFill>
+                  <a:srgbClr val="102A38"/>
+                </a:solidFill>
+                <a:latin typeface="Calibri" pitchFamily="34" charset="0"/>
+                <a:ea typeface="Calibri" pitchFamily="34" charset="-122"/>
+                <a:cs typeface="Calibri" pitchFamily="34" charset="-120"/>
+              </a:rPr>
+              <a:t>API GW + S3</a:t>
+            </a:r>
+            <a:endParaRPr lang="en-US" sz="1450" dirty="0"/>
+          </a:p>
+        </p:txBody>
+      </p:sp>
+      <p:sp>
+        <p:nvSpPr>
+          <p:cNvPr id="30" name="Text 28"/>
+          <p:cNvSpPr/>
+          <p:nvPr/>
+        </p:nvSpPr>
+        <p:spPr>
+          <a:xfrm>
+            <a:off x="640080" y="4251960"/>
+            <a:ext cx="2286000" cy="411480"/>
+          </a:xfrm>
+          <a:prstGeom prst="rect">
+            <a:avLst/>
+          </a:prstGeom>
+          <a:noFill/>
+          <a:ln/>
+        </p:spPr>
+        <p:txBody>
+          <a:bodyPr wrap="square" lIns="0" tIns="0" rIns="0" bIns="0" rtlCol="0" anchor="t"/>
+          <a:lstStyle/>
+          <a:p>
+            <a:pPr algn="ctr" indent="0" marL="0">
+              <a:buNone/>
+            </a:pPr>
+            <a:r>
+              <a:rPr lang="en-US" sz="1050" dirty="0">
+                <a:solidFill>
+                  <a:srgbClr val="567480"/>
+                </a:solidFill>
+                <a:latin typeface="Calibri" pitchFamily="34" charset="0"/>
+                <a:ea typeface="Calibri" pitchFamily="34" charset="-122"/>
+                <a:cs typeface="Calibri" pitchFamily="34" charset="-120"/>
+              </a:rPr>
+              <a:t>live dashboard</a:t>
+            </a:r>
+            <a:endParaRPr lang="en-US" sz="1050" dirty="0"/>
+          </a:p>
+        </p:txBody>
+      </p:sp>
+      <p:sp>
+        <p:nvSpPr>
+          <p:cNvPr id="31" name="Shape 29"/>
+          <p:cNvSpPr/>
+          <p:nvPr/>
+        </p:nvSpPr>
+        <p:spPr>
+          <a:xfrm>
+            <a:off x="10378440" y="3154680"/>
+            <a:ext cx="0" cy="365760"/>
           </a:xfrm>
           <a:prstGeom prst="line">
             <a:avLst/>
@@ -1721,813 +2446,14 @@
       </p:sp>
       <p:sp>
         <p:nvSpPr>
-          <p:cNvPr id="8" name="Shape 6"/>
-          <p:cNvSpPr/>
-          <p:nvPr/>
-        </p:nvSpPr>
-        <p:spPr>
-          <a:xfrm>
-            <a:off x="2507833" y="2468880"/>
-            <a:ext cx="1572768" cy="1371600"/>
-          </a:xfrm>
-          <a:prstGeom prst="roundRect">
-            <a:avLst>
-              <a:gd name="adj" fmla="val 6667"/>
-            </a:avLst>
-          </a:prstGeom>
-          <a:solidFill>
-            <a:srgbClr val="EDF4F7"/>
-          </a:solidFill>
-          <a:ln w="19050">
-            <a:solidFill>
-              <a:srgbClr val="4FA6BE"/>
-            </a:solidFill>
-            <a:prstDash val="solid"/>
-          </a:ln>
-        </p:spPr>
-      </p:sp>
-      <p:sp>
-        <p:nvSpPr>
-          <p:cNvPr id="9" name="Shape 7"/>
-          <p:cNvSpPr/>
-          <p:nvPr/>
-        </p:nvSpPr>
-        <p:spPr>
-          <a:xfrm>
-            <a:off x="3193633" y="2670048"/>
-            <a:ext cx="201168" cy="201168"/>
-          </a:xfrm>
-          <a:prstGeom prst="ellipse">
-            <a:avLst/>
-          </a:prstGeom>
-          <a:solidFill>
-            <a:srgbClr val="4FA6BE"/>
-          </a:solidFill>
-          <a:ln/>
-        </p:spPr>
-      </p:sp>
-      <p:sp>
-        <p:nvSpPr>
-          <p:cNvPr id="10" name="Text 8"/>
-          <p:cNvSpPr/>
-          <p:nvPr/>
-        </p:nvSpPr>
-        <p:spPr>
-          <a:xfrm>
-            <a:off x="2462113" y="2926080"/>
-            <a:ext cx="1664208" cy="411480"/>
-          </a:xfrm>
-          <a:prstGeom prst="rect">
-            <a:avLst/>
-          </a:prstGeom>
-          <a:noFill/>
-          <a:ln/>
-        </p:spPr>
-        <p:txBody>
-          <a:bodyPr wrap="square" lIns="0" tIns="0" rIns="0" bIns="0" rtlCol="0" anchor="ctr"/>
-          <a:lstStyle/>
-          <a:p>
-            <a:pPr algn="ctr" indent="0" marL="0">
-              <a:buNone/>
-            </a:pPr>
-            <a:r>
-              <a:rPr lang="en-US" sz="1450" b="1" dirty="0">
-                <a:solidFill>
-                  <a:srgbClr val="102A38"/>
-                </a:solidFill>
-                <a:latin typeface="Calibri" pitchFamily="34" charset="0"/>
-                <a:ea typeface="Calibri" pitchFamily="34" charset="-122"/>
-                <a:cs typeface="Calibri" pitchFamily="34" charset="-120"/>
-              </a:rPr>
-              <a:t>Fog gateway</a:t>
-            </a:r>
-            <a:endParaRPr lang="en-US" sz="1450" dirty="0"/>
-          </a:p>
-        </p:txBody>
-      </p:sp>
-      <p:sp>
-        <p:nvSpPr>
-          <p:cNvPr id="11" name="Text 9"/>
-          <p:cNvSpPr/>
-          <p:nvPr/>
-        </p:nvSpPr>
-        <p:spPr>
-          <a:xfrm>
-            <a:off x="2489545" y="3310128"/>
-            <a:ext cx="1609344" cy="457200"/>
-          </a:xfrm>
-          <a:prstGeom prst="rect">
-            <a:avLst/>
-          </a:prstGeom>
-          <a:noFill/>
-          <a:ln/>
-        </p:spPr>
-        <p:txBody>
-          <a:bodyPr wrap="square" lIns="0" tIns="0" rIns="0" bIns="0" rtlCol="0" anchor="t"/>
-          <a:lstStyle/>
-          <a:p>
-            <a:pPr algn="ctr" indent="0" marL="0">
-              <a:buNone/>
-            </a:pPr>
-            <a:r>
-              <a:rPr lang="en-US" sz="1050" dirty="0">
-                <a:solidFill>
-                  <a:srgbClr val="567480"/>
-                </a:solidFill>
-                <a:latin typeface="Calibri" pitchFamily="34" charset="0"/>
-                <a:ea typeface="Calibri" pitchFamily="34" charset="-122"/>
-                <a:cs typeface="Calibri" pitchFamily="34" charset="-120"/>
-              </a:rPr>
-              <a:t>windows · 4 rules</a:t>
-            </a:r>
-            <a:endParaRPr lang="en-US" sz="1050" dirty="0"/>
-          </a:p>
-        </p:txBody>
-      </p:sp>
-      <p:sp>
-        <p:nvSpPr>
-          <p:cNvPr id="12" name="Shape 10"/>
-          <p:cNvSpPr/>
-          <p:nvPr/>
-        </p:nvSpPr>
-        <p:spPr>
-          <a:xfrm>
-            <a:off x="4098889" y="3154680"/>
-            <a:ext cx="258409" cy="0"/>
-          </a:xfrm>
-          <a:prstGeom prst="line">
-            <a:avLst/>
-          </a:prstGeom>
-          <a:noFill/>
-          <a:ln w="25400">
-            <a:solidFill>
-              <a:srgbClr val="4FA6BE"/>
-            </a:solidFill>
-            <a:prstDash val="solid"/>
-            <a:tailEnd type="triangle"/>
-          </a:ln>
-        </p:spPr>
-      </p:sp>
-      <p:sp>
-        <p:nvSpPr>
-          <p:cNvPr id="13" name="Shape 11"/>
-          <p:cNvSpPr/>
-          <p:nvPr/>
-        </p:nvSpPr>
-        <p:spPr>
-          <a:xfrm>
-            <a:off x="4375587" y="2468880"/>
-            <a:ext cx="1572768" cy="1371600"/>
-          </a:xfrm>
-          <a:prstGeom prst="roundRect">
-            <a:avLst>
-              <a:gd name="adj" fmla="val 6667"/>
-            </a:avLst>
-          </a:prstGeom>
-          <a:solidFill>
-            <a:srgbClr val="EDF4F7"/>
-          </a:solidFill>
-          <a:ln w="19050">
-            <a:solidFill>
-              <a:srgbClr val="0F5E7E"/>
-            </a:solidFill>
-            <a:prstDash val="solid"/>
-          </a:ln>
-        </p:spPr>
-      </p:sp>
-      <p:sp>
-        <p:nvSpPr>
-          <p:cNvPr id="14" name="Shape 12"/>
-          <p:cNvSpPr/>
-          <p:nvPr/>
-        </p:nvSpPr>
-        <p:spPr>
-          <a:xfrm>
-            <a:off x="5061387" y="2670048"/>
-            <a:ext cx="201168" cy="201168"/>
-          </a:xfrm>
-          <a:prstGeom prst="ellipse">
-            <a:avLst/>
-          </a:prstGeom>
-          <a:solidFill>
-            <a:srgbClr val="0F5E7E"/>
-          </a:solidFill>
-          <a:ln/>
-        </p:spPr>
-      </p:sp>
-      <p:sp>
-        <p:nvSpPr>
-          <p:cNvPr id="15" name="Text 13"/>
-          <p:cNvSpPr/>
-          <p:nvPr/>
-        </p:nvSpPr>
-        <p:spPr>
-          <a:xfrm>
-            <a:off x="4329867" y="2926080"/>
-            <a:ext cx="1664208" cy="411480"/>
-          </a:xfrm>
-          <a:prstGeom prst="rect">
-            <a:avLst/>
-          </a:prstGeom>
-          <a:noFill/>
-          <a:ln/>
-        </p:spPr>
-        <p:txBody>
-          <a:bodyPr wrap="square" lIns="0" tIns="0" rIns="0" bIns="0" rtlCol="0" anchor="ctr"/>
-          <a:lstStyle/>
-          <a:p>
-            <a:pPr algn="ctr" indent="0" marL="0">
-              <a:buNone/>
-            </a:pPr>
-            <a:r>
-              <a:rPr lang="en-US" sz="1450" b="1" dirty="0">
-                <a:solidFill>
-                  <a:srgbClr val="102A38"/>
-                </a:solidFill>
-                <a:latin typeface="Calibri" pitchFamily="34" charset="0"/>
-                <a:ea typeface="Calibri" pitchFamily="34" charset="-122"/>
-                <a:cs typeface="Calibri" pitchFamily="34" charset="-120"/>
-              </a:rPr>
-              <a:t>Amazon SQS</a:t>
-            </a:r>
-            <a:endParaRPr lang="en-US" sz="1450" dirty="0"/>
-          </a:p>
-        </p:txBody>
-      </p:sp>
-      <p:sp>
-        <p:nvSpPr>
-          <p:cNvPr id="16" name="Text 14"/>
-          <p:cNvSpPr/>
-          <p:nvPr/>
-        </p:nvSpPr>
-        <p:spPr>
-          <a:xfrm>
-            <a:off x="4357299" y="3310128"/>
-            <a:ext cx="1609344" cy="457200"/>
-          </a:xfrm>
-          <a:prstGeom prst="rect">
-            <a:avLst/>
-          </a:prstGeom>
-          <a:noFill/>
-          <a:ln/>
-        </p:spPr>
-        <p:txBody>
-          <a:bodyPr wrap="square" lIns="0" tIns="0" rIns="0" bIns="0" rtlCol="0" anchor="t"/>
-          <a:lstStyle/>
-          <a:p>
-            <a:pPr algn="ctr" indent="0" marL="0">
-              <a:buNone/>
-            </a:pPr>
-            <a:r>
-              <a:rPr lang="en-US" sz="1050" dirty="0">
-                <a:solidFill>
-                  <a:srgbClr val="567480"/>
-                </a:solidFill>
-                <a:latin typeface="Calibri" pitchFamily="34" charset="0"/>
-                <a:ea typeface="Calibri" pitchFamily="34" charset="-122"/>
-                <a:cs typeface="Calibri" pitchFamily="34" charset="-120"/>
-              </a:rPr>
-              <a:t>1 batched call / cycle</a:t>
-            </a:r>
-            <a:endParaRPr lang="en-US" sz="1050" dirty="0"/>
-          </a:p>
-        </p:txBody>
-      </p:sp>
-      <p:sp>
-        <p:nvSpPr>
-          <p:cNvPr id="17" name="Shape 15"/>
-          <p:cNvSpPr/>
-          <p:nvPr/>
-        </p:nvSpPr>
-        <p:spPr>
-          <a:xfrm>
-            <a:off x="5966643" y="3154680"/>
-            <a:ext cx="258409" cy="0"/>
-          </a:xfrm>
-          <a:prstGeom prst="line">
-            <a:avLst/>
-          </a:prstGeom>
-          <a:noFill/>
-          <a:ln w="25400">
-            <a:solidFill>
-              <a:srgbClr val="4FA6BE"/>
-            </a:solidFill>
-            <a:prstDash val="solid"/>
-            <a:tailEnd type="triangle"/>
-          </a:ln>
-        </p:spPr>
-      </p:sp>
-      <p:sp>
-        <p:nvSpPr>
-          <p:cNvPr id="18" name="Shape 16"/>
-          <p:cNvSpPr/>
-          <p:nvPr/>
-        </p:nvSpPr>
-        <p:spPr>
-          <a:xfrm>
-            <a:off x="6243340" y="2468880"/>
-            <a:ext cx="1572768" cy="1371600"/>
-          </a:xfrm>
-          <a:prstGeom prst="roundRect">
-            <a:avLst>
-              <a:gd name="adj" fmla="val 6667"/>
-            </a:avLst>
-          </a:prstGeom>
-          <a:solidFill>
-            <a:srgbClr val="EDF4F7"/>
-          </a:solidFill>
-          <a:ln w="19050">
-            <a:solidFill>
-              <a:srgbClr val="0F5E7E"/>
-            </a:solidFill>
-            <a:prstDash val="solid"/>
-          </a:ln>
-        </p:spPr>
-      </p:sp>
-      <p:sp>
-        <p:nvSpPr>
-          <p:cNvPr id="19" name="Shape 17"/>
-          <p:cNvSpPr/>
-          <p:nvPr/>
-        </p:nvSpPr>
-        <p:spPr>
-          <a:xfrm>
-            <a:off x="6929140" y="2670048"/>
-            <a:ext cx="201168" cy="201168"/>
-          </a:xfrm>
-          <a:prstGeom prst="ellipse">
-            <a:avLst/>
-          </a:prstGeom>
-          <a:solidFill>
-            <a:srgbClr val="0F5E7E"/>
-          </a:solidFill>
-          <a:ln/>
-        </p:spPr>
-      </p:sp>
-      <p:sp>
-        <p:nvSpPr>
-          <p:cNvPr id="20" name="Text 18"/>
-          <p:cNvSpPr/>
-          <p:nvPr/>
-        </p:nvSpPr>
-        <p:spPr>
-          <a:xfrm>
-            <a:off x="6197620" y="2926080"/>
-            <a:ext cx="1664208" cy="411480"/>
-          </a:xfrm>
-          <a:prstGeom prst="rect">
-            <a:avLst/>
-          </a:prstGeom>
-          <a:noFill/>
-          <a:ln/>
-        </p:spPr>
-        <p:txBody>
-          <a:bodyPr wrap="square" lIns="0" tIns="0" rIns="0" bIns="0" rtlCol="0" anchor="ctr"/>
-          <a:lstStyle/>
-          <a:p>
-            <a:pPr algn="ctr" indent="0" marL="0">
-              <a:buNone/>
-            </a:pPr>
-            <a:r>
-              <a:rPr lang="en-US" sz="1450" b="1" dirty="0">
-                <a:solidFill>
-                  <a:srgbClr val="102A38"/>
-                </a:solidFill>
-                <a:latin typeface="Calibri" pitchFamily="34" charset="0"/>
-                <a:ea typeface="Calibri" pitchFamily="34" charset="-122"/>
-                <a:cs typeface="Calibri" pitchFamily="34" charset="-120"/>
-              </a:rPr>
-              <a:t>AWS Lambda</a:t>
-            </a:r>
-            <a:endParaRPr lang="en-US" sz="1450" dirty="0"/>
-          </a:p>
-        </p:txBody>
-      </p:sp>
-      <p:sp>
-        <p:nvSpPr>
-          <p:cNvPr id="21" name="Text 19"/>
-          <p:cNvSpPr/>
-          <p:nvPr/>
-        </p:nvSpPr>
-        <p:spPr>
-          <a:xfrm>
-            <a:off x="6225052" y="3310128"/>
-            <a:ext cx="1609344" cy="457200"/>
-          </a:xfrm>
-          <a:prstGeom prst="rect">
-            <a:avLst/>
-          </a:prstGeom>
-          <a:noFill/>
-          <a:ln/>
-        </p:spPr>
-        <p:txBody>
-          <a:bodyPr wrap="square" lIns="0" tIns="0" rIns="0" bIns="0" rtlCol="0" anchor="t"/>
-          <a:lstStyle/>
-          <a:p>
-            <a:pPr algn="ctr" indent="0" marL="0">
-              <a:buNone/>
-            </a:pPr>
-            <a:r>
-              <a:rPr lang="en-US" sz="1050" dirty="0">
-                <a:solidFill>
-                  <a:srgbClr val="567480"/>
-                </a:solidFill>
-                <a:latin typeface="Calibri" pitchFamily="34" charset="0"/>
-                <a:ea typeface="Calibri" pitchFamily="34" charset="-122"/>
-                <a:cs typeface="Calibri" pitchFamily="34" charset="-120"/>
-              </a:rPr>
-              <a:t>nodejs20 ingest</a:t>
-            </a:r>
-            <a:endParaRPr lang="en-US" sz="1050" dirty="0"/>
-          </a:p>
-        </p:txBody>
-      </p:sp>
-      <p:sp>
-        <p:nvSpPr>
-          <p:cNvPr id="22" name="Shape 20"/>
-          <p:cNvSpPr/>
-          <p:nvPr/>
-        </p:nvSpPr>
-        <p:spPr>
-          <a:xfrm>
-            <a:off x="7834396" y="3154680"/>
-            <a:ext cx="258409" cy="0"/>
-          </a:xfrm>
-          <a:prstGeom prst="line">
-            <a:avLst/>
-          </a:prstGeom>
-          <a:noFill/>
-          <a:ln w="25400">
-            <a:solidFill>
-              <a:srgbClr val="4FA6BE"/>
-            </a:solidFill>
-            <a:prstDash val="solid"/>
-            <a:tailEnd type="triangle"/>
-          </a:ln>
-        </p:spPr>
-      </p:sp>
-      <p:sp>
-        <p:nvSpPr>
-          <p:cNvPr id="23" name="Shape 21"/>
-          <p:cNvSpPr/>
-          <p:nvPr/>
-        </p:nvSpPr>
-        <p:spPr>
-          <a:xfrm>
-            <a:off x="8111094" y="2468880"/>
-            <a:ext cx="1572768" cy="1371600"/>
-          </a:xfrm>
-          <a:prstGeom prst="roundRect">
-            <a:avLst>
-              <a:gd name="adj" fmla="val 6667"/>
-            </a:avLst>
-          </a:prstGeom>
-          <a:solidFill>
-            <a:srgbClr val="EDF4F7"/>
-          </a:solidFill>
-          <a:ln w="19050">
-            <a:solidFill>
-              <a:srgbClr val="0F5E7E"/>
-            </a:solidFill>
-            <a:prstDash val="solid"/>
-          </a:ln>
-        </p:spPr>
-      </p:sp>
-      <p:sp>
-        <p:nvSpPr>
-          <p:cNvPr id="24" name="Shape 22"/>
-          <p:cNvSpPr/>
-          <p:nvPr/>
-        </p:nvSpPr>
-        <p:spPr>
-          <a:xfrm>
-            <a:off x="8796894" y="2670048"/>
-            <a:ext cx="201168" cy="201168"/>
-          </a:xfrm>
-          <a:prstGeom prst="ellipse">
-            <a:avLst/>
-          </a:prstGeom>
-          <a:solidFill>
-            <a:srgbClr val="0F5E7E"/>
-          </a:solidFill>
-          <a:ln/>
-        </p:spPr>
-      </p:sp>
-      <p:sp>
-        <p:nvSpPr>
-          <p:cNvPr id="25" name="Text 23"/>
-          <p:cNvSpPr/>
-          <p:nvPr/>
-        </p:nvSpPr>
-        <p:spPr>
-          <a:xfrm>
-            <a:off x="8065374" y="2926080"/>
-            <a:ext cx="1664208" cy="411480"/>
-          </a:xfrm>
-          <a:prstGeom prst="rect">
-            <a:avLst/>
-          </a:prstGeom>
-          <a:noFill/>
-          <a:ln/>
-        </p:spPr>
-        <p:txBody>
-          <a:bodyPr wrap="square" lIns="0" tIns="0" rIns="0" bIns="0" rtlCol="0" anchor="ctr"/>
-          <a:lstStyle/>
-          <a:p>
-            <a:pPr algn="ctr" indent="0" marL="0">
-              <a:buNone/>
-            </a:pPr>
-            <a:r>
-              <a:rPr lang="en-US" sz="1450" b="1" dirty="0">
-                <a:solidFill>
-                  <a:srgbClr val="102A38"/>
-                </a:solidFill>
-                <a:latin typeface="Calibri" pitchFamily="34" charset="0"/>
-                <a:ea typeface="Calibri" pitchFamily="34" charset="-122"/>
-                <a:cs typeface="Calibri" pitchFamily="34" charset="-120"/>
-              </a:rPr>
-              <a:t>DynamoDB</a:t>
-            </a:r>
-            <a:endParaRPr lang="en-US" sz="1450" dirty="0"/>
-          </a:p>
-        </p:txBody>
-      </p:sp>
-      <p:sp>
-        <p:nvSpPr>
-          <p:cNvPr id="26" name="Text 24"/>
-          <p:cNvSpPr/>
-          <p:nvPr/>
-        </p:nvSpPr>
-        <p:spPr>
-          <a:xfrm>
-            <a:off x="8092806" y="3310128"/>
-            <a:ext cx="1609344" cy="457200"/>
-          </a:xfrm>
-          <a:prstGeom prst="rect">
-            <a:avLst/>
-          </a:prstGeom>
-          <a:noFill/>
-          <a:ln/>
-        </p:spPr>
-        <p:txBody>
-          <a:bodyPr wrap="square" lIns="0" tIns="0" rIns="0" bIns="0" rtlCol="0" anchor="t"/>
-          <a:lstStyle/>
-          <a:p>
-            <a:pPr algn="ctr" indent="0" marL="0">
-              <a:buNone/>
-            </a:pPr>
-            <a:r>
-              <a:rPr lang="en-US" sz="1050" dirty="0">
-                <a:solidFill>
-                  <a:srgbClr val="567480"/>
-                </a:solidFill>
-                <a:latin typeface="Calibri" pitchFamily="34" charset="0"/>
-                <a:ea typeface="Calibri" pitchFamily="34" charset="-122"/>
-                <a:cs typeface="Calibri" pitchFamily="34" charset="-120"/>
-              </a:rPr>
-              <a:t>time-ordered store</a:t>
-            </a:r>
-            <a:endParaRPr lang="en-US" sz="1050" dirty="0"/>
-          </a:p>
-        </p:txBody>
-      </p:sp>
-      <p:sp>
-        <p:nvSpPr>
-          <p:cNvPr id="27" name="Shape 25"/>
-          <p:cNvSpPr/>
-          <p:nvPr/>
-        </p:nvSpPr>
-        <p:spPr>
-          <a:xfrm>
-            <a:off x="9702150" y="3154680"/>
-            <a:ext cx="258409" cy="0"/>
-          </a:xfrm>
-          <a:prstGeom prst="line">
-            <a:avLst/>
-          </a:prstGeom>
-          <a:noFill/>
-          <a:ln w="25400">
-            <a:solidFill>
-              <a:srgbClr val="4FA6BE"/>
-            </a:solidFill>
-            <a:prstDash val="solid"/>
-            <a:tailEnd type="triangle"/>
-          </a:ln>
-        </p:spPr>
-      </p:sp>
-      <p:sp>
-        <p:nvSpPr>
-          <p:cNvPr id="28" name="Shape 26"/>
-          <p:cNvSpPr/>
-          <p:nvPr/>
-        </p:nvSpPr>
-        <p:spPr>
-          <a:xfrm>
-            <a:off x="9978847" y="2468880"/>
-            <a:ext cx="1572768" cy="1371600"/>
-          </a:xfrm>
-          <a:prstGeom prst="roundRect">
-            <a:avLst>
-              <a:gd name="adj" fmla="val 6667"/>
-            </a:avLst>
-          </a:prstGeom>
-          <a:solidFill>
-            <a:srgbClr val="EDF4F7"/>
-          </a:solidFill>
-          <a:ln w="19050">
-            <a:solidFill>
-              <a:srgbClr val="1E86A6"/>
-            </a:solidFill>
-            <a:prstDash val="solid"/>
-          </a:ln>
-        </p:spPr>
-      </p:sp>
-      <p:sp>
-        <p:nvSpPr>
-          <p:cNvPr id="29" name="Shape 27"/>
-          <p:cNvSpPr/>
-          <p:nvPr/>
-        </p:nvSpPr>
-        <p:spPr>
-          <a:xfrm>
-            <a:off x="10664647" y="2670048"/>
-            <a:ext cx="201168" cy="201168"/>
-          </a:xfrm>
-          <a:prstGeom prst="ellipse">
-            <a:avLst/>
-          </a:prstGeom>
-          <a:solidFill>
-            <a:srgbClr val="1E86A6"/>
-          </a:solidFill>
-          <a:ln/>
-        </p:spPr>
-      </p:sp>
-      <p:sp>
-        <p:nvSpPr>
-          <p:cNvPr id="30" name="Text 28"/>
-          <p:cNvSpPr/>
-          <p:nvPr/>
-        </p:nvSpPr>
-        <p:spPr>
-          <a:xfrm>
-            <a:off x="9933127" y="2926080"/>
-            <a:ext cx="1664208" cy="411480"/>
-          </a:xfrm>
-          <a:prstGeom prst="rect">
-            <a:avLst/>
-          </a:prstGeom>
-          <a:noFill/>
-          <a:ln/>
-        </p:spPr>
-        <p:txBody>
-          <a:bodyPr wrap="square" lIns="0" tIns="0" rIns="0" bIns="0" rtlCol="0" anchor="ctr"/>
-          <a:lstStyle/>
-          <a:p>
-            <a:pPr algn="ctr" indent="0" marL="0">
-              <a:buNone/>
-            </a:pPr>
-            <a:r>
-              <a:rPr lang="en-US" sz="1450" b="1" dirty="0">
-                <a:solidFill>
-                  <a:srgbClr val="102A38"/>
-                </a:solidFill>
-                <a:latin typeface="Calibri" pitchFamily="34" charset="0"/>
-                <a:ea typeface="Calibri" pitchFamily="34" charset="-122"/>
-                <a:cs typeface="Calibri" pitchFamily="34" charset="-120"/>
-              </a:rPr>
-              <a:t>API GW + S3</a:t>
-            </a:r>
-            <a:endParaRPr lang="en-US" sz="1450" dirty="0"/>
-          </a:p>
-        </p:txBody>
-      </p:sp>
-      <p:sp>
-        <p:nvSpPr>
-          <p:cNvPr id="31" name="Text 29"/>
-          <p:cNvSpPr/>
-          <p:nvPr/>
-        </p:nvSpPr>
-        <p:spPr>
-          <a:xfrm>
-            <a:off x="9960559" y="3310128"/>
-            <a:ext cx="1609344" cy="457200"/>
-          </a:xfrm>
-          <a:prstGeom prst="rect">
-            <a:avLst/>
-          </a:prstGeom>
-          <a:noFill/>
-          <a:ln/>
-        </p:spPr>
-        <p:txBody>
-          <a:bodyPr wrap="square" lIns="0" tIns="0" rIns="0" bIns="0" rtlCol="0" anchor="t"/>
-          <a:lstStyle/>
-          <a:p>
-            <a:pPr algn="ctr" indent="0" marL="0">
-              <a:buNone/>
-            </a:pPr>
-            <a:r>
-              <a:rPr lang="en-US" sz="1050" dirty="0">
-                <a:solidFill>
-                  <a:srgbClr val="567480"/>
-                </a:solidFill>
-                <a:latin typeface="Calibri" pitchFamily="34" charset="0"/>
-                <a:ea typeface="Calibri" pitchFamily="34" charset="-122"/>
-                <a:cs typeface="Calibri" pitchFamily="34" charset="-120"/>
-              </a:rPr>
-              <a:t>live dashboard</a:t>
-            </a:r>
-            <a:endParaRPr lang="en-US" sz="1050" dirty="0"/>
-          </a:p>
-        </p:txBody>
-      </p:sp>
-      <p:sp>
-        <p:nvSpPr>
           <p:cNvPr id="32" name="Text 30"/>
           <p:cNvSpPr/>
           <p:nvPr/>
         </p:nvSpPr>
         <p:spPr>
           <a:xfrm>
-            <a:off x="640080" y="3977640"/>
-            <a:ext cx="3440521" cy="274320"/>
-          </a:xfrm>
-          <a:prstGeom prst="rect">
-            <a:avLst/>
-          </a:prstGeom>
-          <a:noFill/>
-          <a:ln/>
-        </p:spPr>
-        <p:txBody>
-          <a:bodyPr wrap="square" rtlCol="0" anchor="ctr"/>
-          <a:lstStyle/>
-          <a:p>
-            <a:pPr algn="ctr" indent="0" marL="0">
-              <a:buNone/>
-            </a:pPr>
-            <a:r>
-              <a:rPr lang="en-US" sz="1100" b="1" spc="200" kern="0" dirty="0">
-                <a:solidFill>
-                  <a:srgbClr val="4FA6BE"/>
-                </a:solidFill>
-                <a:latin typeface="Calibri" pitchFamily="34" charset="0"/>
-                <a:ea typeface="Calibri" pitchFamily="34" charset="-122"/>
-                <a:cs typeface="Calibri" pitchFamily="34" charset="-120"/>
-              </a:rPr>
-              <a:t>EDGE</a:t>
-            </a:r>
-            <a:endParaRPr lang="en-US" sz="1100" dirty="0"/>
-          </a:p>
-        </p:txBody>
-      </p:sp>
-      <p:sp>
-        <p:nvSpPr>
-          <p:cNvPr id="33" name="Text 31"/>
-          <p:cNvSpPr/>
-          <p:nvPr/>
-        </p:nvSpPr>
-        <p:spPr>
-          <a:xfrm>
-            <a:off x="4375587" y="3977640"/>
-            <a:ext cx="7176028" cy="274320"/>
-          </a:xfrm>
-          <a:prstGeom prst="rect">
-            <a:avLst/>
-          </a:prstGeom>
-          <a:noFill/>
-          <a:ln/>
-        </p:spPr>
-        <p:txBody>
-          <a:bodyPr wrap="square" rtlCol="0" anchor="ctr"/>
-          <a:lstStyle/>
-          <a:p>
-            <a:pPr algn="ctr" indent="0" marL="0">
-              <a:buNone/>
-            </a:pPr>
-            <a:r>
-              <a:rPr lang="en-US" sz="1100" b="1" spc="200" kern="0" dirty="0">
-                <a:solidFill>
-                  <a:srgbClr val="0F5E7E"/>
-                </a:solidFill>
-                <a:latin typeface="Calibri" pitchFamily="34" charset="0"/>
-                <a:ea typeface="Calibri" pitchFamily="34" charset="-122"/>
-                <a:cs typeface="Calibri" pitchFamily="34" charset="-120"/>
-              </a:rPr>
-              <a:t>CLOUD</a:t>
-            </a:r>
-            <a:endParaRPr lang="en-US" sz="1100" dirty="0"/>
-          </a:p>
-        </p:txBody>
-      </p:sp>
-      <p:sp>
-        <p:nvSpPr>
-          <p:cNvPr id="34" name="Text 32"/>
-          <p:cNvSpPr/>
-          <p:nvPr/>
-        </p:nvSpPr>
-        <p:spPr>
-          <a:xfrm>
-            <a:off x="640080" y="5212080"/>
-            <a:ext cx="10972800" cy="640080"/>
+            <a:off x="640080" y="5257800"/>
+            <a:ext cx="10972800" cy="731520"/>
           </a:xfrm>
           <a:prstGeom prst="rect">
             <a:avLst/>
@@ -2759,7 +2685,7 @@
                 <a:ea typeface="Calibri" pitchFamily="34" charset="-122"/>
                 <a:cs typeface="Calibri" pitchFamily="34" charset="-120"/>
               </a:rPr>
-              <a:t>Pipeline health, all green</a:t>
+              <a:t>Both turbines, five metrics</a:t>
             </a:r>
             <a:endParaRPr lang="en-US" sz="1800" dirty="0"/>
           </a:p>
@@ -2798,7 +2724,7 @@
                 <a:ea typeface="Calibri" pitchFamily="34" charset="-122"/>
                 <a:cs typeface="Calibri" pitchFamily="34" charset="-120"/>
               </a:rPr>
-              <a:t>Four of four checks green within a minute of start-up, freshest stored data about three seconds old.</a:t>
+              <a:t>Wind speed, blade vibration, generator temperature, power output and gearbox pressure live for both turbines.</a:t>
             </a:r>
             <a:endParaRPr lang="en-US" sz="1350" dirty="0"/>
           </a:p>
@@ -2896,7 +2822,7 @@
                 <a:ea typeface="Calibri" pitchFamily="34" charset="-122"/>
                 <a:cs typeface="Calibri" pitchFamily="34" charset="-120"/>
               </a:rPr>
-              <a:t>Both turbines, live</a:t>
+              <a:t>Gearbox pressure on the window minimum</a:t>
             </a:r>
             <a:endParaRPr lang="en-US" sz="1800" dirty="0"/>
           </a:p>
@@ -2935,7 +2861,7 @@
                 <a:ea typeface="Calibri" pitchFamily="34" charset="-122"/>
                 <a:cs typeface="Calibri" pitchFamily="34" charset="-120"/>
               </a:rPr>
-              <a:t>Five metrics per turbine and a cross-turbine power trend, with records climbing 17 to 132 to 204 across polls.</a:t>
+              <a:t>A momentary dip below 2.5 bar is a lubrication fault — the rule reads the worst reading in each window, so a single dip cannot hide in an average.</a:t>
             </a:r>
             <a:endParaRPr lang="en-US" sz="1350" dirty="0"/>
           </a:p>
@@ -3033,7 +2959,7 @@
                 <a:ea typeface="Calibri" pitchFamily="34" charset="-122"/>
                 <a:cs typeface="Calibri" pitchFamily="34" charset="-120"/>
               </a:rPr>
-              <a:t>Tested end to end</a:t>
+              <a:t>A cross-turbine power trend, climbing live</a:t>
             </a:r>
             <a:endParaRPr lang="en-US" sz="1800" dirty="0"/>
           </a:p>
@@ -3072,7 +2998,7 @@
                 <a:ea typeface="Calibri" pitchFamily="34" charset="-122"/>
                 <a:cs typeface="Calibri" pitchFamily="34" charset="-120"/>
               </a:rPr>
-              <a:t>71 automated tests pass across sensors, fog gateway, ingestion and dashboard.</a:t>
+              <a:t>The power chart tracks both turbines together, and the stored count climbs 17 to 132 to 204 across refreshes, so the data is genuinely live.</a:t>
             </a:r>
             <a:endParaRPr lang="en-US" sz="1350" dirty="0"/>
           </a:p>
@@ -3157,24 +3083,24 @@
         </p:nvSpPr>
         <p:spPr>
           <a:xfrm>
-            <a:off x="640080" y="640080"/>
-            <a:ext cx="10972800" cy="640080"/>
-          </a:xfrm>
-          <a:prstGeom prst="rect">
-            <a:avLst/>
-          </a:prstGeom>
-          <a:noFill/>
-          <a:ln/>
-        </p:spPr>
-        <p:txBody>
-          <a:bodyPr wrap="square" rtlCol="0" anchor="ctr"/>
+            <a:off x="640080" y="594360"/>
+            <a:ext cx="10972800" cy="822960"/>
+          </a:xfrm>
+          <a:prstGeom prst="rect">
+            <a:avLst/>
+          </a:prstGeom>
+          <a:noFill/>
+          <a:ln/>
+        </p:spPr>
+        <p:txBody>
+          <a:bodyPr wrap="square" rtlCol="0" anchor="t"/>
           <a:lstStyle/>
           <a:p>
             <a:pPr indent="0" marL="0">
               <a:buNone/>
             </a:pPr>
             <a:r>
-              <a:rPr lang="en-US" sz="3000" b="1" dirty="0">
+              <a:rPr lang="en-US" sz="2800" b="1" dirty="0">
                 <a:solidFill>
                   <a:srgbClr val="FFFFFF"/>
                 </a:solidFill>
@@ -3184,7 +3110,7 @@
               </a:rPr>
               <a:t>Hardest Part — the credential trap</a:t>
             </a:r>
-            <a:endParaRPr lang="en-US" sz="3000" dirty="0"/>
+            <a:endParaRPr lang="en-US" sz="2800" dirty="0"/>
           </a:p>
         </p:txBody>
       </p:sp>
@@ -3196,12 +3122,12 @@
         </p:nvSpPr>
         <p:spPr>
           <a:xfrm>
-            <a:off x="731520" y="1920240"/>
-            <a:ext cx="10698480" cy="1965960"/>
+            <a:off x="731520" y="1874520"/>
+            <a:ext cx="5212080" cy="4160520"/>
           </a:xfrm>
           <a:prstGeom prst="roundRect">
             <a:avLst>
-              <a:gd name="adj" fmla="val 4651"/>
+              <a:gd name="adj" fmla="val 2198"/>
             </a:avLst>
           </a:prstGeom>
           <a:solidFill>
@@ -3223,7 +3149,7 @@
         </p:nvSpPr>
         <p:spPr>
           <a:xfrm>
-            <a:off x="1005840" y="2103120"/>
+            <a:off x="1051560" y="2103120"/>
             <a:ext cx="3657600" cy="457200"/>
           </a:xfrm>
           <a:prstGeom prst="rect">
@@ -3262,8 +3188,8 @@
         </p:nvSpPr>
         <p:spPr>
           <a:xfrm>
-            <a:off x="1005840" y="2578608"/>
-            <a:ext cx="9966960" cy="1188720"/>
+            <a:off x="1051560" y="2651760"/>
+            <a:ext cx="4572000" cy="3200400"/>
           </a:xfrm>
           <a:prstGeom prst="rect">
             <a:avLst/>
@@ -3277,12 +3203,12 @@
           <a:p>
             <a:pPr indent="0" marL="0">
               <a:lnSpc>
-                <a:spcPct val="105000"/>
+                <a:spcPct val="110000"/>
               </a:lnSpc>
               <a:buNone/>
             </a:pPr>
             <a:r>
-              <a:rPr lang="en-US" sz="1300" dirty="0">
+              <a:rPr lang="en-US" sz="1350" dirty="0">
                 <a:solidFill>
                   <a:srgbClr val="CFE4EC"/>
                 </a:solidFill>
@@ -3292,7 +3218,7 @@
               </a:rPr>
               <a:t>Two cloud-facing modules decided they must be in local testing whenever the standard access-key variable was present, and swapped in fake, emulator-only credentials. But the serverless platform always injects that same variable to deliver a function's real credentials — so in production both functions would discard their real identity and fail their first call, while every local test kept passing. The same signal meant opposite things in the two environments.</a:t>
             </a:r>
-            <a:endParaRPr lang="en-US" sz="1300" dirty="0"/>
+            <a:endParaRPr lang="en-US" sz="1350" dirty="0"/>
           </a:p>
         </p:txBody>
       </p:sp>
@@ -3304,12 +3230,12 @@
         </p:nvSpPr>
         <p:spPr>
           <a:xfrm>
-            <a:off x="731520" y="4041648"/>
-            <a:ext cx="10698480" cy="1965960"/>
+            <a:off x="6263640" y="1874520"/>
+            <a:ext cx="5212080" cy="4160520"/>
           </a:xfrm>
           <a:prstGeom prst="roundRect">
             <a:avLst>
-              <a:gd name="adj" fmla="val 4651"/>
+              <a:gd name="adj" fmla="val 2198"/>
             </a:avLst>
           </a:prstGeom>
           <a:solidFill>
@@ -3331,7 +3257,7 @@
         </p:nvSpPr>
         <p:spPr>
           <a:xfrm>
-            <a:off x="1005840" y="4224528"/>
+            <a:off x="6583680" y="2103120"/>
             <a:ext cx="3657600" cy="457200"/>
           </a:xfrm>
           <a:prstGeom prst="rect">
@@ -3370,8 +3296,8 @@
         </p:nvSpPr>
         <p:spPr>
           <a:xfrm>
-            <a:off x="1005840" y="4700016"/>
-            <a:ext cx="9966960" cy="1188720"/>
+            <a:off x="6583680" y="2651760"/>
+            <a:ext cx="4572000" cy="3200400"/>
           </a:xfrm>
           <a:prstGeom prst="rect">
             <a:avLst/>
@@ -3385,12 +3311,12 @@
           <a:p>
             <a:pPr indent="0" marL="0">
               <a:lnSpc>
-                <a:spcPct val="105000"/>
+                <a:spcPct val="110000"/>
               </a:lnSpc>
               <a:buNone/>
             </a:pPr>
             <a:r>
-              <a:rPr lang="en-US" sz="1300" dirty="0">
+              <a:rPr lang="en-US" sz="1350" dirty="0">
                 <a:solidFill>
                   <a:srgbClr val="CFE4EC"/>
                 </a:solidFill>
@@ -3400,7 +3326,7 @@
               </a:rPr>
               <a:t>Gate on the local-emulator endpoint variable instead — the one signal that genuinely means local. Deployed functions now fall through to the platform's default credential chain and pick up their real execution-role identity. A pre-deployment audit caught this plus two more; all three were fixed before the first deploy, and every health check was green on the first live poll.</a:t>
             </a:r>
-            <a:endParaRPr lang="en-US" sz="1300" dirty="0"/>
+            <a:endParaRPr lang="en-US" sz="1350" dirty="0"/>
           </a:p>
         </p:txBody>
       </p:sp>

--- a/ppt/VishvaksenMachana_X25173421_offshore-wind-farm.pptx
+++ b/ppt/VishvaksenMachana_X25173421_offshore-wind-farm.pptx
@@ -3057,7 +3057,7 @@
     <p:bg>
       <p:bgPr>
         <a:solidFill>
-          <a:srgbClr val="0E2A3A"/>
+          <a:srgbClr val="FFFFFF"/>
         </a:solidFill>
       </p:bgPr>
     </p:bg>
@@ -3083,7 +3083,7 @@
         </p:nvSpPr>
         <p:spPr>
           <a:xfrm>
-            <a:off x="640080" y="594360"/>
+            <a:off x="640080" y="502920"/>
             <a:ext cx="10972800" cy="822960"/>
           </a:xfrm>
           <a:prstGeom prst="rect">
@@ -3102,7 +3102,7 @@
             <a:r>
               <a:rPr lang="en-US" sz="2800" b="1" dirty="0">
                 <a:solidFill>
-                  <a:srgbClr val="FFFFFF"/>
+                  <a:srgbClr val="102A38"/>
                 </a:solidFill>
                 <a:latin typeface="Bookman Old Style" pitchFamily="34" charset="0"/>
                 <a:ea typeface="Bookman Old Style" pitchFamily="34" charset="-122"/>
@@ -3122,8 +3122,8 @@
         </p:nvSpPr>
         <p:spPr>
           <a:xfrm>
-            <a:off x="731520" y="1874520"/>
-            <a:ext cx="5212080" cy="4160520"/>
+            <a:off x="640080" y="1874520"/>
+            <a:ext cx="4937760" cy="4160520"/>
           </a:xfrm>
           <a:prstGeom prst="roundRect">
             <a:avLst>
@@ -3131,9 +3131,9 @@
             </a:avLst>
           </a:prstGeom>
           <a:solidFill>
-            <a:srgbClr val="174456"/>
-          </a:solidFill>
-          <a:ln w="15875">
+            <a:srgbClr val="EDF4F7"/>
+          </a:solidFill>
+          <a:ln w="19050">
             <a:solidFill>
               <a:srgbClr val="EBB13C"/>
             </a:solidFill>
@@ -3149,7 +3149,7 @@
         </p:nvSpPr>
         <p:spPr>
           <a:xfrm>
-            <a:off x="1051560" y="2103120"/>
+            <a:off x="960120" y="2103120"/>
             <a:ext cx="3657600" cy="457200"/>
           </a:xfrm>
           <a:prstGeom prst="rect">
@@ -3188,8 +3188,8 @@
         </p:nvSpPr>
         <p:spPr>
           <a:xfrm>
-            <a:off x="1051560" y="2651760"/>
-            <a:ext cx="4572000" cy="3200400"/>
+            <a:off x="960120" y="2651760"/>
+            <a:ext cx="4343400" cy="3200400"/>
           </a:xfrm>
           <a:prstGeom prst="rect">
             <a:avLst/>
@@ -3203,14 +3203,14 @@
           <a:p>
             <a:pPr indent="0" marL="0">
               <a:lnSpc>
-                <a:spcPct val="110000"/>
+                <a:spcPct val="112000"/>
               </a:lnSpc>
               <a:buNone/>
             </a:pPr>
             <a:r>
               <a:rPr lang="en-US" sz="1350" dirty="0">
                 <a:solidFill>
-                  <a:srgbClr val="CFE4EC"/>
+                  <a:srgbClr val="102A38"/>
                 </a:solidFill>
                 <a:latin typeface="Calibri" pitchFamily="34" charset="0"/>
                 <a:ea typeface="Calibri" pitchFamily="34" charset="-122"/>
@@ -3230,8 +3230,8 @@
         </p:nvSpPr>
         <p:spPr>
           <a:xfrm>
-            <a:off x="6263640" y="1874520"/>
-            <a:ext cx="5212080" cy="4160520"/>
+            <a:off x="6611112" y="1874520"/>
+            <a:ext cx="4937760" cy="4160520"/>
           </a:xfrm>
           <a:prstGeom prst="roundRect">
             <a:avLst>
@@ -3239,11 +3239,11 @@
             </a:avLst>
           </a:prstGeom>
           <a:solidFill>
-            <a:srgbClr val="174456"/>
-          </a:solidFill>
-          <a:ln w="15875">
+            <a:srgbClr val="EDF4F7"/>
+          </a:solidFill>
+          <a:ln w="19050">
             <a:solidFill>
-              <a:srgbClr val="4FA6BE"/>
+              <a:srgbClr val="1E86A6"/>
             </a:solidFill>
             <a:prstDash val="solid"/>
           </a:ln>
@@ -3257,7 +3257,7 @@
         </p:nvSpPr>
         <p:spPr>
           <a:xfrm>
-            <a:off x="6583680" y="2103120"/>
+            <a:off x="6931152" y="2103120"/>
             <a:ext cx="3657600" cy="457200"/>
           </a:xfrm>
           <a:prstGeom prst="rect">
@@ -3276,7 +3276,7 @@
             <a:r>
               <a:rPr lang="en-US" sz="1900" b="1" dirty="0">
                 <a:solidFill>
-                  <a:srgbClr val="4FA6BE"/>
+                  <a:srgbClr val="1E86A6"/>
                 </a:solidFill>
                 <a:latin typeface="Bookman Old Style" pitchFamily="34" charset="0"/>
                 <a:ea typeface="Bookman Old Style" pitchFamily="34" charset="-122"/>
@@ -3296,8 +3296,8 @@
         </p:nvSpPr>
         <p:spPr>
           <a:xfrm>
-            <a:off x="6583680" y="2651760"/>
-            <a:ext cx="4572000" cy="3200400"/>
+            <a:off x="6931152" y="2651760"/>
+            <a:ext cx="4343400" cy="3200400"/>
           </a:xfrm>
           <a:prstGeom prst="rect">
             <a:avLst/>
@@ -3311,14 +3311,14 @@
           <a:p>
             <a:pPr indent="0" marL="0">
               <a:lnSpc>
-                <a:spcPct val="110000"/>
+                <a:spcPct val="112000"/>
               </a:lnSpc>
               <a:buNone/>
             </a:pPr>
             <a:r>
               <a:rPr lang="en-US" sz="1350" dirty="0">
                 <a:solidFill>
-                  <a:srgbClr val="CFE4EC"/>
+                  <a:srgbClr val="102A38"/>
                 </a:solidFill>
                 <a:latin typeface="Calibri" pitchFamily="34" charset="0"/>
                 <a:ea typeface="Calibri" pitchFamily="34" charset="-122"/>
@@ -3329,6 +3329,26 @@
             <a:endParaRPr lang="en-US" sz="1350" dirty="0"/>
           </a:p>
         </p:txBody>
+      </p:sp>
+      <p:sp>
+        <p:nvSpPr>
+          <p:cNvPr id="9" name="Shape 7"/>
+          <p:cNvSpPr/>
+          <p:nvPr/>
+        </p:nvSpPr>
+        <p:spPr>
+          <a:xfrm>
+            <a:off x="5669280" y="3703320"/>
+            <a:ext cx="841248" cy="512064"/>
+          </a:xfrm>
+          <a:prstGeom prst="rightArrow">
+            <a:avLst/>
+          </a:prstGeom>
+          <a:solidFill>
+            <a:srgbClr val="0F5E7E"/>
+          </a:solidFill>
+          <a:ln/>
+        </p:spPr>
       </p:sp>
     </p:spTree>
   </p:cSld>

--- a/ppt/VishvaksenMachana_X25173421_offshore-wind-farm.pptx
+++ b/ppt/VishvaksenMachana_X25173421_offshore-wind-farm.pptx
@@ -1578,12 +1578,12 @@
         </p:nvSpPr>
         <p:spPr>
           <a:xfrm>
-            <a:off x="640080" y="1874520"/>
-            <a:ext cx="2286000" cy="1280160"/>
+            <a:off x="640080" y="2468880"/>
+            <a:ext cx="1572768" cy="1371600"/>
           </a:xfrm>
           <a:prstGeom prst="roundRect">
             <a:avLst>
-              <a:gd name="adj" fmla="val 7143"/>
+              <a:gd name="adj" fmla="val 6667"/>
             </a:avLst>
           </a:prstGeom>
           <a:solidFill>
@@ -1605,7 +1605,7 @@
         </p:nvSpPr>
         <p:spPr>
           <a:xfrm>
-            <a:off x="1691640" y="2039112"/>
+            <a:off x="1335024" y="2633472"/>
             <a:ext cx="182880" cy="182880"/>
           </a:xfrm>
           <a:prstGeom prst="ellipse">
@@ -1625,8 +1625,8 @@
         </p:nvSpPr>
         <p:spPr>
           <a:xfrm>
-            <a:off x="612648" y="2258568"/>
-            <a:ext cx="2340864" cy="365760"/>
+            <a:off x="612648" y="2852928"/>
+            <a:ext cx="1627632" cy="365760"/>
           </a:xfrm>
           <a:prstGeom prst="rect">
             <a:avLst/>
@@ -1664,8 +1664,8 @@
         </p:nvSpPr>
         <p:spPr>
           <a:xfrm>
-            <a:off x="640080" y="2606040"/>
-            <a:ext cx="2286000" cy="411480"/>
+            <a:off x="640080" y="3200400"/>
+            <a:ext cx="1572768" cy="411480"/>
           </a:xfrm>
           <a:prstGeom prst="rect">
             <a:avLst/>
@@ -1703,733 +1703,8 @@
         </p:nvSpPr>
         <p:spPr>
           <a:xfrm>
-            <a:off x="2944368" y="2514600"/>
-            <a:ext cx="1975104" cy="0"/>
-          </a:xfrm>
-          <a:prstGeom prst="line">
-            <a:avLst/>
-          </a:prstGeom>
-          <a:noFill/>
-          <a:ln w="25400">
-            <a:solidFill>
-              <a:srgbClr val="4FA6BE"/>
-            </a:solidFill>
-            <a:prstDash val="solid"/>
-            <a:headEnd type="none"/>
-            <a:tailEnd type="triangle"/>
-          </a:ln>
-        </p:spPr>
-      </p:sp>
-      <p:sp>
-        <p:nvSpPr>
-          <p:cNvPr id="8" name="Shape 6"/>
-          <p:cNvSpPr/>
-          <p:nvPr/>
-        </p:nvSpPr>
-        <p:spPr>
-          <a:xfrm>
-            <a:off x="4937760" y="1874520"/>
-            <a:ext cx="2286000" cy="1280160"/>
-          </a:xfrm>
-          <a:prstGeom prst="roundRect">
-            <a:avLst>
-              <a:gd name="adj" fmla="val 7143"/>
-            </a:avLst>
-          </a:prstGeom>
-          <a:solidFill>
-            <a:srgbClr val="EDF4F7"/>
-          </a:solidFill>
-          <a:ln w="19050">
-            <a:solidFill>
-              <a:srgbClr val="4FA6BE"/>
-            </a:solidFill>
-            <a:prstDash val="solid"/>
-          </a:ln>
-        </p:spPr>
-      </p:sp>
-      <p:sp>
-        <p:nvSpPr>
-          <p:cNvPr id="9" name="Shape 7"/>
-          <p:cNvSpPr/>
-          <p:nvPr/>
-        </p:nvSpPr>
-        <p:spPr>
-          <a:xfrm>
-            <a:off x="5989320" y="2039112"/>
-            <a:ext cx="182880" cy="182880"/>
-          </a:xfrm>
-          <a:prstGeom prst="ellipse">
-            <a:avLst/>
-          </a:prstGeom>
-          <a:solidFill>
-            <a:srgbClr val="4FA6BE"/>
-          </a:solidFill>
-          <a:ln/>
-        </p:spPr>
-      </p:sp>
-      <p:sp>
-        <p:nvSpPr>
-          <p:cNvPr id="10" name="Text 8"/>
-          <p:cNvSpPr/>
-          <p:nvPr/>
-        </p:nvSpPr>
-        <p:spPr>
-          <a:xfrm>
-            <a:off x="4910328" y="2258568"/>
-            <a:ext cx="2340864" cy="365760"/>
-          </a:xfrm>
-          <a:prstGeom prst="rect">
-            <a:avLst/>
-          </a:prstGeom>
-          <a:noFill/>
-          <a:ln/>
-        </p:spPr>
-        <p:txBody>
-          <a:bodyPr wrap="square" lIns="0" tIns="0" rIns="0" bIns="0" rtlCol="0" anchor="ctr"/>
-          <a:lstStyle/>
-          <a:p>
-            <a:pPr algn="ctr" indent="0" marL="0">
-              <a:buNone/>
-            </a:pPr>
-            <a:r>
-              <a:rPr lang="en-US" sz="1450" b="1" dirty="0">
-                <a:solidFill>
-                  <a:srgbClr val="102A38"/>
-                </a:solidFill>
-                <a:latin typeface="Calibri" pitchFamily="34" charset="0"/>
-                <a:ea typeface="Calibri" pitchFamily="34" charset="-122"/>
-                <a:cs typeface="Calibri" pitchFamily="34" charset="-120"/>
-              </a:rPr>
-              <a:t>Fog gateway</a:t>
-            </a:r>
-            <a:endParaRPr lang="en-US" sz="1450" dirty="0"/>
-          </a:p>
-        </p:txBody>
-      </p:sp>
-      <p:sp>
-        <p:nvSpPr>
-          <p:cNvPr id="11" name="Text 9"/>
-          <p:cNvSpPr/>
-          <p:nvPr/>
-        </p:nvSpPr>
-        <p:spPr>
-          <a:xfrm>
-            <a:off x="4937760" y="2606040"/>
-            <a:ext cx="2286000" cy="411480"/>
-          </a:xfrm>
-          <a:prstGeom prst="rect">
-            <a:avLst/>
-          </a:prstGeom>
-          <a:noFill/>
-          <a:ln/>
-        </p:spPr>
-        <p:txBody>
-          <a:bodyPr wrap="square" lIns="0" tIns="0" rIns="0" bIns="0" rtlCol="0" anchor="t"/>
-          <a:lstStyle/>
-          <a:p>
-            <a:pPr algn="ctr" indent="0" marL="0">
-              <a:buNone/>
-            </a:pPr>
-            <a:r>
-              <a:rPr lang="en-US" sz="1050" dirty="0">
-                <a:solidFill>
-                  <a:srgbClr val="567480"/>
-                </a:solidFill>
-                <a:latin typeface="Calibri" pitchFamily="34" charset="0"/>
-                <a:ea typeface="Calibri" pitchFamily="34" charset="-122"/>
-                <a:cs typeface="Calibri" pitchFamily="34" charset="-120"/>
-              </a:rPr>
-              <a:t>windows · 4 rules</a:t>
-            </a:r>
-            <a:endParaRPr lang="en-US" sz="1050" dirty="0"/>
-          </a:p>
-        </p:txBody>
-      </p:sp>
-      <p:sp>
-        <p:nvSpPr>
-          <p:cNvPr id="12" name="Shape 10"/>
-          <p:cNvSpPr/>
-          <p:nvPr/>
-        </p:nvSpPr>
-        <p:spPr>
-          <a:xfrm>
-            <a:off x="7242048" y="2514600"/>
-            <a:ext cx="1975104" cy="0"/>
-          </a:xfrm>
-          <a:prstGeom prst="line">
-            <a:avLst/>
-          </a:prstGeom>
-          <a:noFill/>
-          <a:ln w="25400">
-            <a:solidFill>
-              <a:srgbClr val="4FA6BE"/>
-            </a:solidFill>
-            <a:prstDash val="solid"/>
-            <a:headEnd type="none"/>
-            <a:tailEnd type="triangle"/>
-          </a:ln>
-        </p:spPr>
-      </p:sp>
-      <p:sp>
-        <p:nvSpPr>
-          <p:cNvPr id="13" name="Shape 11"/>
-          <p:cNvSpPr/>
-          <p:nvPr/>
-        </p:nvSpPr>
-        <p:spPr>
-          <a:xfrm>
-            <a:off x="9235440" y="1874520"/>
-            <a:ext cx="2286000" cy="1280160"/>
-          </a:xfrm>
-          <a:prstGeom prst="roundRect">
-            <a:avLst>
-              <a:gd name="adj" fmla="val 7143"/>
-            </a:avLst>
-          </a:prstGeom>
-          <a:solidFill>
-            <a:srgbClr val="EDF4F7"/>
-          </a:solidFill>
-          <a:ln w="19050">
-            <a:solidFill>
-              <a:srgbClr val="0F5E7E"/>
-            </a:solidFill>
-            <a:prstDash val="solid"/>
-          </a:ln>
-        </p:spPr>
-      </p:sp>
-      <p:sp>
-        <p:nvSpPr>
-          <p:cNvPr id="14" name="Shape 12"/>
-          <p:cNvSpPr/>
-          <p:nvPr/>
-        </p:nvSpPr>
-        <p:spPr>
-          <a:xfrm>
-            <a:off x="10287000" y="2039112"/>
-            <a:ext cx="182880" cy="182880"/>
-          </a:xfrm>
-          <a:prstGeom prst="ellipse">
-            <a:avLst/>
-          </a:prstGeom>
-          <a:solidFill>
-            <a:srgbClr val="0F5E7E"/>
-          </a:solidFill>
-          <a:ln/>
-        </p:spPr>
-      </p:sp>
-      <p:sp>
-        <p:nvSpPr>
-          <p:cNvPr id="15" name="Text 13"/>
-          <p:cNvSpPr/>
-          <p:nvPr/>
-        </p:nvSpPr>
-        <p:spPr>
-          <a:xfrm>
-            <a:off x="9208008" y="2258568"/>
-            <a:ext cx="2340864" cy="365760"/>
-          </a:xfrm>
-          <a:prstGeom prst="rect">
-            <a:avLst/>
-          </a:prstGeom>
-          <a:noFill/>
-          <a:ln/>
-        </p:spPr>
-        <p:txBody>
-          <a:bodyPr wrap="square" lIns="0" tIns="0" rIns="0" bIns="0" rtlCol="0" anchor="ctr"/>
-          <a:lstStyle/>
-          <a:p>
-            <a:pPr algn="ctr" indent="0" marL="0">
-              <a:buNone/>
-            </a:pPr>
-            <a:r>
-              <a:rPr lang="en-US" sz="1450" b="1" dirty="0">
-                <a:solidFill>
-                  <a:srgbClr val="102A38"/>
-                </a:solidFill>
-                <a:latin typeface="Calibri" pitchFamily="34" charset="0"/>
-                <a:ea typeface="Calibri" pitchFamily="34" charset="-122"/>
-                <a:cs typeface="Calibri" pitchFamily="34" charset="-120"/>
-              </a:rPr>
-              <a:t>Amazon SQS</a:t>
-            </a:r>
-            <a:endParaRPr lang="en-US" sz="1450" dirty="0"/>
-          </a:p>
-        </p:txBody>
-      </p:sp>
-      <p:sp>
-        <p:nvSpPr>
-          <p:cNvPr id="16" name="Text 14"/>
-          <p:cNvSpPr/>
-          <p:nvPr/>
-        </p:nvSpPr>
-        <p:spPr>
-          <a:xfrm>
-            <a:off x="9235440" y="2606040"/>
-            <a:ext cx="2286000" cy="411480"/>
-          </a:xfrm>
-          <a:prstGeom prst="rect">
-            <a:avLst/>
-          </a:prstGeom>
-          <a:noFill/>
-          <a:ln/>
-        </p:spPr>
-        <p:txBody>
-          <a:bodyPr wrap="square" lIns="0" tIns="0" rIns="0" bIns="0" rtlCol="0" anchor="t"/>
-          <a:lstStyle/>
-          <a:p>
-            <a:pPr algn="ctr" indent="0" marL="0">
-              <a:buNone/>
-            </a:pPr>
-            <a:r>
-              <a:rPr lang="en-US" sz="1050" dirty="0">
-                <a:solidFill>
-                  <a:srgbClr val="567480"/>
-                </a:solidFill>
-                <a:latin typeface="Calibri" pitchFamily="34" charset="0"/>
-                <a:ea typeface="Calibri" pitchFamily="34" charset="-122"/>
-                <a:cs typeface="Calibri" pitchFamily="34" charset="-120"/>
-              </a:rPr>
-              <a:t>1 batched call / cycle</a:t>
-            </a:r>
-            <a:endParaRPr lang="en-US" sz="1050" dirty="0"/>
-          </a:p>
-        </p:txBody>
-      </p:sp>
-      <p:sp>
-        <p:nvSpPr>
-          <p:cNvPr id="17" name="Shape 15"/>
-          <p:cNvSpPr/>
-          <p:nvPr/>
-        </p:nvSpPr>
-        <p:spPr>
-          <a:xfrm>
-            <a:off x="9235440" y="3520440"/>
-            <a:ext cx="2286000" cy="1280160"/>
-          </a:xfrm>
-          <a:prstGeom prst="roundRect">
-            <a:avLst>
-              <a:gd name="adj" fmla="val 7143"/>
-            </a:avLst>
-          </a:prstGeom>
-          <a:solidFill>
-            <a:srgbClr val="EDF4F7"/>
-          </a:solidFill>
-          <a:ln w="19050">
-            <a:solidFill>
-              <a:srgbClr val="0F5E7E"/>
-            </a:solidFill>
-            <a:prstDash val="solid"/>
-          </a:ln>
-        </p:spPr>
-      </p:sp>
-      <p:sp>
-        <p:nvSpPr>
-          <p:cNvPr id="18" name="Shape 16"/>
-          <p:cNvSpPr/>
-          <p:nvPr/>
-        </p:nvSpPr>
-        <p:spPr>
-          <a:xfrm>
-            <a:off x="10287000" y="3685032"/>
-            <a:ext cx="182880" cy="182880"/>
-          </a:xfrm>
-          <a:prstGeom prst="ellipse">
-            <a:avLst/>
-          </a:prstGeom>
-          <a:solidFill>
-            <a:srgbClr val="0F5E7E"/>
-          </a:solidFill>
-          <a:ln/>
-        </p:spPr>
-      </p:sp>
-      <p:sp>
-        <p:nvSpPr>
-          <p:cNvPr id="19" name="Text 17"/>
-          <p:cNvSpPr/>
-          <p:nvPr/>
-        </p:nvSpPr>
-        <p:spPr>
-          <a:xfrm>
-            <a:off x="9208008" y="3904488"/>
-            <a:ext cx="2340864" cy="365760"/>
-          </a:xfrm>
-          <a:prstGeom prst="rect">
-            <a:avLst/>
-          </a:prstGeom>
-          <a:noFill/>
-          <a:ln/>
-        </p:spPr>
-        <p:txBody>
-          <a:bodyPr wrap="square" lIns="0" tIns="0" rIns="0" bIns="0" rtlCol="0" anchor="ctr"/>
-          <a:lstStyle/>
-          <a:p>
-            <a:pPr algn="ctr" indent="0" marL="0">
-              <a:buNone/>
-            </a:pPr>
-            <a:r>
-              <a:rPr lang="en-US" sz="1450" b="1" dirty="0">
-                <a:solidFill>
-                  <a:srgbClr val="102A38"/>
-                </a:solidFill>
-                <a:latin typeface="Calibri" pitchFamily="34" charset="0"/>
-                <a:ea typeface="Calibri" pitchFamily="34" charset="-122"/>
-                <a:cs typeface="Calibri" pitchFamily="34" charset="-120"/>
-              </a:rPr>
-              <a:t>AWS Lambda</a:t>
-            </a:r>
-            <a:endParaRPr lang="en-US" sz="1450" dirty="0"/>
-          </a:p>
-        </p:txBody>
-      </p:sp>
-      <p:sp>
-        <p:nvSpPr>
-          <p:cNvPr id="20" name="Text 18"/>
-          <p:cNvSpPr/>
-          <p:nvPr/>
-        </p:nvSpPr>
-        <p:spPr>
-          <a:xfrm>
-            <a:off x="9235440" y="4251960"/>
-            <a:ext cx="2286000" cy="411480"/>
-          </a:xfrm>
-          <a:prstGeom prst="rect">
-            <a:avLst/>
-          </a:prstGeom>
-          <a:noFill/>
-          <a:ln/>
-        </p:spPr>
-        <p:txBody>
-          <a:bodyPr wrap="square" lIns="0" tIns="0" rIns="0" bIns="0" rtlCol="0" anchor="t"/>
-          <a:lstStyle/>
-          <a:p>
-            <a:pPr algn="ctr" indent="0" marL="0">
-              <a:buNone/>
-            </a:pPr>
-            <a:r>
-              <a:rPr lang="en-US" sz="1050" dirty="0">
-                <a:solidFill>
-                  <a:srgbClr val="567480"/>
-                </a:solidFill>
-                <a:latin typeface="Calibri" pitchFamily="34" charset="0"/>
-                <a:ea typeface="Calibri" pitchFamily="34" charset="-122"/>
-                <a:cs typeface="Calibri" pitchFamily="34" charset="-120"/>
-              </a:rPr>
-              <a:t>nodejs20 ingest</a:t>
-            </a:r>
-            <a:endParaRPr lang="en-US" sz="1050" dirty="0"/>
-          </a:p>
-        </p:txBody>
-      </p:sp>
-      <p:sp>
-        <p:nvSpPr>
-          <p:cNvPr id="21" name="Shape 19"/>
-          <p:cNvSpPr/>
-          <p:nvPr/>
-        </p:nvSpPr>
-        <p:spPr>
-          <a:xfrm>
-            <a:off x="7242048" y="4160520"/>
-            <a:ext cx="1975104" cy="0"/>
-          </a:xfrm>
-          <a:prstGeom prst="line">
-            <a:avLst/>
-          </a:prstGeom>
-          <a:noFill/>
-          <a:ln w="25400">
-            <a:solidFill>
-              <a:srgbClr val="4FA6BE"/>
-            </a:solidFill>
-            <a:prstDash val="solid"/>
-            <a:headEnd type="triangle"/>
-            <a:tailEnd type="oval"/>
-          </a:ln>
-        </p:spPr>
-      </p:sp>
-      <p:sp>
-        <p:nvSpPr>
-          <p:cNvPr id="22" name="Shape 20"/>
-          <p:cNvSpPr/>
-          <p:nvPr/>
-        </p:nvSpPr>
-        <p:spPr>
-          <a:xfrm>
-            <a:off x="4937760" y="3520440"/>
-            <a:ext cx="2286000" cy="1280160"/>
-          </a:xfrm>
-          <a:prstGeom prst="roundRect">
-            <a:avLst>
-              <a:gd name="adj" fmla="val 7143"/>
-            </a:avLst>
-          </a:prstGeom>
-          <a:solidFill>
-            <a:srgbClr val="EDF4F7"/>
-          </a:solidFill>
-          <a:ln w="19050">
-            <a:solidFill>
-              <a:srgbClr val="0F5E7E"/>
-            </a:solidFill>
-            <a:prstDash val="solid"/>
-          </a:ln>
-        </p:spPr>
-      </p:sp>
-      <p:sp>
-        <p:nvSpPr>
-          <p:cNvPr id="23" name="Shape 21"/>
-          <p:cNvSpPr/>
-          <p:nvPr/>
-        </p:nvSpPr>
-        <p:spPr>
-          <a:xfrm>
-            <a:off x="5989320" y="3685032"/>
-            <a:ext cx="182880" cy="182880"/>
-          </a:xfrm>
-          <a:prstGeom prst="ellipse">
-            <a:avLst/>
-          </a:prstGeom>
-          <a:solidFill>
-            <a:srgbClr val="0F5E7E"/>
-          </a:solidFill>
-          <a:ln/>
-        </p:spPr>
-      </p:sp>
-      <p:sp>
-        <p:nvSpPr>
-          <p:cNvPr id="24" name="Text 22"/>
-          <p:cNvSpPr/>
-          <p:nvPr/>
-        </p:nvSpPr>
-        <p:spPr>
-          <a:xfrm>
-            <a:off x="4910328" y="3904488"/>
-            <a:ext cx="2340864" cy="365760"/>
-          </a:xfrm>
-          <a:prstGeom prst="rect">
-            <a:avLst/>
-          </a:prstGeom>
-          <a:noFill/>
-          <a:ln/>
-        </p:spPr>
-        <p:txBody>
-          <a:bodyPr wrap="square" lIns="0" tIns="0" rIns="0" bIns="0" rtlCol="0" anchor="ctr"/>
-          <a:lstStyle/>
-          <a:p>
-            <a:pPr algn="ctr" indent="0" marL="0">
-              <a:buNone/>
-            </a:pPr>
-            <a:r>
-              <a:rPr lang="en-US" sz="1450" b="1" dirty="0">
-                <a:solidFill>
-                  <a:srgbClr val="102A38"/>
-                </a:solidFill>
-                <a:latin typeface="Calibri" pitchFamily="34" charset="0"/>
-                <a:ea typeface="Calibri" pitchFamily="34" charset="-122"/>
-                <a:cs typeface="Calibri" pitchFamily="34" charset="-120"/>
-              </a:rPr>
-              <a:t>DynamoDB</a:t>
-            </a:r>
-            <a:endParaRPr lang="en-US" sz="1450" dirty="0"/>
-          </a:p>
-        </p:txBody>
-      </p:sp>
-      <p:sp>
-        <p:nvSpPr>
-          <p:cNvPr id="25" name="Text 23"/>
-          <p:cNvSpPr/>
-          <p:nvPr/>
-        </p:nvSpPr>
-        <p:spPr>
-          <a:xfrm>
-            <a:off x="4937760" y="4251960"/>
-            <a:ext cx="2286000" cy="411480"/>
-          </a:xfrm>
-          <a:prstGeom prst="rect">
-            <a:avLst/>
-          </a:prstGeom>
-          <a:noFill/>
-          <a:ln/>
-        </p:spPr>
-        <p:txBody>
-          <a:bodyPr wrap="square" lIns="0" tIns="0" rIns="0" bIns="0" rtlCol="0" anchor="t"/>
-          <a:lstStyle/>
-          <a:p>
-            <a:pPr algn="ctr" indent="0" marL="0">
-              <a:buNone/>
-            </a:pPr>
-            <a:r>
-              <a:rPr lang="en-US" sz="1050" dirty="0">
-                <a:solidFill>
-                  <a:srgbClr val="567480"/>
-                </a:solidFill>
-                <a:latin typeface="Calibri" pitchFamily="34" charset="0"/>
-                <a:ea typeface="Calibri" pitchFamily="34" charset="-122"/>
-                <a:cs typeface="Calibri" pitchFamily="34" charset="-120"/>
-              </a:rPr>
-              <a:t>time-ordered store</a:t>
-            </a:r>
-            <a:endParaRPr lang="en-US" sz="1050" dirty="0"/>
-          </a:p>
-        </p:txBody>
-      </p:sp>
-      <p:sp>
-        <p:nvSpPr>
-          <p:cNvPr id="26" name="Shape 24"/>
-          <p:cNvSpPr/>
-          <p:nvPr/>
-        </p:nvSpPr>
-        <p:spPr>
-          <a:xfrm>
-            <a:off x="2944368" y="4160520"/>
-            <a:ext cx="1975104" cy="0"/>
-          </a:xfrm>
-          <a:prstGeom prst="line">
-            <a:avLst/>
-          </a:prstGeom>
-          <a:noFill/>
-          <a:ln w="25400">
-            <a:solidFill>
-              <a:srgbClr val="4FA6BE"/>
-            </a:solidFill>
-            <a:prstDash val="solid"/>
-            <a:headEnd type="triangle"/>
-            <a:tailEnd type="oval"/>
-          </a:ln>
-        </p:spPr>
-      </p:sp>
-      <p:sp>
-        <p:nvSpPr>
-          <p:cNvPr id="27" name="Shape 25"/>
-          <p:cNvSpPr/>
-          <p:nvPr/>
-        </p:nvSpPr>
-        <p:spPr>
-          <a:xfrm>
-            <a:off x="640080" y="3520440"/>
-            <a:ext cx="2286000" cy="1280160"/>
-          </a:xfrm>
-          <a:prstGeom prst="roundRect">
-            <a:avLst>
-              <a:gd name="adj" fmla="val 7143"/>
-            </a:avLst>
-          </a:prstGeom>
-          <a:solidFill>
-            <a:srgbClr val="EDF4F7"/>
-          </a:solidFill>
-          <a:ln w="19050">
-            <a:solidFill>
-              <a:srgbClr val="1E86A6"/>
-            </a:solidFill>
-            <a:prstDash val="solid"/>
-          </a:ln>
-        </p:spPr>
-      </p:sp>
-      <p:sp>
-        <p:nvSpPr>
-          <p:cNvPr id="28" name="Shape 26"/>
-          <p:cNvSpPr/>
-          <p:nvPr/>
-        </p:nvSpPr>
-        <p:spPr>
-          <a:xfrm>
-            <a:off x="1691640" y="3685032"/>
-            <a:ext cx="182880" cy="182880"/>
-          </a:xfrm>
-          <a:prstGeom prst="ellipse">
-            <a:avLst/>
-          </a:prstGeom>
-          <a:solidFill>
-            <a:srgbClr val="1E86A6"/>
-          </a:solidFill>
-          <a:ln/>
-        </p:spPr>
-      </p:sp>
-      <p:sp>
-        <p:nvSpPr>
-          <p:cNvPr id="29" name="Text 27"/>
-          <p:cNvSpPr/>
-          <p:nvPr/>
-        </p:nvSpPr>
-        <p:spPr>
-          <a:xfrm>
-            <a:off x="612648" y="3904488"/>
-            <a:ext cx="2340864" cy="365760"/>
-          </a:xfrm>
-          <a:prstGeom prst="rect">
-            <a:avLst/>
-          </a:prstGeom>
-          <a:noFill/>
-          <a:ln/>
-        </p:spPr>
-        <p:txBody>
-          <a:bodyPr wrap="square" lIns="0" tIns="0" rIns="0" bIns="0" rtlCol="0" anchor="ctr"/>
-          <a:lstStyle/>
-          <a:p>
-            <a:pPr algn="ctr" indent="0" marL="0">
-              <a:buNone/>
-            </a:pPr>
-            <a:r>
-              <a:rPr lang="en-US" sz="1450" b="1" dirty="0">
-                <a:solidFill>
-                  <a:srgbClr val="102A38"/>
-                </a:solidFill>
-                <a:latin typeface="Calibri" pitchFamily="34" charset="0"/>
-                <a:ea typeface="Calibri" pitchFamily="34" charset="-122"/>
-                <a:cs typeface="Calibri" pitchFamily="34" charset="-120"/>
-              </a:rPr>
-              <a:t>API GW + S3</a:t>
-            </a:r>
-            <a:endParaRPr lang="en-US" sz="1450" dirty="0"/>
-          </a:p>
-        </p:txBody>
-      </p:sp>
-      <p:sp>
-        <p:nvSpPr>
-          <p:cNvPr id="30" name="Text 28"/>
-          <p:cNvSpPr/>
-          <p:nvPr/>
-        </p:nvSpPr>
-        <p:spPr>
-          <a:xfrm>
-            <a:off x="640080" y="4251960"/>
-            <a:ext cx="2286000" cy="411480"/>
-          </a:xfrm>
-          <a:prstGeom prst="rect">
-            <a:avLst/>
-          </a:prstGeom>
-          <a:noFill/>
-          <a:ln/>
-        </p:spPr>
-        <p:txBody>
-          <a:bodyPr wrap="square" lIns="0" tIns="0" rIns="0" bIns="0" rtlCol="0" anchor="t"/>
-          <a:lstStyle/>
-          <a:p>
-            <a:pPr algn="ctr" indent="0" marL="0">
-              <a:buNone/>
-            </a:pPr>
-            <a:r>
-              <a:rPr lang="en-US" sz="1050" dirty="0">
-                <a:solidFill>
-                  <a:srgbClr val="567480"/>
-                </a:solidFill>
-                <a:latin typeface="Calibri" pitchFamily="34" charset="0"/>
-                <a:ea typeface="Calibri" pitchFamily="34" charset="-122"/>
-                <a:cs typeface="Calibri" pitchFamily="34" charset="-120"/>
-              </a:rPr>
-              <a:t>live dashboard</a:t>
-            </a:r>
-            <a:endParaRPr lang="en-US" sz="1050" dirty="0"/>
-          </a:p>
-        </p:txBody>
-      </p:sp>
-      <p:sp>
-        <p:nvSpPr>
-          <p:cNvPr id="31" name="Shape 29"/>
-          <p:cNvSpPr/>
-          <p:nvPr/>
-        </p:nvSpPr>
-        <p:spPr>
-          <a:xfrm>
-            <a:off x="10378440" y="3154680"/>
-            <a:ext cx="0" cy="365760"/>
+            <a:off x="2231136" y="3154680"/>
+            <a:ext cx="258409" cy="0"/>
           </a:xfrm>
           <a:prstGeom prst="line">
             <a:avLst/>
@@ -2446,7 +1721,806 @@
       </p:sp>
       <p:sp>
         <p:nvSpPr>
+          <p:cNvPr id="8" name="Shape 6"/>
+          <p:cNvSpPr/>
+          <p:nvPr/>
+        </p:nvSpPr>
+        <p:spPr>
+          <a:xfrm>
+            <a:off x="2507833" y="2468880"/>
+            <a:ext cx="1572768" cy="1371600"/>
+          </a:xfrm>
+          <a:prstGeom prst="roundRect">
+            <a:avLst>
+              <a:gd name="adj" fmla="val 6667"/>
+            </a:avLst>
+          </a:prstGeom>
+          <a:solidFill>
+            <a:srgbClr val="EDF4F7"/>
+          </a:solidFill>
+          <a:ln w="19050">
+            <a:solidFill>
+              <a:srgbClr val="4FA6BE"/>
+            </a:solidFill>
+            <a:prstDash val="solid"/>
+          </a:ln>
+        </p:spPr>
+      </p:sp>
+      <p:sp>
+        <p:nvSpPr>
+          <p:cNvPr id="9" name="Shape 7"/>
+          <p:cNvSpPr/>
+          <p:nvPr/>
+        </p:nvSpPr>
+        <p:spPr>
+          <a:xfrm>
+            <a:off x="3202777" y="2633472"/>
+            <a:ext cx="182880" cy="182880"/>
+          </a:xfrm>
+          <a:prstGeom prst="ellipse">
+            <a:avLst/>
+          </a:prstGeom>
+          <a:solidFill>
+            <a:srgbClr val="4FA6BE"/>
+          </a:solidFill>
+          <a:ln/>
+        </p:spPr>
+      </p:sp>
+      <p:sp>
+        <p:nvSpPr>
+          <p:cNvPr id="10" name="Text 8"/>
+          <p:cNvSpPr/>
+          <p:nvPr/>
+        </p:nvSpPr>
+        <p:spPr>
+          <a:xfrm>
+            <a:off x="2480401" y="2852928"/>
+            <a:ext cx="1627632" cy="365760"/>
+          </a:xfrm>
+          <a:prstGeom prst="rect">
+            <a:avLst/>
+          </a:prstGeom>
+          <a:noFill/>
+          <a:ln/>
+        </p:spPr>
+        <p:txBody>
+          <a:bodyPr wrap="square" lIns="0" tIns="0" rIns="0" bIns="0" rtlCol="0" anchor="ctr"/>
+          <a:lstStyle/>
+          <a:p>
+            <a:pPr algn="ctr" indent="0" marL="0">
+              <a:buNone/>
+            </a:pPr>
+            <a:r>
+              <a:rPr lang="en-US" sz="1450" b="1" dirty="0">
+                <a:solidFill>
+                  <a:srgbClr val="102A38"/>
+                </a:solidFill>
+                <a:latin typeface="Calibri" pitchFamily="34" charset="0"/>
+                <a:ea typeface="Calibri" pitchFamily="34" charset="-122"/>
+                <a:cs typeface="Calibri" pitchFamily="34" charset="-120"/>
+              </a:rPr>
+              <a:t>Fog gateway</a:t>
+            </a:r>
+            <a:endParaRPr lang="en-US" sz="1450" dirty="0"/>
+          </a:p>
+        </p:txBody>
+      </p:sp>
+      <p:sp>
+        <p:nvSpPr>
+          <p:cNvPr id="11" name="Text 9"/>
+          <p:cNvSpPr/>
+          <p:nvPr/>
+        </p:nvSpPr>
+        <p:spPr>
+          <a:xfrm>
+            <a:off x="2507833" y="3200400"/>
+            <a:ext cx="1572768" cy="411480"/>
+          </a:xfrm>
+          <a:prstGeom prst="rect">
+            <a:avLst/>
+          </a:prstGeom>
+          <a:noFill/>
+          <a:ln/>
+        </p:spPr>
+        <p:txBody>
+          <a:bodyPr wrap="square" lIns="0" tIns="0" rIns="0" bIns="0" rtlCol="0" anchor="t"/>
+          <a:lstStyle/>
+          <a:p>
+            <a:pPr algn="ctr" indent="0" marL="0">
+              <a:buNone/>
+            </a:pPr>
+            <a:r>
+              <a:rPr lang="en-US" sz="1050" dirty="0">
+                <a:solidFill>
+                  <a:srgbClr val="567480"/>
+                </a:solidFill>
+                <a:latin typeface="Calibri" pitchFamily="34" charset="0"/>
+                <a:ea typeface="Calibri" pitchFamily="34" charset="-122"/>
+                <a:cs typeface="Calibri" pitchFamily="34" charset="-120"/>
+              </a:rPr>
+              <a:t>windows · 4 rules</a:t>
+            </a:r>
+            <a:endParaRPr lang="en-US" sz="1050" dirty="0"/>
+          </a:p>
+        </p:txBody>
+      </p:sp>
+      <p:sp>
+        <p:nvSpPr>
+          <p:cNvPr id="12" name="Shape 10"/>
+          <p:cNvSpPr/>
+          <p:nvPr/>
+        </p:nvSpPr>
+        <p:spPr>
+          <a:xfrm>
+            <a:off x="4098889" y="3154680"/>
+            <a:ext cx="258409" cy="0"/>
+          </a:xfrm>
+          <a:prstGeom prst="line">
+            <a:avLst/>
+          </a:prstGeom>
+          <a:noFill/>
+          <a:ln w="25400">
+            <a:solidFill>
+              <a:srgbClr val="4FA6BE"/>
+            </a:solidFill>
+            <a:prstDash val="solid"/>
+            <a:tailEnd type="triangle"/>
+          </a:ln>
+        </p:spPr>
+      </p:sp>
+      <p:sp>
+        <p:nvSpPr>
+          <p:cNvPr id="13" name="Shape 11"/>
+          <p:cNvSpPr/>
+          <p:nvPr/>
+        </p:nvSpPr>
+        <p:spPr>
+          <a:xfrm>
+            <a:off x="4375587" y="2468880"/>
+            <a:ext cx="1572768" cy="1371600"/>
+          </a:xfrm>
+          <a:prstGeom prst="roundRect">
+            <a:avLst>
+              <a:gd name="adj" fmla="val 6667"/>
+            </a:avLst>
+          </a:prstGeom>
+          <a:solidFill>
+            <a:srgbClr val="EDF4F7"/>
+          </a:solidFill>
+          <a:ln w="19050">
+            <a:solidFill>
+              <a:srgbClr val="0F5E7E"/>
+            </a:solidFill>
+            <a:prstDash val="solid"/>
+          </a:ln>
+        </p:spPr>
+      </p:sp>
+      <p:sp>
+        <p:nvSpPr>
+          <p:cNvPr id="14" name="Shape 12"/>
+          <p:cNvSpPr/>
+          <p:nvPr/>
+        </p:nvSpPr>
+        <p:spPr>
+          <a:xfrm>
+            <a:off x="5070531" y="2633472"/>
+            <a:ext cx="182880" cy="182880"/>
+          </a:xfrm>
+          <a:prstGeom prst="ellipse">
+            <a:avLst/>
+          </a:prstGeom>
+          <a:solidFill>
+            <a:srgbClr val="0F5E7E"/>
+          </a:solidFill>
+          <a:ln/>
+        </p:spPr>
+      </p:sp>
+      <p:sp>
+        <p:nvSpPr>
+          <p:cNvPr id="15" name="Text 13"/>
+          <p:cNvSpPr/>
+          <p:nvPr/>
+        </p:nvSpPr>
+        <p:spPr>
+          <a:xfrm>
+            <a:off x="4348155" y="2852928"/>
+            <a:ext cx="1627632" cy="365760"/>
+          </a:xfrm>
+          <a:prstGeom prst="rect">
+            <a:avLst/>
+          </a:prstGeom>
+          <a:noFill/>
+          <a:ln/>
+        </p:spPr>
+        <p:txBody>
+          <a:bodyPr wrap="square" lIns="0" tIns="0" rIns="0" bIns="0" rtlCol="0" anchor="ctr"/>
+          <a:lstStyle/>
+          <a:p>
+            <a:pPr algn="ctr" indent="0" marL="0">
+              <a:buNone/>
+            </a:pPr>
+            <a:r>
+              <a:rPr lang="en-US" sz="1450" b="1" dirty="0">
+                <a:solidFill>
+                  <a:srgbClr val="102A38"/>
+                </a:solidFill>
+                <a:latin typeface="Calibri" pitchFamily="34" charset="0"/>
+                <a:ea typeface="Calibri" pitchFamily="34" charset="-122"/>
+                <a:cs typeface="Calibri" pitchFamily="34" charset="-120"/>
+              </a:rPr>
+              <a:t>Amazon SQS</a:t>
+            </a:r>
+            <a:endParaRPr lang="en-US" sz="1450" dirty="0"/>
+          </a:p>
+        </p:txBody>
+      </p:sp>
+      <p:sp>
+        <p:nvSpPr>
+          <p:cNvPr id="16" name="Text 14"/>
+          <p:cNvSpPr/>
+          <p:nvPr/>
+        </p:nvSpPr>
+        <p:spPr>
+          <a:xfrm>
+            <a:off x="4375587" y="3200400"/>
+            <a:ext cx="1572768" cy="411480"/>
+          </a:xfrm>
+          <a:prstGeom prst="rect">
+            <a:avLst/>
+          </a:prstGeom>
+          <a:noFill/>
+          <a:ln/>
+        </p:spPr>
+        <p:txBody>
+          <a:bodyPr wrap="square" lIns="0" tIns="0" rIns="0" bIns="0" rtlCol="0" anchor="t"/>
+          <a:lstStyle/>
+          <a:p>
+            <a:pPr algn="ctr" indent="0" marL="0">
+              <a:buNone/>
+            </a:pPr>
+            <a:r>
+              <a:rPr lang="en-US" sz="1050" dirty="0">
+                <a:solidFill>
+                  <a:srgbClr val="567480"/>
+                </a:solidFill>
+                <a:latin typeface="Calibri" pitchFamily="34" charset="0"/>
+                <a:ea typeface="Calibri" pitchFamily="34" charset="-122"/>
+                <a:cs typeface="Calibri" pitchFamily="34" charset="-120"/>
+              </a:rPr>
+              <a:t>1 batched call / cycle</a:t>
+            </a:r>
+            <a:endParaRPr lang="en-US" sz="1050" dirty="0"/>
+          </a:p>
+        </p:txBody>
+      </p:sp>
+      <p:sp>
+        <p:nvSpPr>
+          <p:cNvPr id="17" name="Shape 15"/>
+          <p:cNvSpPr/>
+          <p:nvPr/>
+        </p:nvSpPr>
+        <p:spPr>
+          <a:xfrm>
+            <a:off x="5966643" y="3154680"/>
+            <a:ext cx="258409" cy="0"/>
+          </a:xfrm>
+          <a:prstGeom prst="line">
+            <a:avLst/>
+          </a:prstGeom>
+          <a:noFill/>
+          <a:ln w="25400">
+            <a:solidFill>
+              <a:srgbClr val="4FA6BE"/>
+            </a:solidFill>
+            <a:prstDash val="solid"/>
+            <a:tailEnd type="triangle"/>
+          </a:ln>
+        </p:spPr>
+      </p:sp>
+      <p:sp>
+        <p:nvSpPr>
+          <p:cNvPr id="18" name="Shape 16"/>
+          <p:cNvSpPr/>
+          <p:nvPr/>
+        </p:nvSpPr>
+        <p:spPr>
+          <a:xfrm>
+            <a:off x="6243340" y="2468880"/>
+            <a:ext cx="1572768" cy="1371600"/>
+          </a:xfrm>
+          <a:prstGeom prst="roundRect">
+            <a:avLst>
+              <a:gd name="adj" fmla="val 6667"/>
+            </a:avLst>
+          </a:prstGeom>
+          <a:solidFill>
+            <a:srgbClr val="EDF4F7"/>
+          </a:solidFill>
+          <a:ln w="19050">
+            <a:solidFill>
+              <a:srgbClr val="0F5E7E"/>
+            </a:solidFill>
+            <a:prstDash val="solid"/>
+          </a:ln>
+        </p:spPr>
+      </p:sp>
+      <p:sp>
+        <p:nvSpPr>
+          <p:cNvPr id="19" name="Shape 17"/>
+          <p:cNvSpPr/>
+          <p:nvPr/>
+        </p:nvSpPr>
+        <p:spPr>
+          <a:xfrm>
+            <a:off x="6938284" y="2633472"/>
+            <a:ext cx="182880" cy="182880"/>
+          </a:xfrm>
+          <a:prstGeom prst="ellipse">
+            <a:avLst/>
+          </a:prstGeom>
+          <a:solidFill>
+            <a:srgbClr val="0F5E7E"/>
+          </a:solidFill>
+          <a:ln/>
+        </p:spPr>
+      </p:sp>
+      <p:sp>
+        <p:nvSpPr>
+          <p:cNvPr id="20" name="Text 18"/>
+          <p:cNvSpPr/>
+          <p:nvPr/>
+        </p:nvSpPr>
+        <p:spPr>
+          <a:xfrm>
+            <a:off x="6215908" y="2852928"/>
+            <a:ext cx="1627632" cy="365760"/>
+          </a:xfrm>
+          <a:prstGeom prst="rect">
+            <a:avLst/>
+          </a:prstGeom>
+          <a:noFill/>
+          <a:ln/>
+        </p:spPr>
+        <p:txBody>
+          <a:bodyPr wrap="square" lIns="0" tIns="0" rIns="0" bIns="0" rtlCol="0" anchor="ctr"/>
+          <a:lstStyle/>
+          <a:p>
+            <a:pPr algn="ctr" indent="0" marL="0">
+              <a:buNone/>
+            </a:pPr>
+            <a:r>
+              <a:rPr lang="en-US" sz="1450" b="1" dirty="0">
+                <a:solidFill>
+                  <a:srgbClr val="102A38"/>
+                </a:solidFill>
+                <a:latin typeface="Calibri" pitchFamily="34" charset="0"/>
+                <a:ea typeface="Calibri" pitchFamily="34" charset="-122"/>
+                <a:cs typeface="Calibri" pitchFamily="34" charset="-120"/>
+              </a:rPr>
+              <a:t>AWS Lambda</a:t>
+            </a:r>
+            <a:endParaRPr lang="en-US" sz="1450" dirty="0"/>
+          </a:p>
+        </p:txBody>
+      </p:sp>
+      <p:sp>
+        <p:nvSpPr>
+          <p:cNvPr id="21" name="Text 19"/>
+          <p:cNvSpPr/>
+          <p:nvPr/>
+        </p:nvSpPr>
+        <p:spPr>
+          <a:xfrm>
+            <a:off x="6243340" y="3200400"/>
+            <a:ext cx="1572768" cy="411480"/>
+          </a:xfrm>
+          <a:prstGeom prst="rect">
+            <a:avLst/>
+          </a:prstGeom>
+          <a:noFill/>
+          <a:ln/>
+        </p:spPr>
+        <p:txBody>
+          <a:bodyPr wrap="square" lIns="0" tIns="0" rIns="0" bIns="0" rtlCol="0" anchor="t"/>
+          <a:lstStyle/>
+          <a:p>
+            <a:pPr algn="ctr" indent="0" marL="0">
+              <a:buNone/>
+            </a:pPr>
+            <a:r>
+              <a:rPr lang="en-US" sz="1050" dirty="0">
+                <a:solidFill>
+                  <a:srgbClr val="567480"/>
+                </a:solidFill>
+                <a:latin typeface="Calibri" pitchFamily="34" charset="0"/>
+                <a:ea typeface="Calibri" pitchFamily="34" charset="-122"/>
+                <a:cs typeface="Calibri" pitchFamily="34" charset="-120"/>
+              </a:rPr>
+              <a:t>nodejs20 ingest</a:t>
+            </a:r>
+            <a:endParaRPr lang="en-US" sz="1050" dirty="0"/>
+          </a:p>
+        </p:txBody>
+      </p:sp>
+      <p:sp>
+        <p:nvSpPr>
+          <p:cNvPr id="22" name="Shape 20"/>
+          <p:cNvSpPr/>
+          <p:nvPr/>
+        </p:nvSpPr>
+        <p:spPr>
+          <a:xfrm>
+            <a:off x="7834396" y="3154680"/>
+            <a:ext cx="258409" cy="0"/>
+          </a:xfrm>
+          <a:prstGeom prst="line">
+            <a:avLst/>
+          </a:prstGeom>
+          <a:noFill/>
+          <a:ln w="25400">
+            <a:solidFill>
+              <a:srgbClr val="4FA6BE"/>
+            </a:solidFill>
+            <a:prstDash val="solid"/>
+            <a:tailEnd type="triangle"/>
+          </a:ln>
+        </p:spPr>
+      </p:sp>
+      <p:sp>
+        <p:nvSpPr>
+          <p:cNvPr id="23" name="Shape 21"/>
+          <p:cNvSpPr/>
+          <p:nvPr/>
+        </p:nvSpPr>
+        <p:spPr>
+          <a:xfrm>
+            <a:off x="8111094" y="2468880"/>
+            <a:ext cx="1572768" cy="1371600"/>
+          </a:xfrm>
+          <a:prstGeom prst="roundRect">
+            <a:avLst>
+              <a:gd name="adj" fmla="val 6667"/>
+            </a:avLst>
+          </a:prstGeom>
+          <a:solidFill>
+            <a:srgbClr val="EDF4F7"/>
+          </a:solidFill>
+          <a:ln w="19050">
+            <a:solidFill>
+              <a:srgbClr val="0F5E7E"/>
+            </a:solidFill>
+            <a:prstDash val="solid"/>
+          </a:ln>
+        </p:spPr>
+      </p:sp>
+      <p:sp>
+        <p:nvSpPr>
+          <p:cNvPr id="24" name="Shape 22"/>
+          <p:cNvSpPr/>
+          <p:nvPr/>
+        </p:nvSpPr>
+        <p:spPr>
+          <a:xfrm>
+            <a:off x="8806038" y="2633472"/>
+            <a:ext cx="182880" cy="182880"/>
+          </a:xfrm>
+          <a:prstGeom prst="ellipse">
+            <a:avLst/>
+          </a:prstGeom>
+          <a:solidFill>
+            <a:srgbClr val="0F5E7E"/>
+          </a:solidFill>
+          <a:ln/>
+        </p:spPr>
+      </p:sp>
+      <p:sp>
+        <p:nvSpPr>
+          <p:cNvPr id="25" name="Text 23"/>
+          <p:cNvSpPr/>
+          <p:nvPr/>
+        </p:nvSpPr>
+        <p:spPr>
+          <a:xfrm>
+            <a:off x="8083662" y="2852928"/>
+            <a:ext cx="1627632" cy="365760"/>
+          </a:xfrm>
+          <a:prstGeom prst="rect">
+            <a:avLst/>
+          </a:prstGeom>
+          <a:noFill/>
+          <a:ln/>
+        </p:spPr>
+        <p:txBody>
+          <a:bodyPr wrap="square" lIns="0" tIns="0" rIns="0" bIns="0" rtlCol="0" anchor="ctr"/>
+          <a:lstStyle/>
+          <a:p>
+            <a:pPr algn="ctr" indent="0" marL="0">
+              <a:buNone/>
+            </a:pPr>
+            <a:r>
+              <a:rPr lang="en-US" sz="1450" b="1" dirty="0">
+                <a:solidFill>
+                  <a:srgbClr val="102A38"/>
+                </a:solidFill>
+                <a:latin typeface="Calibri" pitchFamily="34" charset="0"/>
+                <a:ea typeface="Calibri" pitchFamily="34" charset="-122"/>
+                <a:cs typeface="Calibri" pitchFamily="34" charset="-120"/>
+              </a:rPr>
+              <a:t>DynamoDB</a:t>
+            </a:r>
+            <a:endParaRPr lang="en-US" sz="1450" dirty="0"/>
+          </a:p>
+        </p:txBody>
+      </p:sp>
+      <p:sp>
+        <p:nvSpPr>
+          <p:cNvPr id="26" name="Text 24"/>
+          <p:cNvSpPr/>
+          <p:nvPr/>
+        </p:nvSpPr>
+        <p:spPr>
+          <a:xfrm>
+            <a:off x="8111094" y="3200400"/>
+            <a:ext cx="1572768" cy="411480"/>
+          </a:xfrm>
+          <a:prstGeom prst="rect">
+            <a:avLst/>
+          </a:prstGeom>
+          <a:noFill/>
+          <a:ln/>
+        </p:spPr>
+        <p:txBody>
+          <a:bodyPr wrap="square" lIns="0" tIns="0" rIns="0" bIns="0" rtlCol="0" anchor="t"/>
+          <a:lstStyle/>
+          <a:p>
+            <a:pPr algn="ctr" indent="0" marL="0">
+              <a:buNone/>
+            </a:pPr>
+            <a:r>
+              <a:rPr lang="en-US" sz="1050" dirty="0">
+                <a:solidFill>
+                  <a:srgbClr val="567480"/>
+                </a:solidFill>
+                <a:latin typeface="Calibri" pitchFamily="34" charset="0"/>
+                <a:ea typeface="Calibri" pitchFamily="34" charset="-122"/>
+                <a:cs typeface="Calibri" pitchFamily="34" charset="-120"/>
+              </a:rPr>
+              <a:t>time-ordered store</a:t>
+            </a:r>
+            <a:endParaRPr lang="en-US" sz="1050" dirty="0"/>
+          </a:p>
+        </p:txBody>
+      </p:sp>
+      <p:sp>
+        <p:nvSpPr>
+          <p:cNvPr id="27" name="Shape 25"/>
+          <p:cNvSpPr/>
+          <p:nvPr/>
+        </p:nvSpPr>
+        <p:spPr>
+          <a:xfrm>
+            <a:off x="9702150" y="3154680"/>
+            <a:ext cx="258409" cy="0"/>
+          </a:xfrm>
+          <a:prstGeom prst="line">
+            <a:avLst/>
+          </a:prstGeom>
+          <a:noFill/>
+          <a:ln w="25400">
+            <a:solidFill>
+              <a:srgbClr val="4FA6BE"/>
+            </a:solidFill>
+            <a:prstDash val="solid"/>
+            <a:tailEnd type="triangle"/>
+          </a:ln>
+        </p:spPr>
+      </p:sp>
+      <p:sp>
+        <p:nvSpPr>
+          <p:cNvPr id="28" name="Shape 26"/>
+          <p:cNvSpPr/>
+          <p:nvPr/>
+        </p:nvSpPr>
+        <p:spPr>
+          <a:xfrm>
+            <a:off x="9978847" y="2468880"/>
+            <a:ext cx="1572768" cy="1371600"/>
+          </a:xfrm>
+          <a:prstGeom prst="roundRect">
+            <a:avLst>
+              <a:gd name="adj" fmla="val 6667"/>
+            </a:avLst>
+          </a:prstGeom>
+          <a:solidFill>
+            <a:srgbClr val="EDF4F7"/>
+          </a:solidFill>
+          <a:ln w="19050">
+            <a:solidFill>
+              <a:srgbClr val="1E86A6"/>
+            </a:solidFill>
+            <a:prstDash val="solid"/>
+          </a:ln>
+        </p:spPr>
+      </p:sp>
+      <p:sp>
+        <p:nvSpPr>
+          <p:cNvPr id="29" name="Shape 27"/>
+          <p:cNvSpPr/>
+          <p:nvPr/>
+        </p:nvSpPr>
+        <p:spPr>
+          <a:xfrm>
+            <a:off x="10673791" y="2633472"/>
+            <a:ext cx="182880" cy="182880"/>
+          </a:xfrm>
+          <a:prstGeom prst="ellipse">
+            <a:avLst/>
+          </a:prstGeom>
+          <a:solidFill>
+            <a:srgbClr val="1E86A6"/>
+          </a:solidFill>
+          <a:ln/>
+        </p:spPr>
+      </p:sp>
+      <p:sp>
+        <p:nvSpPr>
+          <p:cNvPr id="30" name="Text 28"/>
+          <p:cNvSpPr/>
+          <p:nvPr/>
+        </p:nvSpPr>
+        <p:spPr>
+          <a:xfrm>
+            <a:off x="9951415" y="2852928"/>
+            <a:ext cx="1627632" cy="365760"/>
+          </a:xfrm>
+          <a:prstGeom prst="rect">
+            <a:avLst/>
+          </a:prstGeom>
+          <a:noFill/>
+          <a:ln/>
+        </p:spPr>
+        <p:txBody>
+          <a:bodyPr wrap="square" lIns="0" tIns="0" rIns="0" bIns="0" rtlCol="0" anchor="ctr"/>
+          <a:lstStyle/>
+          <a:p>
+            <a:pPr algn="ctr" indent="0" marL="0">
+              <a:buNone/>
+            </a:pPr>
+            <a:r>
+              <a:rPr lang="en-US" sz="1450" b="1" dirty="0">
+                <a:solidFill>
+                  <a:srgbClr val="102A38"/>
+                </a:solidFill>
+                <a:latin typeface="Calibri" pitchFamily="34" charset="0"/>
+                <a:ea typeface="Calibri" pitchFamily="34" charset="-122"/>
+                <a:cs typeface="Calibri" pitchFamily="34" charset="-120"/>
+              </a:rPr>
+              <a:t>API GW + S3</a:t>
+            </a:r>
+            <a:endParaRPr lang="en-US" sz="1450" dirty="0"/>
+          </a:p>
+        </p:txBody>
+      </p:sp>
+      <p:sp>
+        <p:nvSpPr>
+          <p:cNvPr id="31" name="Text 29"/>
+          <p:cNvSpPr/>
+          <p:nvPr/>
+        </p:nvSpPr>
+        <p:spPr>
+          <a:xfrm>
+            <a:off x="9978847" y="3200400"/>
+            <a:ext cx="1572768" cy="411480"/>
+          </a:xfrm>
+          <a:prstGeom prst="rect">
+            <a:avLst/>
+          </a:prstGeom>
+          <a:noFill/>
+          <a:ln/>
+        </p:spPr>
+        <p:txBody>
+          <a:bodyPr wrap="square" lIns="0" tIns="0" rIns="0" bIns="0" rtlCol="0" anchor="t"/>
+          <a:lstStyle/>
+          <a:p>
+            <a:pPr algn="ctr" indent="0" marL="0">
+              <a:buNone/>
+            </a:pPr>
+            <a:r>
+              <a:rPr lang="en-US" sz="1050" dirty="0">
+                <a:solidFill>
+                  <a:srgbClr val="567480"/>
+                </a:solidFill>
+                <a:latin typeface="Calibri" pitchFamily="34" charset="0"/>
+                <a:ea typeface="Calibri" pitchFamily="34" charset="-122"/>
+                <a:cs typeface="Calibri" pitchFamily="34" charset="-120"/>
+              </a:rPr>
+              <a:t>live dashboard</a:t>
+            </a:r>
+            <a:endParaRPr lang="en-US" sz="1050" dirty="0"/>
+          </a:p>
+        </p:txBody>
+      </p:sp>
+      <p:sp>
+        <p:nvSpPr>
           <p:cNvPr id="32" name="Text 30"/>
+          <p:cNvSpPr/>
+          <p:nvPr/>
+        </p:nvSpPr>
+        <p:spPr>
+          <a:xfrm>
+            <a:off x="640080" y="3977640"/>
+            <a:ext cx="3440521" cy="274320"/>
+          </a:xfrm>
+          <a:prstGeom prst="rect">
+            <a:avLst/>
+          </a:prstGeom>
+          <a:noFill/>
+          <a:ln/>
+        </p:spPr>
+        <p:txBody>
+          <a:bodyPr wrap="square" rtlCol="0" anchor="ctr"/>
+          <a:lstStyle/>
+          <a:p>
+            <a:pPr algn="ctr" indent="0" marL="0">
+              <a:buNone/>
+            </a:pPr>
+            <a:r>
+              <a:rPr lang="en-US" sz="1100" b="1" spc="200" kern="0" dirty="0">
+                <a:solidFill>
+                  <a:srgbClr val="4FA6BE"/>
+                </a:solidFill>
+                <a:latin typeface="Calibri" pitchFamily="34" charset="0"/>
+                <a:ea typeface="Calibri" pitchFamily="34" charset="-122"/>
+                <a:cs typeface="Calibri" pitchFamily="34" charset="-120"/>
+              </a:rPr>
+              <a:t>EDGE</a:t>
+            </a:r>
+            <a:endParaRPr lang="en-US" sz="1100" dirty="0"/>
+          </a:p>
+        </p:txBody>
+      </p:sp>
+      <p:sp>
+        <p:nvSpPr>
+          <p:cNvPr id="33" name="Text 31"/>
+          <p:cNvSpPr/>
+          <p:nvPr/>
+        </p:nvSpPr>
+        <p:spPr>
+          <a:xfrm>
+            <a:off x="4375587" y="3977640"/>
+            <a:ext cx="7176028" cy="274320"/>
+          </a:xfrm>
+          <a:prstGeom prst="rect">
+            <a:avLst/>
+          </a:prstGeom>
+          <a:noFill/>
+          <a:ln/>
+        </p:spPr>
+        <p:txBody>
+          <a:bodyPr wrap="square" rtlCol="0" anchor="ctr"/>
+          <a:lstStyle/>
+          <a:p>
+            <a:pPr algn="ctr" indent="0" marL="0">
+              <a:buNone/>
+            </a:pPr>
+            <a:r>
+              <a:rPr lang="en-US" sz="1100" b="1" spc="200" kern="0" dirty="0">
+                <a:solidFill>
+                  <a:srgbClr val="0F5E7E"/>
+                </a:solidFill>
+                <a:latin typeface="Calibri" pitchFamily="34" charset="0"/>
+                <a:ea typeface="Calibri" pitchFamily="34" charset="-122"/>
+                <a:cs typeface="Calibri" pitchFamily="34" charset="-120"/>
+              </a:rPr>
+              <a:t>CLOUD</a:t>
+            </a:r>
+            <a:endParaRPr lang="en-US" sz="1100" dirty="0"/>
+          </a:p>
+        </p:txBody>
+      </p:sp>
+      <p:sp>
+        <p:nvSpPr>
+          <p:cNvPr id="34" name="Text 32"/>
           <p:cNvSpPr/>
           <p:nvPr/>
         </p:nvSpPr>
@@ -3116,24 +3190,59 @@
       </p:sp>
       <p:sp>
         <p:nvSpPr>
-          <p:cNvPr id="3" name="Shape 1"/>
-          <p:cNvSpPr/>
-          <p:nvPr/>
-        </p:nvSpPr>
-        <p:spPr>
-          <a:xfrm>
-            <a:off x="640080" y="1874520"/>
-            <a:ext cx="4937760" cy="4160520"/>
-          </a:xfrm>
-          <a:prstGeom prst="roundRect">
-            <a:avLst>
-              <a:gd name="adj" fmla="val 2198"/>
-            </a:avLst>
-          </a:prstGeom>
-          <a:solidFill>
-            <a:srgbClr val="EDF4F7"/>
-          </a:solidFill>
-          <a:ln w="19050">
+          <p:cNvPr id="3" name="Text 1"/>
+          <p:cNvSpPr/>
+          <p:nvPr/>
+        </p:nvSpPr>
+        <p:spPr>
+          <a:xfrm>
+            <a:off x="731520" y="1965960"/>
+            <a:ext cx="2377440" cy="548640"/>
+          </a:xfrm>
+          <a:prstGeom prst="rect">
+            <a:avLst/>
+          </a:prstGeom>
+          <a:noFill/>
+          <a:ln/>
+        </p:spPr>
+        <p:txBody>
+          <a:bodyPr wrap="square" lIns="0" tIns="0" rIns="0" bIns="0" rtlCol="0" anchor="ctr"/>
+          <a:lstStyle/>
+          <a:p>
+            <a:pPr indent="0" marL="0">
+              <a:buNone/>
+            </a:pPr>
+            <a:r>
+              <a:rPr lang="en-US" sz="2300" b="1" dirty="0">
+                <a:solidFill>
+                  <a:srgbClr val="EBB13C"/>
+                </a:solidFill>
+                <a:latin typeface="Bookman Old Style" pitchFamily="34" charset="0"/>
+                <a:ea typeface="Bookman Old Style" pitchFamily="34" charset="-122"/>
+                <a:cs typeface="Bookman Old Style" pitchFamily="34" charset="-120"/>
+              </a:rPr>
+              <a:t>Problem</a:t>
+            </a:r>
+            <a:endParaRPr lang="en-US" sz="2300" dirty="0"/>
+          </a:p>
+        </p:txBody>
+      </p:sp>
+      <p:sp>
+        <p:nvSpPr>
+          <p:cNvPr id="4" name="Shape 2"/>
+          <p:cNvSpPr/>
+          <p:nvPr/>
+        </p:nvSpPr>
+        <p:spPr>
+          <a:xfrm>
+            <a:off x="3200400" y="1920240"/>
+            <a:ext cx="0" cy="1783080"/>
+          </a:xfrm>
+          <a:prstGeom prst="line">
+            <a:avLst/>
+          </a:prstGeom>
+          <a:noFill/>
+          <a:ln w="31750">
             <a:solidFill>
               <a:srgbClr val="EBB13C"/>
             </a:solidFill>
@@ -3143,53 +3252,14 @@
       </p:sp>
       <p:sp>
         <p:nvSpPr>
-          <p:cNvPr id="4" name="Text 2"/>
-          <p:cNvSpPr/>
-          <p:nvPr/>
-        </p:nvSpPr>
-        <p:spPr>
-          <a:xfrm>
-            <a:off x="960120" y="2103120"/>
-            <a:ext cx="3657600" cy="457200"/>
-          </a:xfrm>
-          <a:prstGeom prst="rect">
-            <a:avLst/>
-          </a:prstGeom>
-          <a:noFill/>
-          <a:ln/>
-        </p:spPr>
-        <p:txBody>
-          <a:bodyPr wrap="square" lIns="0" tIns="0" rIns="0" bIns="0" rtlCol="0" anchor="ctr"/>
-          <a:lstStyle/>
-          <a:p>
-            <a:pPr indent="0" marL="0">
-              <a:buNone/>
-            </a:pPr>
-            <a:r>
-              <a:rPr lang="en-US" sz="1900" b="1" dirty="0">
-                <a:solidFill>
-                  <a:srgbClr val="EBB13C"/>
-                </a:solidFill>
-                <a:latin typeface="Bookman Old Style" pitchFamily="34" charset="0"/>
-                <a:ea typeface="Bookman Old Style" pitchFamily="34" charset="-122"/>
-                <a:cs typeface="Bookman Old Style" pitchFamily="34" charset="-120"/>
-              </a:rPr>
-              <a:t>Problem</a:t>
-            </a:r>
-            <a:endParaRPr lang="en-US" sz="1900" dirty="0"/>
-          </a:p>
-        </p:txBody>
-      </p:sp>
-      <p:sp>
-        <p:nvSpPr>
           <p:cNvPr id="5" name="Text 3"/>
           <p:cNvSpPr/>
           <p:nvPr/>
         </p:nvSpPr>
         <p:spPr>
           <a:xfrm>
-            <a:off x="960120" y="2651760"/>
-            <a:ext cx="4343400" cy="3200400"/>
+            <a:off x="3474720" y="1920240"/>
+            <a:ext cx="7955280" cy="1920240"/>
           </a:xfrm>
           <a:prstGeom prst="rect">
             <a:avLst/>
@@ -3208,7 +3278,7 @@
               <a:buNone/>
             </a:pPr>
             <a:r>
-              <a:rPr lang="en-US" sz="1350" dirty="0">
+              <a:rPr lang="en-US" sz="1450" dirty="0">
                 <a:solidFill>
                   <a:srgbClr val="102A38"/>
                 </a:solidFill>
@@ -3218,30 +3288,65 @@
               </a:rPr>
               <a:t>Two cloud-facing modules decided they must be in local testing whenever the standard access-key variable was present, and swapped in fake, emulator-only credentials. But the serverless platform always injects that same variable to deliver a function's real credentials — so in production both functions would discard their real identity and fail their first call, while every local test kept passing. The same signal meant opposite things in the two environments.</a:t>
             </a:r>
-            <a:endParaRPr lang="en-US" sz="1350" dirty="0"/>
-          </a:p>
-        </p:txBody>
-      </p:sp>
-      <p:sp>
-        <p:nvSpPr>
-          <p:cNvPr id="6" name="Shape 4"/>
-          <p:cNvSpPr/>
-          <p:nvPr/>
-        </p:nvSpPr>
-        <p:spPr>
-          <a:xfrm>
-            <a:off x="6611112" y="1874520"/>
-            <a:ext cx="4937760" cy="4160520"/>
-          </a:xfrm>
-          <a:prstGeom prst="roundRect">
-            <a:avLst>
-              <a:gd name="adj" fmla="val 2198"/>
-            </a:avLst>
-          </a:prstGeom>
-          <a:solidFill>
-            <a:srgbClr val="EDF4F7"/>
-          </a:solidFill>
-          <a:ln w="19050">
+            <a:endParaRPr lang="en-US" sz="1450" dirty="0"/>
+          </a:p>
+        </p:txBody>
+      </p:sp>
+      <p:sp>
+        <p:nvSpPr>
+          <p:cNvPr id="6" name="Text 4"/>
+          <p:cNvSpPr/>
+          <p:nvPr/>
+        </p:nvSpPr>
+        <p:spPr>
+          <a:xfrm>
+            <a:off x="731520" y="4114800"/>
+            <a:ext cx="2377440" cy="548640"/>
+          </a:xfrm>
+          <a:prstGeom prst="rect">
+            <a:avLst/>
+          </a:prstGeom>
+          <a:noFill/>
+          <a:ln/>
+        </p:spPr>
+        <p:txBody>
+          <a:bodyPr wrap="square" lIns="0" tIns="0" rIns="0" bIns="0" rtlCol="0" anchor="ctr"/>
+          <a:lstStyle/>
+          <a:p>
+            <a:pPr indent="0" marL="0">
+              <a:buNone/>
+            </a:pPr>
+            <a:r>
+              <a:rPr lang="en-US" sz="2300" b="1" dirty="0">
+                <a:solidFill>
+                  <a:srgbClr val="1E86A6"/>
+                </a:solidFill>
+                <a:latin typeface="Bookman Old Style" pitchFamily="34" charset="0"/>
+                <a:ea typeface="Bookman Old Style" pitchFamily="34" charset="-122"/>
+                <a:cs typeface="Bookman Old Style" pitchFamily="34" charset="-120"/>
+              </a:rPr>
+              <a:t>Solution</a:t>
+            </a:r>
+            <a:endParaRPr lang="en-US" sz="2300" dirty="0"/>
+          </a:p>
+        </p:txBody>
+      </p:sp>
+      <p:sp>
+        <p:nvSpPr>
+          <p:cNvPr id="7" name="Shape 5"/>
+          <p:cNvSpPr/>
+          <p:nvPr/>
+        </p:nvSpPr>
+        <p:spPr>
+          <a:xfrm>
+            <a:off x="3200400" y="4069080"/>
+            <a:ext cx="0" cy="1783080"/>
+          </a:xfrm>
+          <a:prstGeom prst="line">
+            <a:avLst/>
+          </a:prstGeom>
+          <a:noFill/>
+          <a:ln w="31750">
             <a:solidFill>
               <a:srgbClr val="1E86A6"/>
             </a:solidFill>
@@ -3251,53 +3356,14 @@
       </p:sp>
       <p:sp>
         <p:nvSpPr>
-          <p:cNvPr id="7" name="Text 5"/>
-          <p:cNvSpPr/>
-          <p:nvPr/>
-        </p:nvSpPr>
-        <p:spPr>
-          <a:xfrm>
-            <a:off x="6931152" y="2103120"/>
-            <a:ext cx="3657600" cy="457200"/>
-          </a:xfrm>
-          <a:prstGeom prst="rect">
-            <a:avLst/>
-          </a:prstGeom>
-          <a:noFill/>
-          <a:ln/>
-        </p:spPr>
-        <p:txBody>
-          <a:bodyPr wrap="square" lIns="0" tIns="0" rIns="0" bIns="0" rtlCol="0" anchor="ctr"/>
-          <a:lstStyle/>
-          <a:p>
-            <a:pPr indent="0" marL="0">
-              <a:buNone/>
-            </a:pPr>
-            <a:r>
-              <a:rPr lang="en-US" sz="1900" b="1" dirty="0">
-                <a:solidFill>
-                  <a:srgbClr val="1E86A6"/>
-                </a:solidFill>
-                <a:latin typeface="Bookman Old Style" pitchFamily="34" charset="0"/>
-                <a:ea typeface="Bookman Old Style" pitchFamily="34" charset="-122"/>
-                <a:cs typeface="Bookman Old Style" pitchFamily="34" charset="-120"/>
-              </a:rPr>
-              <a:t>Solution</a:t>
-            </a:r>
-            <a:endParaRPr lang="en-US" sz="1900" dirty="0"/>
-          </a:p>
-        </p:txBody>
-      </p:sp>
-      <p:sp>
-        <p:nvSpPr>
           <p:cNvPr id="8" name="Text 6"/>
           <p:cNvSpPr/>
           <p:nvPr/>
         </p:nvSpPr>
         <p:spPr>
           <a:xfrm>
-            <a:off x="6931152" y="2651760"/>
-            <a:ext cx="4343400" cy="3200400"/>
+            <a:off x="3474720" y="4069080"/>
+            <a:ext cx="7955280" cy="1920240"/>
           </a:xfrm>
           <a:prstGeom prst="rect">
             <a:avLst/>
@@ -3316,7 +3382,7 @@
               <a:buNone/>
             </a:pPr>
             <a:r>
-              <a:rPr lang="en-US" sz="1350" dirty="0">
+              <a:rPr lang="en-US" sz="1450" dirty="0">
                 <a:solidFill>
                   <a:srgbClr val="102A38"/>
                 </a:solidFill>
@@ -3326,29 +3392,9 @@
               </a:rPr>
               <a:t>Gate on the local-emulator endpoint variable instead — the one signal that genuinely means local. Deployed functions now fall through to the platform's default credential chain and pick up their real execution-role identity. A pre-deployment audit caught this plus two more; all three were fixed before the first deploy, and every health check was green on the first live poll.</a:t>
             </a:r>
-            <a:endParaRPr lang="en-US" sz="1350" dirty="0"/>
-          </a:p>
-        </p:txBody>
-      </p:sp>
-      <p:sp>
-        <p:nvSpPr>
-          <p:cNvPr id="9" name="Shape 7"/>
-          <p:cNvSpPr/>
-          <p:nvPr/>
-        </p:nvSpPr>
-        <p:spPr>
-          <a:xfrm>
-            <a:off x="5669280" y="3703320"/>
-            <a:ext cx="841248" cy="512064"/>
-          </a:xfrm>
-          <a:prstGeom prst="rightArrow">
-            <a:avLst/>
-          </a:prstGeom>
-          <a:solidFill>
-            <a:srgbClr val="0F5E7E"/>
-          </a:solidFill>
-          <a:ln/>
-        </p:spPr>
+            <a:endParaRPr lang="en-US" sz="1450" dirty="0"/>
+          </a:p>
+        </p:txBody>
       </p:sp>
     </p:spTree>
   </p:cSld>

--- a/ppt/VishvaksenMachana_X25173421_offshore-wind-farm.pptx
+++ b/ppt/VishvaksenMachana_X25173421_offshore-wind-farm.pptx
@@ -1578,12 +1578,12 @@
         </p:nvSpPr>
         <p:spPr>
           <a:xfrm>
-            <a:off x="640080" y="2468880"/>
-            <a:ext cx="1572768" cy="1371600"/>
+            <a:off x="640080" y="1874520"/>
+            <a:ext cx="2286000" cy="1280160"/>
           </a:xfrm>
           <a:prstGeom prst="roundRect">
             <a:avLst>
-              <a:gd name="adj" fmla="val 6667"/>
+              <a:gd name="adj" fmla="val 7143"/>
             </a:avLst>
           </a:prstGeom>
           <a:solidFill>
@@ -1605,7 +1605,7 @@
         </p:nvSpPr>
         <p:spPr>
           <a:xfrm>
-            <a:off x="1335024" y="2633472"/>
+            <a:off x="1691640" y="2039112"/>
             <a:ext cx="182880" cy="182880"/>
           </a:xfrm>
           <a:prstGeom prst="ellipse">
@@ -1625,8 +1625,8 @@
         </p:nvSpPr>
         <p:spPr>
           <a:xfrm>
-            <a:off x="612648" y="2852928"/>
-            <a:ext cx="1627632" cy="365760"/>
+            <a:off x="612648" y="2258568"/>
+            <a:ext cx="2340864" cy="365760"/>
           </a:xfrm>
           <a:prstGeom prst="rect">
             <a:avLst/>
@@ -1664,8 +1664,8 @@
         </p:nvSpPr>
         <p:spPr>
           <a:xfrm>
-            <a:off x="640080" y="3200400"/>
-            <a:ext cx="1572768" cy="411480"/>
+            <a:off x="640080" y="2606040"/>
+            <a:ext cx="2286000" cy="411480"/>
           </a:xfrm>
           <a:prstGeom prst="rect">
             <a:avLst/>
@@ -1703,8 +1703,8 @@
         </p:nvSpPr>
         <p:spPr>
           <a:xfrm>
-            <a:off x="2231136" y="3154680"/>
-            <a:ext cx="258409" cy="0"/>
+            <a:off x="2944368" y="2514600"/>
+            <a:ext cx="1975104" cy="0"/>
           </a:xfrm>
           <a:prstGeom prst="line">
             <a:avLst/>
@@ -1715,6 +1715,7 @@
               <a:srgbClr val="4FA6BE"/>
             </a:solidFill>
             <a:prstDash val="solid"/>
+            <a:headEnd type="none"/>
             <a:tailEnd type="triangle"/>
           </a:ln>
         </p:spPr>
@@ -1727,12 +1728,12 @@
         </p:nvSpPr>
         <p:spPr>
           <a:xfrm>
-            <a:off x="2507833" y="2468880"/>
-            <a:ext cx="1572768" cy="1371600"/>
+            <a:off x="4937760" y="1874520"/>
+            <a:ext cx="2286000" cy="1280160"/>
           </a:xfrm>
           <a:prstGeom prst="roundRect">
             <a:avLst>
-              <a:gd name="adj" fmla="val 6667"/>
+              <a:gd name="adj" fmla="val 7143"/>
             </a:avLst>
           </a:prstGeom>
           <a:solidFill>
@@ -1754,7 +1755,7 @@
         </p:nvSpPr>
         <p:spPr>
           <a:xfrm>
-            <a:off x="3202777" y="2633472"/>
+            <a:off x="5989320" y="2039112"/>
             <a:ext cx="182880" cy="182880"/>
           </a:xfrm>
           <a:prstGeom prst="ellipse">
@@ -1774,8 +1775,8 @@
         </p:nvSpPr>
         <p:spPr>
           <a:xfrm>
-            <a:off x="2480401" y="2852928"/>
-            <a:ext cx="1627632" cy="365760"/>
+            <a:off x="4910328" y="2258568"/>
+            <a:ext cx="2340864" cy="365760"/>
           </a:xfrm>
           <a:prstGeom prst="rect">
             <a:avLst/>
@@ -1813,8 +1814,8 @@
         </p:nvSpPr>
         <p:spPr>
           <a:xfrm>
-            <a:off x="2507833" y="3200400"/>
-            <a:ext cx="1572768" cy="411480"/>
+            <a:off x="4937760" y="2606040"/>
+            <a:ext cx="2286000" cy="411480"/>
           </a:xfrm>
           <a:prstGeom prst="rect">
             <a:avLst/>
@@ -1852,8 +1853,8 @@
         </p:nvSpPr>
         <p:spPr>
           <a:xfrm>
-            <a:off x="4098889" y="3154680"/>
-            <a:ext cx="258409" cy="0"/>
+            <a:off x="7242048" y="2514600"/>
+            <a:ext cx="1975104" cy="0"/>
           </a:xfrm>
           <a:prstGeom prst="line">
             <a:avLst/>
@@ -1864,6 +1865,7 @@
               <a:srgbClr val="4FA6BE"/>
             </a:solidFill>
             <a:prstDash val="solid"/>
+            <a:headEnd type="none"/>
             <a:tailEnd type="triangle"/>
           </a:ln>
         </p:spPr>
@@ -1876,12 +1878,12 @@
         </p:nvSpPr>
         <p:spPr>
           <a:xfrm>
-            <a:off x="4375587" y="2468880"/>
-            <a:ext cx="1572768" cy="1371600"/>
+            <a:off x="9235440" y="1874520"/>
+            <a:ext cx="2286000" cy="1280160"/>
           </a:xfrm>
           <a:prstGeom prst="roundRect">
             <a:avLst>
-              <a:gd name="adj" fmla="val 6667"/>
+              <a:gd name="adj" fmla="val 7143"/>
             </a:avLst>
           </a:prstGeom>
           <a:solidFill>
@@ -1903,7 +1905,7 @@
         </p:nvSpPr>
         <p:spPr>
           <a:xfrm>
-            <a:off x="5070531" y="2633472"/>
+            <a:off x="10287000" y="2039112"/>
             <a:ext cx="182880" cy="182880"/>
           </a:xfrm>
           <a:prstGeom prst="ellipse">
@@ -1923,8 +1925,8 @@
         </p:nvSpPr>
         <p:spPr>
           <a:xfrm>
-            <a:off x="4348155" y="2852928"/>
-            <a:ext cx="1627632" cy="365760"/>
+            <a:off x="9208008" y="2258568"/>
+            <a:ext cx="2340864" cy="365760"/>
           </a:xfrm>
           <a:prstGeom prst="rect">
             <a:avLst/>
@@ -1962,8 +1964,8 @@
         </p:nvSpPr>
         <p:spPr>
           <a:xfrm>
-            <a:off x="4375587" y="3200400"/>
-            <a:ext cx="1572768" cy="411480"/>
+            <a:off x="9235440" y="2606040"/>
+            <a:ext cx="2286000" cy="411480"/>
           </a:xfrm>
           <a:prstGeom prst="rect">
             <a:avLst/>
@@ -2001,36 +2003,12 @@
         </p:nvSpPr>
         <p:spPr>
           <a:xfrm>
-            <a:off x="5966643" y="3154680"/>
-            <a:ext cx="258409" cy="0"/>
-          </a:xfrm>
-          <a:prstGeom prst="line">
-            <a:avLst/>
-          </a:prstGeom>
-          <a:noFill/>
-          <a:ln w="25400">
-            <a:solidFill>
-              <a:srgbClr val="4FA6BE"/>
-            </a:solidFill>
-            <a:prstDash val="solid"/>
-            <a:tailEnd type="triangle"/>
-          </a:ln>
-        </p:spPr>
-      </p:sp>
-      <p:sp>
-        <p:nvSpPr>
-          <p:cNvPr id="18" name="Shape 16"/>
-          <p:cNvSpPr/>
-          <p:nvPr/>
-        </p:nvSpPr>
-        <p:spPr>
-          <a:xfrm>
-            <a:off x="6243340" y="2468880"/>
-            <a:ext cx="1572768" cy="1371600"/>
+            <a:off x="9235440" y="3520440"/>
+            <a:ext cx="2286000" cy="1280160"/>
           </a:xfrm>
           <a:prstGeom prst="roundRect">
             <a:avLst>
-              <a:gd name="adj" fmla="val 6667"/>
+              <a:gd name="adj" fmla="val 7143"/>
             </a:avLst>
           </a:prstGeom>
           <a:solidFill>
@@ -2046,13 +2024,13 @@
       </p:sp>
       <p:sp>
         <p:nvSpPr>
-          <p:cNvPr id="19" name="Shape 17"/>
-          <p:cNvSpPr/>
-          <p:nvPr/>
-        </p:nvSpPr>
-        <p:spPr>
-          <a:xfrm>
-            <a:off x="6938284" y="2633472"/>
+          <p:cNvPr id="18" name="Shape 16"/>
+          <p:cNvSpPr/>
+          <p:nvPr/>
+        </p:nvSpPr>
+        <p:spPr>
+          <a:xfrm>
+            <a:off x="10287000" y="3685032"/>
             <a:ext cx="182880" cy="182880"/>
           </a:xfrm>
           <a:prstGeom prst="ellipse">
@@ -2066,14 +2044,14 @@
       </p:sp>
       <p:sp>
         <p:nvSpPr>
-          <p:cNvPr id="20" name="Text 18"/>
-          <p:cNvSpPr/>
-          <p:nvPr/>
-        </p:nvSpPr>
-        <p:spPr>
-          <a:xfrm>
-            <a:off x="6215908" y="2852928"/>
-            <a:ext cx="1627632" cy="365760"/>
+          <p:cNvPr id="19" name="Text 17"/>
+          <p:cNvSpPr/>
+          <p:nvPr/>
+        </p:nvSpPr>
+        <p:spPr>
+          <a:xfrm>
+            <a:off x="9208008" y="3904488"/>
+            <a:ext cx="2340864" cy="365760"/>
           </a:xfrm>
           <a:prstGeom prst="rect">
             <a:avLst/>
@@ -2105,14 +2083,14 @@
       </p:sp>
       <p:sp>
         <p:nvSpPr>
-          <p:cNvPr id="21" name="Text 19"/>
-          <p:cNvSpPr/>
-          <p:nvPr/>
-        </p:nvSpPr>
-        <p:spPr>
-          <a:xfrm>
-            <a:off x="6243340" y="3200400"/>
-            <a:ext cx="1572768" cy="411480"/>
+          <p:cNvPr id="20" name="Text 18"/>
+          <p:cNvSpPr/>
+          <p:nvPr/>
+        </p:nvSpPr>
+        <p:spPr>
+          <a:xfrm>
+            <a:off x="9235440" y="4251960"/>
+            <a:ext cx="2286000" cy="411480"/>
           </a:xfrm>
           <a:prstGeom prst="rect">
             <a:avLst/>
@@ -2144,14 +2122,14 @@
       </p:sp>
       <p:sp>
         <p:nvSpPr>
-          <p:cNvPr id="22" name="Shape 20"/>
-          <p:cNvSpPr/>
-          <p:nvPr/>
-        </p:nvSpPr>
-        <p:spPr>
-          <a:xfrm>
-            <a:off x="7834396" y="3154680"/>
-            <a:ext cx="258409" cy="0"/>
+          <p:cNvPr id="21" name="Shape 19"/>
+          <p:cNvSpPr/>
+          <p:nvPr/>
+        </p:nvSpPr>
+        <p:spPr>
+          <a:xfrm>
+            <a:off x="7242048" y="4160520"/>
+            <a:ext cx="1975104" cy="0"/>
           </a:xfrm>
           <a:prstGeom prst="line">
             <a:avLst/>
@@ -2162,24 +2140,25 @@
               <a:srgbClr val="4FA6BE"/>
             </a:solidFill>
             <a:prstDash val="solid"/>
-            <a:tailEnd type="triangle"/>
+            <a:headEnd type="triangle"/>
+            <a:tailEnd type="oval"/>
           </a:ln>
         </p:spPr>
       </p:sp>
       <p:sp>
         <p:nvSpPr>
-          <p:cNvPr id="23" name="Shape 21"/>
-          <p:cNvSpPr/>
-          <p:nvPr/>
-        </p:nvSpPr>
-        <p:spPr>
-          <a:xfrm>
-            <a:off x="8111094" y="2468880"/>
-            <a:ext cx="1572768" cy="1371600"/>
+          <p:cNvPr id="22" name="Shape 20"/>
+          <p:cNvSpPr/>
+          <p:nvPr/>
+        </p:nvSpPr>
+        <p:spPr>
+          <a:xfrm>
+            <a:off x="4937760" y="3520440"/>
+            <a:ext cx="2286000" cy="1280160"/>
           </a:xfrm>
           <a:prstGeom prst="roundRect">
             <a:avLst>
-              <a:gd name="adj" fmla="val 6667"/>
+              <a:gd name="adj" fmla="val 7143"/>
             </a:avLst>
           </a:prstGeom>
           <a:solidFill>
@@ -2195,13 +2174,13 @@
       </p:sp>
       <p:sp>
         <p:nvSpPr>
-          <p:cNvPr id="24" name="Shape 22"/>
-          <p:cNvSpPr/>
-          <p:nvPr/>
-        </p:nvSpPr>
-        <p:spPr>
-          <a:xfrm>
-            <a:off x="8806038" y="2633472"/>
+          <p:cNvPr id="23" name="Shape 21"/>
+          <p:cNvSpPr/>
+          <p:nvPr/>
+        </p:nvSpPr>
+        <p:spPr>
+          <a:xfrm>
+            <a:off x="5989320" y="3685032"/>
             <a:ext cx="182880" cy="182880"/>
           </a:xfrm>
           <a:prstGeom prst="ellipse">
@@ -2215,14 +2194,14 @@
       </p:sp>
       <p:sp>
         <p:nvSpPr>
-          <p:cNvPr id="25" name="Text 23"/>
-          <p:cNvSpPr/>
-          <p:nvPr/>
-        </p:nvSpPr>
-        <p:spPr>
-          <a:xfrm>
-            <a:off x="8083662" y="2852928"/>
-            <a:ext cx="1627632" cy="365760"/>
+          <p:cNvPr id="24" name="Text 22"/>
+          <p:cNvSpPr/>
+          <p:nvPr/>
+        </p:nvSpPr>
+        <p:spPr>
+          <a:xfrm>
+            <a:off x="4910328" y="3904488"/>
+            <a:ext cx="2340864" cy="365760"/>
           </a:xfrm>
           <a:prstGeom prst="rect">
             <a:avLst/>
@@ -2254,14 +2233,14 @@
       </p:sp>
       <p:sp>
         <p:nvSpPr>
-          <p:cNvPr id="26" name="Text 24"/>
-          <p:cNvSpPr/>
-          <p:nvPr/>
-        </p:nvSpPr>
-        <p:spPr>
-          <a:xfrm>
-            <a:off x="8111094" y="3200400"/>
-            <a:ext cx="1572768" cy="411480"/>
+          <p:cNvPr id="25" name="Text 23"/>
+          <p:cNvSpPr/>
+          <p:nvPr/>
+        </p:nvSpPr>
+        <p:spPr>
+          <a:xfrm>
+            <a:off x="4937760" y="4251960"/>
+            <a:ext cx="2286000" cy="411480"/>
           </a:xfrm>
           <a:prstGeom prst="rect">
             <a:avLst/>
@@ -2293,14 +2272,14 @@
       </p:sp>
       <p:sp>
         <p:nvSpPr>
-          <p:cNvPr id="27" name="Shape 25"/>
-          <p:cNvSpPr/>
-          <p:nvPr/>
-        </p:nvSpPr>
-        <p:spPr>
-          <a:xfrm>
-            <a:off x="9702150" y="3154680"/>
-            <a:ext cx="258409" cy="0"/>
+          <p:cNvPr id="26" name="Shape 24"/>
+          <p:cNvSpPr/>
+          <p:nvPr/>
+        </p:nvSpPr>
+        <p:spPr>
+          <a:xfrm>
+            <a:off x="2944368" y="4160520"/>
+            <a:ext cx="1975104" cy="0"/>
           </a:xfrm>
           <a:prstGeom prst="line">
             <a:avLst/>
@@ -2311,24 +2290,25 @@
               <a:srgbClr val="4FA6BE"/>
             </a:solidFill>
             <a:prstDash val="solid"/>
-            <a:tailEnd type="triangle"/>
+            <a:headEnd type="triangle"/>
+            <a:tailEnd type="oval"/>
           </a:ln>
         </p:spPr>
       </p:sp>
       <p:sp>
         <p:nvSpPr>
-          <p:cNvPr id="28" name="Shape 26"/>
-          <p:cNvSpPr/>
-          <p:nvPr/>
-        </p:nvSpPr>
-        <p:spPr>
-          <a:xfrm>
-            <a:off x="9978847" y="2468880"/>
-            <a:ext cx="1572768" cy="1371600"/>
+          <p:cNvPr id="27" name="Shape 25"/>
+          <p:cNvSpPr/>
+          <p:nvPr/>
+        </p:nvSpPr>
+        <p:spPr>
+          <a:xfrm>
+            <a:off x="640080" y="3520440"/>
+            <a:ext cx="2286000" cy="1280160"/>
           </a:xfrm>
           <a:prstGeom prst="roundRect">
             <a:avLst>
-              <a:gd name="adj" fmla="val 6667"/>
+              <a:gd name="adj" fmla="val 7143"/>
             </a:avLst>
           </a:prstGeom>
           <a:solidFill>
@@ -2344,13 +2324,13 @@
       </p:sp>
       <p:sp>
         <p:nvSpPr>
-          <p:cNvPr id="29" name="Shape 27"/>
-          <p:cNvSpPr/>
-          <p:nvPr/>
-        </p:nvSpPr>
-        <p:spPr>
-          <a:xfrm>
-            <a:off x="10673791" y="2633472"/>
+          <p:cNvPr id="28" name="Shape 26"/>
+          <p:cNvSpPr/>
+          <p:nvPr/>
+        </p:nvSpPr>
+        <p:spPr>
+          <a:xfrm>
+            <a:off x="1691640" y="3685032"/>
             <a:ext cx="182880" cy="182880"/>
           </a:xfrm>
           <a:prstGeom prst="ellipse">
@@ -2364,14 +2344,14 @@
       </p:sp>
       <p:sp>
         <p:nvSpPr>
-          <p:cNvPr id="30" name="Text 28"/>
-          <p:cNvSpPr/>
-          <p:nvPr/>
-        </p:nvSpPr>
-        <p:spPr>
-          <a:xfrm>
-            <a:off x="9951415" y="2852928"/>
-            <a:ext cx="1627632" cy="365760"/>
+          <p:cNvPr id="29" name="Text 27"/>
+          <p:cNvSpPr/>
+          <p:nvPr/>
+        </p:nvSpPr>
+        <p:spPr>
+          <a:xfrm>
+            <a:off x="612648" y="3904488"/>
+            <a:ext cx="2340864" cy="365760"/>
           </a:xfrm>
           <a:prstGeom prst="rect">
             <a:avLst/>
@@ -2403,14 +2383,14 @@
       </p:sp>
       <p:sp>
         <p:nvSpPr>
-          <p:cNvPr id="31" name="Text 29"/>
-          <p:cNvSpPr/>
-          <p:nvPr/>
-        </p:nvSpPr>
-        <p:spPr>
-          <a:xfrm>
-            <a:off x="9978847" y="3200400"/>
-            <a:ext cx="1572768" cy="411480"/>
+          <p:cNvPr id="30" name="Text 28"/>
+          <p:cNvSpPr/>
+          <p:nvPr/>
+        </p:nvSpPr>
+        <p:spPr>
+          <a:xfrm>
+            <a:off x="640080" y="4251960"/>
+            <a:ext cx="2286000" cy="411480"/>
           </a:xfrm>
           <a:prstGeom prst="rect">
             <a:avLst/>
@@ -2442,85 +2422,31 @@
       </p:sp>
       <p:sp>
         <p:nvSpPr>
+          <p:cNvPr id="31" name="Shape 29"/>
+          <p:cNvSpPr/>
+          <p:nvPr/>
+        </p:nvSpPr>
+        <p:spPr>
+          <a:xfrm>
+            <a:off x="10378440" y="3154680"/>
+            <a:ext cx="0" cy="365760"/>
+          </a:xfrm>
+          <a:prstGeom prst="line">
+            <a:avLst/>
+          </a:prstGeom>
+          <a:noFill/>
+          <a:ln w="25400">
+            <a:solidFill>
+              <a:srgbClr val="4FA6BE"/>
+            </a:solidFill>
+            <a:prstDash val="solid"/>
+            <a:tailEnd type="triangle"/>
+          </a:ln>
+        </p:spPr>
+      </p:sp>
+      <p:sp>
+        <p:nvSpPr>
           <p:cNvPr id="32" name="Text 30"/>
-          <p:cNvSpPr/>
-          <p:nvPr/>
-        </p:nvSpPr>
-        <p:spPr>
-          <a:xfrm>
-            <a:off x="640080" y="3977640"/>
-            <a:ext cx="3440521" cy="274320"/>
-          </a:xfrm>
-          <a:prstGeom prst="rect">
-            <a:avLst/>
-          </a:prstGeom>
-          <a:noFill/>
-          <a:ln/>
-        </p:spPr>
-        <p:txBody>
-          <a:bodyPr wrap="square" rtlCol="0" anchor="ctr"/>
-          <a:lstStyle/>
-          <a:p>
-            <a:pPr algn="ctr" indent="0" marL="0">
-              <a:buNone/>
-            </a:pPr>
-            <a:r>
-              <a:rPr lang="en-US" sz="1100" b="1" spc="200" kern="0" dirty="0">
-                <a:solidFill>
-                  <a:srgbClr val="4FA6BE"/>
-                </a:solidFill>
-                <a:latin typeface="Calibri" pitchFamily="34" charset="0"/>
-                <a:ea typeface="Calibri" pitchFamily="34" charset="-122"/>
-                <a:cs typeface="Calibri" pitchFamily="34" charset="-120"/>
-              </a:rPr>
-              <a:t>EDGE</a:t>
-            </a:r>
-            <a:endParaRPr lang="en-US" sz="1100" dirty="0"/>
-          </a:p>
-        </p:txBody>
-      </p:sp>
-      <p:sp>
-        <p:nvSpPr>
-          <p:cNvPr id="33" name="Text 31"/>
-          <p:cNvSpPr/>
-          <p:nvPr/>
-        </p:nvSpPr>
-        <p:spPr>
-          <a:xfrm>
-            <a:off x="4375587" y="3977640"/>
-            <a:ext cx="7176028" cy="274320"/>
-          </a:xfrm>
-          <a:prstGeom prst="rect">
-            <a:avLst/>
-          </a:prstGeom>
-          <a:noFill/>
-          <a:ln/>
-        </p:spPr>
-        <p:txBody>
-          <a:bodyPr wrap="square" rtlCol="0" anchor="ctr"/>
-          <a:lstStyle/>
-          <a:p>
-            <a:pPr algn="ctr" indent="0" marL="0">
-              <a:buNone/>
-            </a:pPr>
-            <a:r>
-              <a:rPr lang="en-US" sz="1100" b="1" spc="200" kern="0" dirty="0">
-                <a:solidFill>
-                  <a:srgbClr val="0F5E7E"/>
-                </a:solidFill>
-                <a:latin typeface="Calibri" pitchFamily="34" charset="0"/>
-                <a:ea typeface="Calibri" pitchFamily="34" charset="-122"/>
-                <a:cs typeface="Calibri" pitchFamily="34" charset="-120"/>
-              </a:rPr>
-              <a:t>CLOUD</a:t>
-            </a:r>
-            <a:endParaRPr lang="en-US" sz="1100" dirty="0"/>
-          </a:p>
-        </p:txBody>
-      </p:sp>
-      <p:sp>
-        <p:nvSpPr>
-          <p:cNvPr id="34" name="Text 32"/>
           <p:cNvSpPr/>
           <p:nvPr/>
         </p:nvSpPr>
@@ -2675,8 +2601,35 @@
         </p:nvSpPr>
         <p:spPr>
           <a:xfrm>
-            <a:off x="731520" y="1965960"/>
-            <a:ext cx="685800" cy="685800"/>
+            <a:off x="640080" y="1874520"/>
+            <a:ext cx="3502152" cy="3977640"/>
+          </a:xfrm>
+          <a:prstGeom prst="roundRect">
+            <a:avLst>
+              <a:gd name="adj" fmla="val 2611"/>
+            </a:avLst>
+          </a:prstGeom>
+          <a:solidFill>
+            <a:srgbClr val="EDF4F7"/>
+          </a:solidFill>
+          <a:ln w="15240">
+            <a:solidFill>
+              <a:srgbClr val="1E86A6"/>
+            </a:solidFill>
+            <a:prstDash val="solid"/>
+          </a:ln>
+        </p:spPr>
+      </p:sp>
+      <p:sp>
+        <p:nvSpPr>
+          <p:cNvPr id="5" name="Shape 3"/>
+          <p:cNvSpPr/>
+          <p:nvPr/>
+        </p:nvSpPr>
+        <p:spPr>
+          <a:xfrm>
+            <a:off x="914400" y="2148840"/>
+            <a:ext cx="603504" cy="603504"/>
           </a:xfrm>
           <a:prstGeom prst="ellipse">
             <a:avLst/>
@@ -2689,14 +2642,14 @@
       </p:sp>
       <p:sp>
         <p:nvSpPr>
-          <p:cNvPr id="5" name="Text 3"/>
-          <p:cNvSpPr/>
-          <p:nvPr/>
-        </p:nvSpPr>
-        <p:spPr>
-          <a:xfrm>
-            <a:off x="731520" y="1965960"/>
-            <a:ext cx="685800" cy="685800"/>
+          <p:cNvPr id="6" name="Text 4"/>
+          <p:cNvSpPr/>
+          <p:nvPr/>
+        </p:nvSpPr>
+        <p:spPr>
+          <a:xfrm>
+            <a:off x="914400" y="2148840"/>
+            <a:ext cx="603504" cy="603504"/>
           </a:xfrm>
           <a:prstGeom prst="rect">
             <a:avLst/>
@@ -2712,7 +2665,7 @@
               <a:buNone/>
             </a:pPr>
             <a:r>
-              <a:rPr lang="en-US" sz="2600" b="1" dirty="0">
+              <a:rPr lang="en-US" sz="2200" b="1" dirty="0">
                 <a:solidFill>
                   <a:srgbClr val="FFFFFF"/>
                 </a:solidFill>
@@ -2722,20 +2675,20 @@
               </a:rPr>
               <a:t>1</a:t>
             </a:r>
-            <a:endParaRPr lang="en-US" sz="2600" dirty="0"/>
-          </a:p>
-        </p:txBody>
-      </p:sp>
-      <p:sp>
-        <p:nvSpPr>
-          <p:cNvPr id="6" name="Text 4"/>
-          <p:cNvSpPr/>
-          <p:nvPr/>
-        </p:nvSpPr>
-        <p:spPr>
-          <a:xfrm>
-            <a:off x="1691640" y="1920240"/>
-            <a:ext cx="9875520" cy="411480"/>
+            <a:endParaRPr lang="en-US" sz="2200" dirty="0"/>
+          </a:p>
+        </p:txBody>
+      </p:sp>
+      <p:sp>
+        <p:nvSpPr>
+          <p:cNvPr id="7" name="Text 5"/>
+          <p:cNvSpPr/>
+          <p:nvPr/>
+        </p:nvSpPr>
+        <p:spPr>
+          <a:xfrm>
+            <a:off x="914400" y="2898648"/>
+            <a:ext cx="2953512" cy="777240"/>
           </a:xfrm>
           <a:prstGeom prst="rect">
             <a:avLst/>
@@ -2751,7 +2704,7 @@
               <a:buNone/>
             </a:pPr>
             <a:r>
-              <a:rPr lang="en-US" sz="1800" b="1" dirty="0">
+              <a:rPr lang="en-US" sz="1600" b="1" dirty="0">
                 <a:solidFill>
                   <a:srgbClr val="102A38"/>
                 </a:solidFill>
@@ -2761,20 +2714,20 @@
               </a:rPr>
               <a:t>Both turbines, five metrics</a:t>
             </a:r>
-            <a:endParaRPr lang="en-US" sz="1800" dirty="0"/>
-          </a:p>
-        </p:txBody>
-      </p:sp>
-      <p:sp>
-        <p:nvSpPr>
-          <p:cNvPr id="7" name="Text 5"/>
-          <p:cNvSpPr/>
-          <p:nvPr/>
-        </p:nvSpPr>
-        <p:spPr>
-          <a:xfrm>
-            <a:off x="1691640" y="2340864"/>
-            <a:ext cx="9875520" cy="640080"/>
+            <a:endParaRPr lang="en-US" sz="1600" dirty="0"/>
+          </a:p>
+        </p:txBody>
+      </p:sp>
+      <p:sp>
+        <p:nvSpPr>
+          <p:cNvPr id="8" name="Text 6"/>
+          <p:cNvSpPr/>
+          <p:nvPr/>
+        </p:nvSpPr>
+        <p:spPr>
+          <a:xfrm>
+            <a:off x="914400" y="3657600"/>
+            <a:ext cx="2953512" cy="2011680"/>
           </a:xfrm>
           <a:prstGeom prst="rect">
             <a:avLst/>
@@ -2787,10 +2740,13 @@
           <a:lstStyle/>
           <a:p>
             <a:pPr indent="0" marL="0">
+              <a:lnSpc>
+                <a:spcPct val="106000"/>
+              </a:lnSpc>
               <a:buNone/>
             </a:pPr>
             <a:r>
-              <a:rPr lang="en-US" sz="1350" dirty="0">
+              <a:rPr lang="en-US" sz="1250" dirty="0">
                 <a:solidFill>
                   <a:srgbClr val="567480"/>
                 </a:solidFill>
@@ -2800,20 +2756,47 @@
               </a:rPr>
               <a:t>Wind speed, blade vibration, generator temperature, power output and gearbox pressure live for both turbines.</a:t>
             </a:r>
-            <a:endParaRPr lang="en-US" sz="1350" dirty="0"/>
-          </a:p>
-        </p:txBody>
-      </p:sp>
-      <p:sp>
-        <p:nvSpPr>
-          <p:cNvPr id="8" name="Shape 6"/>
-          <p:cNvSpPr/>
-          <p:nvPr/>
-        </p:nvSpPr>
-        <p:spPr>
-          <a:xfrm>
-            <a:off x="731520" y="3383280"/>
-            <a:ext cx="685800" cy="685800"/>
+            <a:endParaRPr lang="en-US" sz="1250" dirty="0"/>
+          </a:p>
+        </p:txBody>
+      </p:sp>
+      <p:sp>
+        <p:nvSpPr>
+          <p:cNvPr id="9" name="Shape 7"/>
+          <p:cNvSpPr/>
+          <p:nvPr/>
+        </p:nvSpPr>
+        <p:spPr>
+          <a:xfrm>
+            <a:off x="4416552" y="1874520"/>
+            <a:ext cx="3502152" cy="3977640"/>
+          </a:xfrm>
+          <a:prstGeom prst="roundRect">
+            <a:avLst>
+              <a:gd name="adj" fmla="val 2611"/>
+            </a:avLst>
+          </a:prstGeom>
+          <a:solidFill>
+            <a:srgbClr val="EDF4F7"/>
+          </a:solidFill>
+          <a:ln w="15240">
+            <a:solidFill>
+              <a:srgbClr val="1E86A6"/>
+            </a:solidFill>
+            <a:prstDash val="solid"/>
+          </a:ln>
+        </p:spPr>
+      </p:sp>
+      <p:sp>
+        <p:nvSpPr>
+          <p:cNvPr id="10" name="Shape 8"/>
+          <p:cNvSpPr/>
+          <p:nvPr/>
+        </p:nvSpPr>
+        <p:spPr>
+          <a:xfrm>
+            <a:off x="4690872" y="2148840"/>
+            <a:ext cx="603504" cy="603504"/>
           </a:xfrm>
           <a:prstGeom prst="ellipse">
             <a:avLst/>
@@ -2826,14 +2809,14 @@
       </p:sp>
       <p:sp>
         <p:nvSpPr>
-          <p:cNvPr id="9" name="Text 7"/>
-          <p:cNvSpPr/>
-          <p:nvPr/>
-        </p:nvSpPr>
-        <p:spPr>
-          <a:xfrm>
-            <a:off x="731520" y="3383280"/>
-            <a:ext cx="685800" cy="685800"/>
+          <p:cNvPr id="11" name="Text 9"/>
+          <p:cNvSpPr/>
+          <p:nvPr/>
+        </p:nvSpPr>
+        <p:spPr>
+          <a:xfrm>
+            <a:off x="4690872" y="2148840"/>
+            <a:ext cx="603504" cy="603504"/>
           </a:xfrm>
           <a:prstGeom prst="rect">
             <a:avLst/>
@@ -2849,7 +2832,7 @@
               <a:buNone/>
             </a:pPr>
             <a:r>
-              <a:rPr lang="en-US" sz="2600" b="1" dirty="0">
+              <a:rPr lang="en-US" sz="2200" b="1" dirty="0">
                 <a:solidFill>
                   <a:srgbClr val="FFFFFF"/>
                 </a:solidFill>
@@ -2859,20 +2842,20 @@
               </a:rPr>
               <a:t>2</a:t>
             </a:r>
-            <a:endParaRPr lang="en-US" sz="2600" dirty="0"/>
-          </a:p>
-        </p:txBody>
-      </p:sp>
-      <p:sp>
-        <p:nvSpPr>
-          <p:cNvPr id="10" name="Text 8"/>
-          <p:cNvSpPr/>
-          <p:nvPr/>
-        </p:nvSpPr>
-        <p:spPr>
-          <a:xfrm>
-            <a:off x="1691640" y="3337560"/>
-            <a:ext cx="9875520" cy="411480"/>
+            <a:endParaRPr lang="en-US" sz="2200" dirty="0"/>
+          </a:p>
+        </p:txBody>
+      </p:sp>
+      <p:sp>
+        <p:nvSpPr>
+          <p:cNvPr id="12" name="Text 10"/>
+          <p:cNvSpPr/>
+          <p:nvPr/>
+        </p:nvSpPr>
+        <p:spPr>
+          <a:xfrm>
+            <a:off x="4690872" y="2898648"/>
+            <a:ext cx="2953512" cy="777240"/>
           </a:xfrm>
           <a:prstGeom prst="rect">
             <a:avLst/>
@@ -2888,7 +2871,7 @@
               <a:buNone/>
             </a:pPr>
             <a:r>
-              <a:rPr lang="en-US" sz="1800" b="1" dirty="0">
+              <a:rPr lang="en-US" sz="1600" b="1" dirty="0">
                 <a:solidFill>
                   <a:srgbClr val="102A38"/>
                 </a:solidFill>
@@ -2898,20 +2881,20 @@
               </a:rPr>
               <a:t>Gearbox pressure on the window minimum</a:t>
             </a:r>
-            <a:endParaRPr lang="en-US" sz="1800" dirty="0"/>
-          </a:p>
-        </p:txBody>
-      </p:sp>
-      <p:sp>
-        <p:nvSpPr>
-          <p:cNvPr id="11" name="Text 9"/>
-          <p:cNvSpPr/>
-          <p:nvPr/>
-        </p:nvSpPr>
-        <p:spPr>
-          <a:xfrm>
-            <a:off x="1691640" y="3758184"/>
-            <a:ext cx="9875520" cy="640080"/>
+            <a:endParaRPr lang="en-US" sz="1600" dirty="0"/>
+          </a:p>
+        </p:txBody>
+      </p:sp>
+      <p:sp>
+        <p:nvSpPr>
+          <p:cNvPr id="13" name="Text 11"/>
+          <p:cNvSpPr/>
+          <p:nvPr/>
+        </p:nvSpPr>
+        <p:spPr>
+          <a:xfrm>
+            <a:off x="4690872" y="3657600"/>
+            <a:ext cx="2953512" cy="2011680"/>
           </a:xfrm>
           <a:prstGeom prst="rect">
             <a:avLst/>
@@ -2924,10 +2907,13 @@
           <a:lstStyle/>
           <a:p>
             <a:pPr indent="0" marL="0">
+              <a:lnSpc>
+                <a:spcPct val="106000"/>
+              </a:lnSpc>
               <a:buNone/>
             </a:pPr>
             <a:r>
-              <a:rPr lang="en-US" sz="1350" dirty="0">
+              <a:rPr lang="en-US" sz="1250" dirty="0">
                 <a:solidFill>
                   <a:srgbClr val="567480"/>
                 </a:solidFill>
@@ -2937,20 +2923,47 @@
               </a:rPr>
               <a:t>A momentary dip below 2.5 bar is a lubrication fault — the rule reads the worst reading in each window, so a single dip cannot hide in an average.</a:t>
             </a:r>
-            <a:endParaRPr lang="en-US" sz="1350" dirty="0"/>
-          </a:p>
-        </p:txBody>
-      </p:sp>
-      <p:sp>
-        <p:nvSpPr>
-          <p:cNvPr id="12" name="Shape 10"/>
-          <p:cNvSpPr/>
-          <p:nvPr/>
-        </p:nvSpPr>
-        <p:spPr>
-          <a:xfrm>
-            <a:off x="731520" y="4800600"/>
-            <a:ext cx="685800" cy="685800"/>
+            <a:endParaRPr lang="en-US" sz="1250" dirty="0"/>
+          </a:p>
+        </p:txBody>
+      </p:sp>
+      <p:sp>
+        <p:nvSpPr>
+          <p:cNvPr id="14" name="Shape 12"/>
+          <p:cNvSpPr/>
+          <p:nvPr/>
+        </p:nvSpPr>
+        <p:spPr>
+          <a:xfrm>
+            <a:off x="8193024" y="1874520"/>
+            <a:ext cx="3502152" cy="3977640"/>
+          </a:xfrm>
+          <a:prstGeom prst="roundRect">
+            <a:avLst>
+              <a:gd name="adj" fmla="val 2611"/>
+            </a:avLst>
+          </a:prstGeom>
+          <a:solidFill>
+            <a:srgbClr val="EDF4F7"/>
+          </a:solidFill>
+          <a:ln w="15240">
+            <a:solidFill>
+              <a:srgbClr val="1E86A6"/>
+            </a:solidFill>
+            <a:prstDash val="solid"/>
+          </a:ln>
+        </p:spPr>
+      </p:sp>
+      <p:sp>
+        <p:nvSpPr>
+          <p:cNvPr id="15" name="Shape 13"/>
+          <p:cNvSpPr/>
+          <p:nvPr/>
+        </p:nvSpPr>
+        <p:spPr>
+          <a:xfrm>
+            <a:off x="8467344" y="2148840"/>
+            <a:ext cx="603504" cy="603504"/>
           </a:xfrm>
           <a:prstGeom prst="ellipse">
             <a:avLst/>
@@ -2963,14 +2976,14 @@
       </p:sp>
       <p:sp>
         <p:nvSpPr>
-          <p:cNvPr id="13" name="Text 11"/>
-          <p:cNvSpPr/>
-          <p:nvPr/>
-        </p:nvSpPr>
-        <p:spPr>
-          <a:xfrm>
-            <a:off x="731520" y="4800600"/>
-            <a:ext cx="685800" cy="685800"/>
+          <p:cNvPr id="16" name="Text 14"/>
+          <p:cNvSpPr/>
+          <p:nvPr/>
+        </p:nvSpPr>
+        <p:spPr>
+          <a:xfrm>
+            <a:off x="8467344" y="2148840"/>
+            <a:ext cx="603504" cy="603504"/>
           </a:xfrm>
           <a:prstGeom prst="rect">
             <a:avLst/>
@@ -2986,7 +2999,7 @@
               <a:buNone/>
             </a:pPr>
             <a:r>
-              <a:rPr lang="en-US" sz="2600" b="1" dirty="0">
+              <a:rPr lang="en-US" sz="2200" b="1" dirty="0">
                 <a:solidFill>
                   <a:srgbClr val="FFFFFF"/>
                 </a:solidFill>
@@ -2996,20 +3009,20 @@
               </a:rPr>
               <a:t>3</a:t>
             </a:r>
-            <a:endParaRPr lang="en-US" sz="2600" dirty="0"/>
-          </a:p>
-        </p:txBody>
-      </p:sp>
-      <p:sp>
-        <p:nvSpPr>
-          <p:cNvPr id="14" name="Text 12"/>
-          <p:cNvSpPr/>
-          <p:nvPr/>
-        </p:nvSpPr>
-        <p:spPr>
-          <a:xfrm>
-            <a:off x="1691640" y="4754880"/>
-            <a:ext cx="9875520" cy="411480"/>
+            <a:endParaRPr lang="en-US" sz="2200" dirty="0"/>
+          </a:p>
+        </p:txBody>
+      </p:sp>
+      <p:sp>
+        <p:nvSpPr>
+          <p:cNvPr id="17" name="Text 15"/>
+          <p:cNvSpPr/>
+          <p:nvPr/>
+        </p:nvSpPr>
+        <p:spPr>
+          <a:xfrm>
+            <a:off x="8467344" y="2898648"/>
+            <a:ext cx="2953512" cy="777240"/>
           </a:xfrm>
           <a:prstGeom prst="rect">
             <a:avLst/>
@@ -3025,7 +3038,7 @@
               <a:buNone/>
             </a:pPr>
             <a:r>
-              <a:rPr lang="en-US" sz="1800" b="1" dirty="0">
+              <a:rPr lang="en-US" sz="1600" b="1" dirty="0">
                 <a:solidFill>
                   <a:srgbClr val="102A38"/>
                 </a:solidFill>
@@ -3035,20 +3048,20 @@
               </a:rPr>
               <a:t>A cross-turbine power trend, climbing live</a:t>
             </a:r>
-            <a:endParaRPr lang="en-US" sz="1800" dirty="0"/>
-          </a:p>
-        </p:txBody>
-      </p:sp>
-      <p:sp>
-        <p:nvSpPr>
-          <p:cNvPr id="15" name="Text 13"/>
-          <p:cNvSpPr/>
-          <p:nvPr/>
-        </p:nvSpPr>
-        <p:spPr>
-          <a:xfrm>
-            <a:off x="1691640" y="5175504"/>
-            <a:ext cx="9875520" cy="640080"/>
+            <a:endParaRPr lang="en-US" sz="1600" dirty="0"/>
+          </a:p>
+        </p:txBody>
+      </p:sp>
+      <p:sp>
+        <p:nvSpPr>
+          <p:cNvPr id="18" name="Text 16"/>
+          <p:cNvSpPr/>
+          <p:nvPr/>
+        </p:nvSpPr>
+        <p:spPr>
+          <a:xfrm>
+            <a:off x="8467344" y="3657600"/>
+            <a:ext cx="2953512" cy="2011680"/>
           </a:xfrm>
           <a:prstGeom prst="rect">
             <a:avLst/>
@@ -3061,10 +3074,13 @@
           <a:lstStyle/>
           <a:p>
             <a:pPr indent="0" marL="0">
+              <a:lnSpc>
+                <a:spcPct val="106000"/>
+              </a:lnSpc>
               <a:buNone/>
             </a:pPr>
             <a:r>
-              <a:rPr lang="en-US" sz="1350" dirty="0">
+              <a:rPr lang="en-US" sz="1250" dirty="0">
                 <a:solidFill>
                   <a:srgbClr val="567480"/>
                 </a:solidFill>
@@ -3074,46 +3090,7 @@
               </a:rPr>
               <a:t>The power chart tracks both turbines together, and the stored count climbs 17 to 132 to 204 across refreshes, so the data is genuinely live.</a:t>
             </a:r>
-            <a:endParaRPr lang="en-US" sz="1350" dirty="0"/>
-          </a:p>
-        </p:txBody>
-      </p:sp>
-      <p:sp>
-        <p:nvSpPr>
-          <p:cNvPr id="16" name="Text 14"/>
-          <p:cNvSpPr/>
-          <p:nvPr/>
-        </p:nvSpPr>
-        <p:spPr>
-          <a:xfrm>
-            <a:off x="640080" y="6263640"/>
-            <a:ext cx="10972800" cy="365760"/>
-          </a:xfrm>
-          <a:prstGeom prst="rect">
-            <a:avLst/>
-          </a:prstGeom>
-          <a:noFill/>
-          <a:ln/>
-        </p:spPr>
-        <p:txBody>
-          <a:bodyPr wrap="square" rtlCol="0" anchor="ctr"/>
-          <a:lstStyle/>
-          <a:p>
-            <a:pPr indent="0" marL="0">
-              <a:buNone/>
-            </a:pPr>
-            <a:r>
-              <a:rPr lang="en-US" sz="1300" i="1" dirty="0">
-                <a:solidFill>
-                  <a:srgbClr val="4FA6BE"/>
-                </a:solidFill>
-                <a:latin typeface="Calibri" pitchFamily="34" charset="0"/>
-                <a:ea typeface="Calibri" pitchFamily="34" charset="-122"/>
-                <a:cs typeface="Calibri" pitchFamily="34" charset="-120"/>
-              </a:rPr>
-              <a:t>Switch to the live dashboard here — backup video ready.</a:t>
-            </a:r>
-            <a:endParaRPr lang="en-US" sz="1300" dirty="0"/>
+            <a:endParaRPr lang="en-US" sz="1250" dirty="0"/>
           </a:p>
         </p:txBody>
       </p:sp>
@@ -3190,14 +3167,41 @@
       </p:sp>
       <p:sp>
         <p:nvSpPr>
-          <p:cNvPr id="3" name="Text 1"/>
-          <p:cNvSpPr/>
-          <p:nvPr/>
-        </p:nvSpPr>
-        <p:spPr>
-          <a:xfrm>
-            <a:off x="731520" y="1965960"/>
-            <a:ext cx="2377440" cy="548640"/>
+          <p:cNvPr id="3" name="Shape 1"/>
+          <p:cNvSpPr/>
+          <p:nvPr/>
+        </p:nvSpPr>
+        <p:spPr>
+          <a:xfrm>
+            <a:off x="731520" y="1920240"/>
+            <a:ext cx="10698480" cy="1965960"/>
+          </a:xfrm>
+          <a:prstGeom prst="roundRect">
+            <a:avLst>
+              <a:gd name="adj" fmla="val 4651"/>
+            </a:avLst>
+          </a:prstGeom>
+          <a:solidFill>
+            <a:srgbClr val="EDF4F7"/>
+          </a:solidFill>
+          <a:ln w="19050">
+            <a:solidFill>
+              <a:srgbClr val="EBB13C"/>
+            </a:solidFill>
+            <a:prstDash val="solid"/>
+          </a:ln>
+        </p:spPr>
+      </p:sp>
+      <p:sp>
+        <p:nvSpPr>
+          <p:cNvPr id="4" name="Text 2"/>
+          <p:cNvSpPr/>
+          <p:nvPr/>
+        </p:nvSpPr>
+        <p:spPr>
+          <a:xfrm>
+            <a:off x="1005840" y="2103120"/>
+            <a:ext cx="3657600" cy="457200"/>
           </a:xfrm>
           <a:prstGeom prst="rect">
             <a:avLst/>
@@ -3213,7 +3217,7 @@
               <a:buNone/>
             </a:pPr>
             <a:r>
-              <a:rPr lang="en-US" sz="2300" b="1" dirty="0">
+              <a:rPr lang="en-US" sz="1900" b="1" dirty="0">
                 <a:solidFill>
                   <a:srgbClr val="EBB13C"/>
                 </a:solidFill>
@@ -3223,32 +3227,9 @@
               </a:rPr>
               <a:t>Problem</a:t>
             </a:r>
-            <a:endParaRPr lang="en-US" sz="2300" dirty="0"/>
-          </a:p>
-        </p:txBody>
-      </p:sp>
-      <p:sp>
-        <p:nvSpPr>
-          <p:cNvPr id="4" name="Shape 2"/>
-          <p:cNvSpPr/>
-          <p:nvPr/>
-        </p:nvSpPr>
-        <p:spPr>
-          <a:xfrm>
-            <a:off x="3200400" y="1920240"/>
-            <a:ext cx="0" cy="1783080"/>
-          </a:xfrm>
-          <a:prstGeom prst="line">
-            <a:avLst/>
-          </a:prstGeom>
-          <a:noFill/>
-          <a:ln w="31750">
-            <a:solidFill>
-              <a:srgbClr val="EBB13C"/>
-            </a:solidFill>
-            <a:prstDash val="solid"/>
-          </a:ln>
-        </p:spPr>
+            <a:endParaRPr lang="en-US" sz="1900" dirty="0"/>
+          </a:p>
+        </p:txBody>
       </p:sp>
       <p:sp>
         <p:nvSpPr>
@@ -3258,8 +3239,8 @@
         </p:nvSpPr>
         <p:spPr>
           <a:xfrm>
-            <a:off x="3474720" y="1920240"/>
-            <a:ext cx="7955280" cy="1920240"/>
+            <a:off x="1005840" y="2578608"/>
+            <a:ext cx="9966960" cy="1188720"/>
           </a:xfrm>
           <a:prstGeom prst="rect">
             <a:avLst/>
@@ -3273,12 +3254,12 @@
           <a:p>
             <a:pPr indent="0" marL="0">
               <a:lnSpc>
-                <a:spcPct val="112000"/>
+                <a:spcPct val="105000"/>
               </a:lnSpc>
               <a:buNone/>
             </a:pPr>
             <a:r>
-              <a:rPr lang="en-US" sz="1450" dirty="0">
+              <a:rPr lang="en-US" sz="1300" dirty="0">
                 <a:solidFill>
                   <a:srgbClr val="102A38"/>
                 </a:solidFill>
@@ -3288,20 +3269,47 @@
               </a:rPr>
               <a:t>Two cloud-facing modules decided they must be in local testing whenever the standard access-key variable was present, and swapped in fake, emulator-only credentials. But the serverless platform always injects that same variable to deliver a function's real credentials — so in production both functions would discard their real identity and fail their first call, while every local test kept passing. The same signal meant opposite things in the two environments.</a:t>
             </a:r>
-            <a:endParaRPr lang="en-US" sz="1450" dirty="0"/>
-          </a:p>
-        </p:txBody>
-      </p:sp>
-      <p:sp>
-        <p:nvSpPr>
-          <p:cNvPr id="6" name="Text 4"/>
-          <p:cNvSpPr/>
-          <p:nvPr/>
-        </p:nvSpPr>
-        <p:spPr>
-          <a:xfrm>
-            <a:off x="731520" y="4114800"/>
-            <a:ext cx="2377440" cy="548640"/>
+            <a:endParaRPr lang="en-US" sz="1300" dirty="0"/>
+          </a:p>
+        </p:txBody>
+      </p:sp>
+      <p:sp>
+        <p:nvSpPr>
+          <p:cNvPr id="6" name="Shape 4"/>
+          <p:cNvSpPr/>
+          <p:nvPr/>
+        </p:nvSpPr>
+        <p:spPr>
+          <a:xfrm>
+            <a:off x="731520" y="4041648"/>
+            <a:ext cx="10698480" cy="1965960"/>
+          </a:xfrm>
+          <a:prstGeom prst="roundRect">
+            <a:avLst>
+              <a:gd name="adj" fmla="val 4651"/>
+            </a:avLst>
+          </a:prstGeom>
+          <a:solidFill>
+            <a:srgbClr val="EDF4F7"/>
+          </a:solidFill>
+          <a:ln w="19050">
+            <a:solidFill>
+              <a:srgbClr val="1E86A6"/>
+            </a:solidFill>
+            <a:prstDash val="solid"/>
+          </a:ln>
+        </p:spPr>
+      </p:sp>
+      <p:sp>
+        <p:nvSpPr>
+          <p:cNvPr id="7" name="Text 5"/>
+          <p:cNvSpPr/>
+          <p:nvPr/>
+        </p:nvSpPr>
+        <p:spPr>
+          <a:xfrm>
+            <a:off x="1005840" y="4224528"/>
+            <a:ext cx="3657600" cy="457200"/>
           </a:xfrm>
           <a:prstGeom prst="rect">
             <a:avLst/>
@@ -3317,7 +3325,7 @@
               <a:buNone/>
             </a:pPr>
             <a:r>
-              <a:rPr lang="en-US" sz="2300" b="1" dirty="0">
+              <a:rPr lang="en-US" sz="1900" b="1" dirty="0">
                 <a:solidFill>
                   <a:srgbClr val="1E86A6"/>
                 </a:solidFill>
@@ -3327,32 +3335,9 @@
               </a:rPr>
               <a:t>Solution</a:t>
             </a:r>
-            <a:endParaRPr lang="en-US" sz="2300" dirty="0"/>
-          </a:p>
-        </p:txBody>
-      </p:sp>
-      <p:sp>
-        <p:nvSpPr>
-          <p:cNvPr id="7" name="Shape 5"/>
-          <p:cNvSpPr/>
-          <p:nvPr/>
-        </p:nvSpPr>
-        <p:spPr>
-          <a:xfrm>
-            <a:off x="3200400" y="4069080"/>
-            <a:ext cx="0" cy="1783080"/>
-          </a:xfrm>
-          <a:prstGeom prst="line">
-            <a:avLst/>
-          </a:prstGeom>
-          <a:noFill/>
-          <a:ln w="31750">
-            <a:solidFill>
-              <a:srgbClr val="1E86A6"/>
-            </a:solidFill>
-            <a:prstDash val="solid"/>
-          </a:ln>
-        </p:spPr>
+            <a:endParaRPr lang="en-US" sz="1900" dirty="0"/>
+          </a:p>
+        </p:txBody>
       </p:sp>
       <p:sp>
         <p:nvSpPr>
@@ -3362,8 +3347,8 @@
         </p:nvSpPr>
         <p:spPr>
           <a:xfrm>
-            <a:off x="3474720" y="4069080"/>
-            <a:ext cx="7955280" cy="1920240"/>
+            <a:off x="1005840" y="4700016"/>
+            <a:ext cx="9966960" cy="1188720"/>
           </a:xfrm>
           <a:prstGeom prst="rect">
             <a:avLst/>
@@ -3377,12 +3362,12 @@
           <a:p>
             <a:pPr indent="0" marL="0">
               <a:lnSpc>
-                <a:spcPct val="112000"/>
+                <a:spcPct val="105000"/>
               </a:lnSpc>
               <a:buNone/>
             </a:pPr>
             <a:r>
-              <a:rPr lang="en-US" sz="1450" dirty="0">
+              <a:rPr lang="en-US" sz="1300" dirty="0">
                 <a:solidFill>
                   <a:srgbClr val="102A38"/>
                 </a:solidFill>
@@ -3392,7 +3377,7 @@
               </a:rPr>
               <a:t>Gate on the local-emulator endpoint variable instead — the one signal that genuinely means local. Deployed functions now fall through to the platform's default credential chain and pick up their real execution-role identity. A pre-deployment audit caught this plus two more; all three were fixed before the first deploy, and every health check was green on the first live poll.</a:t>
             </a:r>
-            <a:endParaRPr lang="en-US" sz="1450" dirty="0"/>
+            <a:endParaRPr lang="en-US" sz="1300" dirty="0"/>
           </a:p>
         </p:txBody>
       </p:sp>

--- a/ppt/VishvaksenMachana_X25173421_offshore-wind-farm.pptx
+++ b/ppt/VishvaksenMachana_X25173421_offshore-wind-farm.pptx
@@ -1484,17 +1484,6 @@
             <a:pPr indent="0" marL="0">
               <a:buNone/>
             </a:pPr>
-            <a:r>
-              <a:rPr lang="en-US" sz="1300" dirty="0">
-                <a:solidFill>
-                  <a:srgbClr val="567480"/>
-                </a:solidFill>
-                <a:latin typeface="Calibri" pitchFamily="34" charset="0"/>
-                <a:ea typeface="Calibri" pitchFamily="34" charset="-122"/>
-                <a:cs typeface="Calibri" pitchFamily="34" charset="-120"/>
-              </a:rPr>
-              <a:t>Fog &amp; Edge Computing (H9FECC)   ·   deployed live on AWS</a:t>
-            </a:r>
             <a:endParaRPr lang="en-US" sz="1300" dirty="0"/>
           </a:p>
         </p:txBody>

--- a/ppt/VishvaksenMachana_X25173421_offshore-wind-farm.pptx
+++ b/ppt/VishvaksenMachana_X25173421_offshore-wind-farm.pptx
@@ -1124,7 +1124,7 @@
     <p:bg>
       <p:bgPr>
         <a:solidFill>
-          <a:srgbClr val="0E2A3A"/>
+          <a:srgbClr val="0A2540"/>
         </a:solidFill>
       </p:bgPr>
     </p:bg>
@@ -1144,14 +1144,80 @@
       </p:grpSpPr>
       <p:sp>
         <p:nvSpPr>
-          <p:cNvPr id="2" name="Text 0"/>
-          <p:cNvSpPr/>
-          <p:nvPr/>
-        </p:nvSpPr>
-        <p:spPr>
-          <a:xfrm>
-            <a:off x="640080" y="914400"/>
-            <a:ext cx="10972800" cy="1280160"/>
+          <p:cNvPr id="2" name="Shape 0"/>
+          <p:cNvSpPr/>
+          <p:nvPr/>
+        </p:nvSpPr>
+        <p:spPr>
+          <a:xfrm>
+            <a:off x="9265615" y="457200"/>
+            <a:ext cx="2194560" cy="1005840"/>
+          </a:xfrm>
+          <a:prstGeom prst="roundRect">
+            <a:avLst>
+              <a:gd name="adj" fmla="val 9091"/>
+            </a:avLst>
+          </a:prstGeom>
+          <a:solidFill>
+            <a:srgbClr val="2F91B1"/>
+          </a:solidFill>
+          <a:ln/>
+        </p:spPr>
+      </p:sp>
+      <p:sp>
+        <p:nvSpPr>
+          <p:cNvPr id="3" name="Shape 1"/>
+          <p:cNvSpPr/>
+          <p:nvPr/>
+        </p:nvSpPr>
+        <p:spPr>
+          <a:xfrm>
+            <a:off x="9585655" y="777240"/>
+            <a:ext cx="2194560" cy="1005840"/>
+          </a:xfrm>
+          <a:prstGeom prst="roundRect">
+            <a:avLst>
+              <a:gd name="adj" fmla="val 9091"/>
+            </a:avLst>
+          </a:prstGeom>
+          <a:solidFill>
+            <a:srgbClr val="2F91B1"/>
+          </a:solidFill>
+          <a:ln/>
+        </p:spPr>
+      </p:sp>
+      <p:sp>
+        <p:nvSpPr>
+          <p:cNvPr id="4" name="Shape 2"/>
+          <p:cNvSpPr/>
+          <p:nvPr/>
+        </p:nvSpPr>
+        <p:spPr>
+          <a:xfrm>
+            <a:off x="9905695" y="1097280"/>
+            <a:ext cx="2194560" cy="1005840"/>
+          </a:xfrm>
+          <a:prstGeom prst="roundRect">
+            <a:avLst>
+              <a:gd name="adj" fmla="val 9091"/>
+            </a:avLst>
+          </a:prstGeom>
+          <a:solidFill>
+            <a:srgbClr val="57B9D9"/>
+          </a:solidFill>
+          <a:ln/>
+        </p:spPr>
+      </p:sp>
+      <p:sp>
+        <p:nvSpPr>
+          <p:cNvPr id="5" name="Text 3"/>
+          <p:cNvSpPr/>
+          <p:nvPr/>
+        </p:nvSpPr>
+        <p:spPr>
+          <a:xfrm>
+            <a:off x="758952" y="1645920"/>
+            <a:ext cx="10637215" cy="1645920"/>
           </a:xfrm>
           <a:prstGeom prst="rect">
             <a:avLst/>
@@ -1164,72 +1230,36 @@
           <a:lstStyle/>
           <a:p>
             <a:pPr indent="0" marL="0">
-              <a:buNone/>
-            </a:pPr>
-            <a:r>
-              <a:rPr lang="en-US" sz="3600" b="1" dirty="0">
-                <a:solidFill>
-                  <a:srgbClr val="FFFFFF"/>
-                </a:solidFill>
-                <a:latin typeface="Bookman Old Style" pitchFamily="34" charset="0"/>
-                <a:ea typeface="Bookman Old Style" pitchFamily="34" charset="-122"/>
-                <a:cs typeface="Bookman Old Style" pitchFamily="34" charset="-120"/>
-              </a:rPr>
-              <a:t>Offshore Wind Farm Turbine Monitoring</a:t>
-            </a:r>
-            <a:endParaRPr lang="en-US" sz="3600" dirty="0"/>
-          </a:p>
-        </p:txBody>
-      </p:sp>
-      <p:sp>
-        <p:nvSpPr>
-          <p:cNvPr id="3" name="Text 1"/>
-          <p:cNvSpPr/>
-          <p:nvPr/>
-        </p:nvSpPr>
-        <p:spPr>
-          <a:xfrm>
-            <a:off x="658368" y="2148840"/>
-            <a:ext cx="10972800" cy="365760"/>
-          </a:xfrm>
-          <a:prstGeom prst="rect">
-            <a:avLst/>
-          </a:prstGeom>
-          <a:noFill/>
-          <a:ln/>
-        </p:spPr>
-        <p:txBody>
-          <a:bodyPr wrap="square" rtlCol="0" anchor="ctr"/>
-          <a:lstStyle/>
-          <a:p>
-            <a:pPr indent="0" marL="0">
-              <a:buNone/>
-            </a:pPr>
-            <a:r>
-              <a:rPr lang="en-US" sz="1600" dirty="0">
-                <a:solidFill>
-                  <a:srgbClr val="4FA6BE"/>
+              <a:lnSpc>
+                <a:spcPct val="98000"/>
+              </a:lnSpc>
+              <a:buNone/>
+            </a:pPr>
+            <a:r>
+              <a:rPr lang="en-US" sz="3800" b="1" dirty="0">
+                <a:solidFill>
+                  <a:srgbClr val="EEF2F6"/>
                 </a:solidFill>
                 <a:latin typeface="Calibri" pitchFamily="34" charset="0"/>
                 <a:ea typeface="Calibri" pitchFamily="34" charset="-122"/>
                 <a:cs typeface="Calibri" pitchFamily="34" charset="-120"/>
               </a:rPr>
-              <a:t>Vishvaksen Machana   ·   X25173421</a:t>
-            </a:r>
-            <a:endParaRPr lang="en-US" sz="1600" dirty="0"/>
-          </a:p>
-        </p:txBody>
-      </p:sp>
-      <p:sp>
-        <p:nvSpPr>
-          <p:cNvPr id="4" name="Text 2"/>
-          <p:cNvSpPr/>
-          <p:nvPr/>
-        </p:nvSpPr>
-        <p:spPr>
-          <a:xfrm>
-            <a:off x="658368" y="2697480"/>
-            <a:ext cx="10424160" cy="1371600"/>
+              <a:t>Offshore Wind Farm Turbine Monitoring</a:t>
+            </a:r>
+            <a:endParaRPr lang="en-US" sz="3800" dirty="0"/>
+          </a:p>
+        </p:txBody>
+      </p:sp>
+      <p:sp>
+        <p:nvSpPr>
+          <p:cNvPr id="6" name="Text 4"/>
+          <p:cNvSpPr/>
+          <p:nvPr/>
+        </p:nvSpPr>
+        <p:spPr>
+          <a:xfrm>
+            <a:off x="777240" y="3337560"/>
+            <a:ext cx="10637215" cy="365760"/>
           </a:xfrm>
           <a:prstGeom prst="rect">
             <a:avLst/>
@@ -1242,249 +1272,62 @@
           <a:lstStyle/>
           <a:p>
             <a:pPr indent="0" marL="0">
-              <a:lnSpc>
-                <a:spcPct val="110000"/>
-              </a:lnSpc>
-              <a:buNone/>
-            </a:pPr>
-            <a:r>
-              <a:rPr lang="en-US" sz="2000" dirty="0">
-                <a:solidFill>
-                  <a:srgbClr val="CFE4EC"/>
+              <a:buNone/>
+            </a:pPr>
+            <a:r>
+              <a:rPr lang="en-US" sz="1450" dirty="0">
+                <a:solidFill>
+                  <a:srgbClr val="8B98A6"/>
                 </a:solidFill>
                 <a:latin typeface="Calibri" pitchFamily="34" charset="0"/>
                 <a:ea typeface="Calibri" pitchFamily="34" charset="-122"/>
                 <a:cs typeface="Calibri" pitchFamily="34" charset="-120"/>
               </a:rPr>
-              <a:t>Turbines are reached by boat and visits can be weeks apart — a bearing overheating or a gearbox losing lubrication pressure stays invisible until the next scheduled inspection.</a:t>
-            </a:r>
-            <a:endParaRPr lang="en-US" sz="2000" dirty="0"/>
-          </a:p>
-        </p:txBody>
-      </p:sp>
-      <p:sp>
-        <p:nvSpPr>
-          <p:cNvPr id="5" name="Shape 3"/>
-          <p:cNvSpPr/>
-          <p:nvPr/>
-        </p:nvSpPr>
-        <p:spPr>
-          <a:xfrm>
-            <a:off x="658368" y="4206240"/>
-            <a:ext cx="2651760" cy="566928"/>
-          </a:xfrm>
-          <a:prstGeom prst="roundRect">
-            <a:avLst>
-              <a:gd name="adj" fmla="val 50000"/>
-            </a:avLst>
-          </a:prstGeom>
-          <a:solidFill>
-            <a:srgbClr val="153B4C"/>
-          </a:solidFill>
-          <a:ln w="12700">
-            <a:solidFill>
-              <a:srgbClr val="EBB13C"/>
-            </a:solidFill>
-            <a:prstDash val="solid"/>
-          </a:ln>
-        </p:spPr>
-      </p:sp>
-      <p:sp>
-        <p:nvSpPr>
-          <p:cNvPr id="6" name="Text 4"/>
-          <p:cNvSpPr/>
-          <p:nvPr/>
-        </p:nvSpPr>
-        <p:spPr>
-          <a:xfrm>
-            <a:off x="658368" y="4206240"/>
-            <a:ext cx="2651760" cy="566928"/>
-          </a:xfrm>
-          <a:prstGeom prst="rect">
-            <a:avLst/>
-          </a:prstGeom>
-          <a:noFill/>
-          <a:ln/>
-        </p:spPr>
-        <p:txBody>
-          <a:bodyPr wrap="square" lIns="0" tIns="0" rIns="0" bIns="0" rtlCol="0" anchor="ctr"/>
-          <a:lstStyle/>
-          <a:p>
-            <a:pPr algn="ctr" indent="0" marL="0">
-              <a:buNone/>
-            </a:pPr>
-            <a:r>
-              <a:rPr lang="en-US" sz="1350" b="1" dirty="0">
-                <a:solidFill>
-                  <a:srgbClr val="EBB13C"/>
+              <a:t>Vishvaksen Machana   ·   X25173421</a:t>
+            </a:r>
+            <a:endParaRPr lang="en-US" sz="1450" dirty="0"/>
+          </a:p>
+        </p:txBody>
+      </p:sp>
+      <p:sp>
+        <p:nvSpPr>
+          <p:cNvPr id="7" name="Text 5"/>
+          <p:cNvSpPr/>
+          <p:nvPr/>
+        </p:nvSpPr>
+        <p:spPr>
+          <a:xfrm>
+            <a:off x="777240" y="3931920"/>
+            <a:ext cx="8138160" cy="1325880"/>
+          </a:xfrm>
+          <a:prstGeom prst="rect">
+            <a:avLst/>
+          </a:prstGeom>
+          <a:noFill/>
+          <a:ln/>
+        </p:spPr>
+        <p:txBody>
+          <a:bodyPr wrap="square" rtlCol="0" anchor="t"/>
+          <a:lstStyle/>
+          <a:p>
+            <a:pPr indent="0" marL="0">
+              <a:lnSpc>
+                <a:spcPct val="130000"/>
+              </a:lnSpc>
+              <a:buNone/>
+            </a:pPr>
+            <a:r>
+              <a:rPr lang="en-US" sz="1400" dirty="0">
+                <a:solidFill>
+                  <a:srgbClr val="EEF2F6"/>
                 </a:solidFill>
                 <a:latin typeface="Calibri" pitchFamily="34" charset="0"/>
                 <a:ea typeface="Calibri" pitchFamily="34" charset="-122"/>
                 <a:cs typeface="Calibri" pitchFamily="34" charset="-120"/>
               </a:rPr>
-              <a:t>Gearbox &lt; 2.5 bar</a:t>
-            </a:r>
-            <a:endParaRPr lang="en-US" sz="1350" dirty="0"/>
-          </a:p>
-        </p:txBody>
-      </p:sp>
-      <p:sp>
-        <p:nvSpPr>
-          <p:cNvPr id="7" name="Shape 5"/>
-          <p:cNvSpPr/>
-          <p:nvPr/>
-        </p:nvSpPr>
-        <p:spPr>
-          <a:xfrm>
-            <a:off x="3538728" y="4206240"/>
-            <a:ext cx="2651760" cy="566928"/>
-          </a:xfrm>
-          <a:prstGeom prst="roundRect">
-            <a:avLst>
-              <a:gd name="adj" fmla="val 50000"/>
-            </a:avLst>
-          </a:prstGeom>
-          <a:solidFill>
-            <a:srgbClr val="153B4C"/>
-          </a:solidFill>
-          <a:ln w="12700">
-            <a:solidFill>
-              <a:srgbClr val="EBB13C"/>
-            </a:solidFill>
-            <a:prstDash val="solid"/>
-          </a:ln>
-        </p:spPr>
-      </p:sp>
-      <p:sp>
-        <p:nvSpPr>
-          <p:cNvPr id="8" name="Text 6"/>
-          <p:cNvSpPr/>
-          <p:nvPr/>
-        </p:nvSpPr>
-        <p:spPr>
-          <a:xfrm>
-            <a:off x="3538728" y="4206240"/>
-            <a:ext cx="2651760" cy="566928"/>
-          </a:xfrm>
-          <a:prstGeom prst="rect">
-            <a:avLst/>
-          </a:prstGeom>
-          <a:noFill/>
-          <a:ln/>
-        </p:spPr>
-        <p:txBody>
-          <a:bodyPr wrap="square" lIns="0" tIns="0" rIns="0" bIns="0" rtlCol="0" anchor="ctr"/>
-          <a:lstStyle/>
-          <a:p>
-            <a:pPr algn="ctr" indent="0" marL="0">
-              <a:buNone/>
-            </a:pPr>
-            <a:r>
-              <a:rPr lang="en-US" sz="1350" b="1" dirty="0">
-                <a:solidFill>
-                  <a:srgbClr val="EBB13C"/>
-                </a:solidFill>
-                <a:latin typeface="Calibri" pitchFamily="34" charset="0"/>
-                <a:ea typeface="Calibri" pitchFamily="34" charset="-122"/>
-                <a:cs typeface="Calibri" pitchFamily="34" charset="-120"/>
-              </a:rPr>
-              <a:t>10 streams · 2 turbines</a:t>
-            </a:r>
-            <a:endParaRPr lang="en-US" sz="1350" dirty="0"/>
-          </a:p>
-        </p:txBody>
-      </p:sp>
-      <p:sp>
-        <p:nvSpPr>
-          <p:cNvPr id="9" name="Shape 7"/>
-          <p:cNvSpPr/>
-          <p:nvPr/>
-        </p:nvSpPr>
-        <p:spPr>
-          <a:xfrm>
-            <a:off x="6419088" y="4206240"/>
-            <a:ext cx="2651760" cy="566928"/>
-          </a:xfrm>
-          <a:prstGeom prst="roundRect">
-            <a:avLst>
-              <a:gd name="adj" fmla="val 50000"/>
-            </a:avLst>
-          </a:prstGeom>
-          <a:solidFill>
-            <a:srgbClr val="153B4C"/>
-          </a:solidFill>
-          <a:ln w="12700">
-            <a:solidFill>
-              <a:srgbClr val="EBB13C"/>
-            </a:solidFill>
-            <a:prstDash val="solid"/>
-          </a:ln>
-        </p:spPr>
-      </p:sp>
-      <p:sp>
-        <p:nvSpPr>
-          <p:cNvPr id="10" name="Text 8"/>
-          <p:cNvSpPr/>
-          <p:nvPr/>
-        </p:nvSpPr>
-        <p:spPr>
-          <a:xfrm>
-            <a:off x="6419088" y="4206240"/>
-            <a:ext cx="2651760" cy="566928"/>
-          </a:xfrm>
-          <a:prstGeom prst="rect">
-            <a:avLst/>
-          </a:prstGeom>
-          <a:noFill/>
-          <a:ln/>
-        </p:spPr>
-        <p:txBody>
-          <a:bodyPr wrap="square" lIns="0" tIns="0" rIns="0" bIns="0" rtlCol="0" anchor="ctr"/>
-          <a:lstStyle/>
-          <a:p>
-            <a:pPr algn="ctr" indent="0" marL="0">
-              <a:buNone/>
-            </a:pPr>
-            <a:r>
-              <a:rPr lang="en-US" sz="1350" b="1" dirty="0">
-                <a:solidFill>
-                  <a:srgbClr val="EBB13C"/>
-                </a:solidFill>
-                <a:latin typeface="Calibri" pitchFamily="34" charset="0"/>
-                <a:ea typeface="Calibri" pitchFamily="34" charset="-122"/>
-                <a:cs typeface="Calibri" pitchFamily="34" charset="-120"/>
-              </a:rPr>
-              <a:t>edge alert rules</a:t>
-            </a:r>
-            <a:endParaRPr lang="en-US" sz="1350" dirty="0"/>
-          </a:p>
-        </p:txBody>
-      </p:sp>
-      <p:sp>
-        <p:nvSpPr>
-          <p:cNvPr id="11" name="Text 9"/>
-          <p:cNvSpPr/>
-          <p:nvPr/>
-        </p:nvSpPr>
-        <p:spPr>
-          <a:xfrm>
-            <a:off x="658368" y="6126480"/>
-            <a:ext cx="10972800" cy="365760"/>
-          </a:xfrm>
-          <a:prstGeom prst="rect">
-            <a:avLst/>
-          </a:prstGeom>
-          <a:noFill/>
-          <a:ln/>
-        </p:spPr>
-        <p:txBody>
-          <a:bodyPr wrap="square" rtlCol="0" anchor="ctr"/>
-          <a:lstStyle/>
-          <a:p>
-            <a:pPr indent="0" marL="0">
-              <a:buNone/>
-            </a:pPr>
-            <a:endParaRPr lang="en-US" sz="1300" dirty="0"/>
+              <a:t>Turbines are reached by boat and visits can be weeks apart — a bearing overheating or a gearbox losing lubrication pressure stays invisible until the next scheduled inspection.</a:t>
+            </a:r>
+            <a:endParaRPr lang="en-US" sz="1400" dirty="0"/>
           </a:p>
         </p:txBody>
       </p:sp>
@@ -1502,7 +1345,7 @@
     <p:bg>
       <p:bgPr>
         <a:solidFill>
-          <a:srgbClr val="FFFFFF"/>
+          <a:srgbClr val="0A2540"/>
         </a:solidFill>
       </p:bgPr>
     </p:bg>
@@ -1522,65 +1365,209 @@
       </p:grpSpPr>
       <p:sp>
         <p:nvSpPr>
-          <p:cNvPr id="2" name="Text 0"/>
-          <p:cNvSpPr/>
-          <p:nvPr/>
-        </p:nvSpPr>
-        <p:spPr>
-          <a:xfrm>
-            <a:off x="640080" y="457200"/>
-            <a:ext cx="10972800" cy="640080"/>
-          </a:xfrm>
-          <a:prstGeom prst="rect">
-            <a:avLst/>
-          </a:prstGeom>
-          <a:noFill/>
-          <a:ln/>
-        </p:spPr>
-        <p:txBody>
-          <a:bodyPr wrap="square" rtlCol="0" anchor="ctr"/>
-          <a:lstStyle/>
-          <a:p>
-            <a:pPr indent="0" marL="0">
-              <a:buNone/>
-            </a:pPr>
-            <a:r>
-              <a:rPr lang="en-US" sz="3000" b="1" dirty="0">
-                <a:solidFill>
-                  <a:srgbClr val="102A38"/>
-                </a:solidFill>
-                <a:latin typeface="Bookman Old Style" pitchFamily="34" charset="0"/>
-                <a:ea typeface="Bookman Old Style" pitchFamily="34" charset="-122"/>
-                <a:cs typeface="Bookman Old Style" pitchFamily="34" charset="-120"/>
-              </a:rPr>
-              <a:t>What I Built — Sea to Cloud</a:t>
-            </a:r>
-            <a:endParaRPr lang="en-US" sz="3000" dirty="0"/>
-          </a:p>
-        </p:txBody>
-      </p:sp>
-      <p:sp>
-        <p:nvSpPr>
-          <p:cNvPr id="3" name="Shape 1"/>
-          <p:cNvSpPr/>
-          <p:nvPr/>
-        </p:nvSpPr>
-        <p:spPr>
-          <a:xfrm>
-            <a:off x="640080" y="1874520"/>
-            <a:ext cx="2286000" cy="1280160"/>
+          <p:cNvPr id="2" name="Shape 0"/>
+          <p:cNvSpPr/>
+          <p:nvPr/>
+        </p:nvSpPr>
+        <p:spPr>
+          <a:xfrm>
+            <a:off x="9265615" y="457200"/>
+            <a:ext cx="2194560" cy="1005840"/>
           </a:xfrm>
           <a:prstGeom prst="roundRect">
             <a:avLst>
-              <a:gd name="adj" fmla="val 7143"/>
+              <a:gd name="adj" fmla="val 9091"/>
             </a:avLst>
           </a:prstGeom>
           <a:solidFill>
-            <a:srgbClr val="EDF4F7"/>
-          </a:solidFill>
-          <a:ln w="19050">
+            <a:srgbClr val="2F91B1"/>
+          </a:solidFill>
+          <a:ln/>
+        </p:spPr>
+      </p:sp>
+      <p:sp>
+        <p:nvSpPr>
+          <p:cNvPr id="3" name="Shape 1"/>
+          <p:cNvSpPr/>
+          <p:nvPr/>
+        </p:nvSpPr>
+        <p:spPr>
+          <a:xfrm>
+            <a:off x="9585655" y="777240"/>
+            <a:ext cx="2194560" cy="1005840"/>
+          </a:xfrm>
+          <a:prstGeom prst="roundRect">
+            <a:avLst>
+              <a:gd name="adj" fmla="val 9091"/>
+            </a:avLst>
+          </a:prstGeom>
+          <a:solidFill>
+            <a:srgbClr val="2F91B1"/>
+          </a:solidFill>
+          <a:ln/>
+        </p:spPr>
+      </p:sp>
+      <p:sp>
+        <p:nvSpPr>
+          <p:cNvPr id="4" name="Shape 2"/>
+          <p:cNvSpPr/>
+          <p:nvPr/>
+        </p:nvSpPr>
+        <p:spPr>
+          <a:xfrm>
+            <a:off x="9905695" y="1097280"/>
+            <a:ext cx="2194560" cy="1005840"/>
+          </a:xfrm>
+          <a:prstGeom prst="roundRect">
+            <a:avLst>
+              <a:gd name="adj" fmla="val 9091"/>
+            </a:avLst>
+          </a:prstGeom>
+          <a:solidFill>
+            <a:srgbClr val="57B9D9"/>
+          </a:solidFill>
+          <a:ln/>
+        </p:spPr>
+      </p:sp>
+      <p:sp>
+        <p:nvSpPr>
+          <p:cNvPr id="5" name="Text 3"/>
+          <p:cNvSpPr/>
+          <p:nvPr/>
+        </p:nvSpPr>
+        <p:spPr>
+          <a:xfrm>
+            <a:off x="777240" y="731520"/>
+            <a:ext cx="914400" cy="640080"/>
+          </a:xfrm>
+          <a:prstGeom prst="rect">
+            <a:avLst/>
+          </a:prstGeom>
+          <a:noFill/>
+          <a:ln/>
+        </p:spPr>
+        <p:txBody>
+          <a:bodyPr wrap="square" lIns="0" tIns="0" rIns="0" bIns="0" rtlCol="0" anchor="ctr"/>
+          <a:lstStyle/>
+          <a:p>
+            <a:pPr indent="0" marL="0">
+              <a:buNone/>
+            </a:pPr>
+            <a:r>
+              <a:rPr lang="en-US" sz="3000" b="1" dirty="0">
+                <a:solidFill>
+                  <a:srgbClr val="57B9D9"/>
+                </a:solidFill>
+                <a:latin typeface="Calibri" pitchFamily="34" charset="0"/>
+                <a:ea typeface="Calibri" pitchFamily="34" charset="-122"/>
+                <a:cs typeface="Calibri" pitchFamily="34" charset="-120"/>
+              </a:rPr>
+              <a:t>01</a:t>
+            </a:r>
+            <a:endParaRPr lang="en-US" sz="3000" dirty="0"/>
+          </a:p>
+        </p:txBody>
+      </p:sp>
+      <p:sp>
+        <p:nvSpPr>
+          <p:cNvPr id="6" name="Text 4"/>
+          <p:cNvSpPr/>
+          <p:nvPr/>
+        </p:nvSpPr>
+        <p:spPr>
+          <a:xfrm>
+            <a:off x="1645920" y="905256"/>
+            <a:ext cx="9768535" cy="274320"/>
+          </a:xfrm>
+          <a:prstGeom prst="rect">
+            <a:avLst/>
+          </a:prstGeom>
+          <a:noFill/>
+          <a:ln/>
+        </p:spPr>
+        <p:txBody>
+          <a:bodyPr wrap="square" lIns="0" tIns="0" rIns="0" bIns="0" rtlCol="0" anchor="ctr"/>
+          <a:lstStyle/>
+          <a:p>
+            <a:pPr indent="0" marL="0">
+              <a:buNone/>
+            </a:pPr>
+            <a:r>
+              <a:rPr lang="en-US" sz="1100" b="1" spc="200" kern="0" dirty="0">
+                <a:solidFill>
+                  <a:srgbClr val="8B98A6"/>
+                </a:solidFill>
+                <a:latin typeface="Calibri" pitchFamily="34" charset="0"/>
+                <a:ea typeface="Calibri" pitchFamily="34" charset="-122"/>
+                <a:cs typeface="Calibri" pitchFamily="34" charset="-120"/>
+              </a:rPr>
+              <a:t>ARCHITECTURE</a:t>
+            </a:r>
+            <a:endParaRPr lang="en-US" sz="1100" dirty="0"/>
+          </a:p>
+        </p:txBody>
+      </p:sp>
+      <p:sp>
+        <p:nvSpPr>
+          <p:cNvPr id="7" name="Text 5"/>
+          <p:cNvSpPr/>
+          <p:nvPr/>
+        </p:nvSpPr>
+        <p:spPr>
+          <a:xfrm>
+            <a:off x="777240" y="1380744"/>
+            <a:ext cx="10637215" cy="640080"/>
+          </a:xfrm>
+          <a:prstGeom prst="rect">
+            <a:avLst/>
+          </a:prstGeom>
+          <a:noFill/>
+          <a:ln/>
+        </p:spPr>
+        <p:txBody>
+          <a:bodyPr wrap="square" lIns="0" tIns="0" rIns="0" bIns="0" rtlCol="0" anchor="ctr"/>
+          <a:lstStyle/>
+          <a:p>
+            <a:pPr indent="0" marL="0">
+              <a:buNone/>
+            </a:pPr>
+            <a:r>
+              <a:rPr lang="en-US" sz="2300" b="1" dirty="0">
+                <a:solidFill>
+                  <a:srgbClr val="EEF2F6"/>
+                </a:solidFill>
+                <a:latin typeface="Calibri" pitchFamily="34" charset="0"/>
+                <a:ea typeface="Calibri" pitchFamily="34" charset="-122"/>
+                <a:cs typeface="Calibri" pitchFamily="34" charset="-120"/>
+              </a:rPr>
+              <a:t>What I Built — Sea to Cloud</a:t>
+            </a:r>
+            <a:endParaRPr lang="en-US" sz="2300" dirty="0"/>
+          </a:p>
+        </p:txBody>
+      </p:sp>
+      <p:sp>
+        <p:nvSpPr>
+          <p:cNvPr id="8" name="Shape 6"/>
+          <p:cNvSpPr/>
+          <p:nvPr/>
+        </p:nvSpPr>
+        <p:spPr>
+          <a:xfrm>
+            <a:off x="777240" y="2971800"/>
+            <a:ext cx="1391869" cy="1965960"/>
+          </a:xfrm>
+          <a:prstGeom prst="roundRect">
+            <a:avLst>
+              <a:gd name="adj" fmla="val 5256"/>
+            </a:avLst>
+          </a:prstGeom>
+          <a:solidFill>
+            <a:srgbClr val="57B9D9"/>
+          </a:solidFill>
+          <a:ln w="12700">
             <a:solidFill>
-              <a:srgbClr val="4FA6BE"/>
+              <a:srgbClr val="57B9D9"/>
             </a:solidFill>
             <a:prstDash val="solid"/>
           </a:ln>
@@ -1588,34 +1575,14 @@
       </p:sp>
       <p:sp>
         <p:nvSpPr>
-          <p:cNvPr id="4" name="Shape 2"/>
-          <p:cNvSpPr/>
-          <p:nvPr/>
-        </p:nvSpPr>
-        <p:spPr>
-          <a:xfrm>
-            <a:off x="1691640" y="2039112"/>
-            <a:ext cx="182880" cy="182880"/>
-          </a:xfrm>
-          <a:prstGeom prst="ellipse">
-            <a:avLst/>
-          </a:prstGeom>
-          <a:solidFill>
-            <a:srgbClr val="4FA6BE"/>
-          </a:solidFill>
-          <a:ln/>
-        </p:spPr>
-      </p:sp>
-      <p:sp>
-        <p:nvSpPr>
-          <p:cNvPr id="5" name="Text 3"/>
-          <p:cNvSpPr/>
-          <p:nvPr/>
-        </p:nvSpPr>
-        <p:spPr>
-          <a:xfrm>
-            <a:off x="612648" y="2258568"/>
-            <a:ext cx="2340864" cy="365760"/>
+          <p:cNvPr id="9" name="Text 7"/>
+          <p:cNvSpPr/>
+          <p:nvPr/>
+        </p:nvSpPr>
+        <p:spPr>
+          <a:xfrm>
+            <a:off x="923544" y="3154680"/>
+            <a:ext cx="1099261" cy="320040"/>
           </a:xfrm>
           <a:prstGeom prst="rect">
             <a:avLst/>
@@ -1627,13 +1594,55 @@
           <a:bodyPr wrap="square" lIns="0" tIns="0" rIns="0" bIns="0" rtlCol="0" anchor="ctr"/>
           <a:lstStyle/>
           <a:p>
-            <a:pPr algn="ctr" indent="0" marL="0">
-              <a:buNone/>
-            </a:pPr>
-            <a:r>
-              <a:rPr lang="en-US" sz="1450" b="1" dirty="0">
-                <a:solidFill>
-                  <a:srgbClr val="102A38"/>
+            <a:pPr indent="0" marL="0">
+              <a:buNone/>
+            </a:pPr>
+            <a:r>
+              <a:rPr lang="en-US" sz="1100" dirty="0">
+                <a:solidFill>
+                  <a:srgbClr val="111111"/>
+                </a:solidFill>
+                <a:latin typeface="Consolas" pitchFamily="34" charset="0"/>
+                <a:ea typeface="Consolas" pitchFamily="34" charset="-122"/>
+                <a:cs typeface="Consolas" pitchFamily="34" charset="-120"/>
+              </a:rPr>
+              <a:t>01</a:t>
+            </a:r>
+            <a:endParaRPr lang="en-US" sz="1100" dirty="0"/>
+          </a:p>
+        </p:txBody>
+      </p:sp>
+      <p:sp>
+        <p:nvSpPr>
+          <p:cNvPr id="10" name="Text 8"/>
+          <p:cNvSpPr/>
+          <p:nvPr/>
+        </p:nvSpPr>
+        <p:spPr>
+          <a:xfrm>
+            <a:off x="923544" y="3593592"/>
+            <a:ext cx="1099261" cy="868680"/>
+          </a:xfrm>
+          <a:prstGeom prst="rect">
+            <a:avLst/>
+          </a:prstGeom>
+          <a:noFill/>
+          <a:ln/>
+        </p:spPr>
+        <p:txBody>
+          <a:bodyPr wrap="square" lIns="0" tIns="0" rIns="0" bIns="0" rtlCol="0" anchor="t"/>
+          <a:lstStyle/>
+          <a:p>
+            <a:pPr indent="0" marL="0">
+              <a:lnSpc>
+                <a:spcPct val="96000"/>
+              </a:lnSpc>
+              <a:buNone/>
+            </a:pPr>
+            <a:r>
+              <a:rPr lang="en-US" sz="1300" b="1" dirty="0">
+                <a:solidFill>
+                  <a:srgbClr val="111111"/>
                 </a:solidFill>
                 <a:latin typeface="Calibri" pitchFamily="34" charset="0"/>
                 <a:ea typeface="Calibri" pitchFamily="34" charset="-122"/>
@@ -1641,38 +1650,38 @@
               </a:rPr>
               <a:t>Turbine sensors</a:t>
             </a:r>
-            <a:endParaRPr lang="en-US" sz="1450" dirty="0"/>
-          </a:p>
-        </p:txBody>
-      </p:sp>
-      <p:sp>
-        <p:nvSpPr>
-          <p:cNvPr id="6" name="Text 4"/>
-          <p:cNvSpPr/>
-          <p:nvPr/>
-        </p:nvSpPr>
-        <p:spPr>
-          <a:xfrm>
-            <a:off x="640080" y="2606040"/>
-            <a:ext cx="2286000" cy="411480"/>
-          </a:xfrm>
-          <a:prstGeom prst="rect">
-            <a:avLst/>
-          </a:prstGeom>
-          <a:noFill/>
-          <a:ln/>
-        </p:spPr>
-        <p:txBody>
-          <a:bodyPr wrap="square" lIns="0" tIns="0" rIns="0" bIns="0" rtlCol="0" anchor="t"/>
-          <a:lstStyle/>
-          <a:p>
-            <a:pPr algn="ctr" indent="0" marL="0">
-              <a:buNone/>
-            </a:pPr>
-            <a:r>
-              <a:rPr lang="en-US" sz="1050" dirty="0">
-                <a:solidFill>
-                  <a:srgbClr val="567480"/>
+            <a:endParaRPr lang="en-US" sz="1300" dirty="0"/>
+          </a:p>
+        </p:txBody>
+      </p:sp>
+      <p:sp>
+        <p:nvSpPr>
+          <p:cNvPr id="11" name="Text 9"/>
+          <p:cNvSpPr/>
+          <p:nvPr/>
+        </p:nvSpPr>
+        <p:spPr>
+          <a:xfrm>
+            <a:off x="923544" y="4453128"/>
+            <a:ext cx="1099261" cy="365760"/>
+          </a:xfrm>
+          <a:prstGeom prst="rect">
+            <a:avLst/>
+          </a:prstGeom>
+          <a:noFill/>
+          <a:ln/>
+        </p:spPr>
+        <p:txBody>
+          <a:bodyPr wrap="square" lIns="0" tIns="0" rIns="0" bIns="0" rtlCol="0" anchor="ctr"/>
+          <a:lstStyle/>
+          <a:p>
+            <a:pPr indent="0" marL="0">
+              <a:buNone/>
+            </a:pPr>
+            <a:r>
+              <a:rPr lang="en-US" sz="900" dirty="0">
+                <a:solidFill>
+                  <a:srgbClr val="111111"/>
                 </a:solidFill>
                 <a:latin typeface="Calibri" pitchFamily="34" charset="0"/>
                 <a:ea typeface="Calibri" pitchFamily="34" charset="-122"/>
@@ -1680,57 +1689,52 @@
               </a:rPr>
               <a:t>10 streams · 2 turbines</a:t>
             </a:r>
-            <a:endParaRPr lang="en-US" sz="1050" dirty="0"/>
-          </a:p>
-        </p:txBody>
-      </p:sp>
-      <p:sp>
-        <p:nvSpPr>
-          <p:cNvPr id="7" name="Shape 5"/>
-          <p:cNvSpPr/>
-          <p:nvPr/>
-        </p:nvSpPr>
-        <p:spPr>
-          <a:xfrm>
-            <a:off x="2944368" y="2514600"/>
-            <a:ext cx="1975104" cy="0"/>
-          </a:xfrm>
-          <a:prstGeom prst="line">
-            <a:avLst/>
-          </a:prstGeom>
-          <a:noFill/>
-          <a:ln w="25400">
-            <a:solidFill>
-              <a:srgbClr val="4FA6BE"/>
-            </a:solidFill>
-            <a:prstDash val="solid"/>
-            <a:headEnd type="none"/>
-            <a:tailEnd type="triangle"/>
-          </a:ln>
-        </p:spPr>
-      </p:sp>
-      <p:sp>
-        <p:nvSpPr>
-          <p:cNvPr id="8" name="Shape 6"/>
-          <p:cNvSpPr/>
-          <p:nvPr/>
-        </p:nvSpPr>
-        <p:spPr>
-          <a:xfrm>
-            <a:off x="4937760" y="1874520"/>
-            <a:ext cx="2286000" cy="1280160"/>
+            <a:endParaRPr lang="en-US" sz="900" dirty="0"/>
+          </a:p>
+        </p:txBody>
+      </p:sp>
+      <p:sp>
+        <p:nvSpPr>
+          <p:cNvPr id="12" name="Shape 10"/>
+          <p:cNvSpPr/>
+          <p:nvPr/>
+        </p:nvSpPr>
+        <p:spPr>
+          <a:xfrm>
+            <a:off x="2242261" y="3845052"/>
+            <a:ext cx="310896" cy="219456"/>
+          </a:xfrm>
+          <a:prstGeom prst="rightArrow">
+            <a:avLst/>
+          </a:prstGeom>
+          <a:solidFill>
+            <a:srgbClr val="8B98A6"/>
+          </a:solidFill>
+          <a:ln/>
+        </p:spPr>
+      </p:sp>
+      <p:sp>
+        <p:nvSpPr>
+          <p:cNvPr id="13" name="Shape 11"/>
+          <p:cNvSpPr/>
+          <p:nvPr/>
+        </p:nvSpPr>
+        <p:spPr>
+          <a:xfrm>
+            <a:off x="2626309" y="2971800"/>
+            <a:ext cx="1391869" cy="1965960"/>
           </a:xfrm>
           <a:prstGeom prst="roundRect">
             <a:avLst>
-              <a:gd name="adj" fmla="val 7143"/>
+              <a:gd name="adj" fmla="val 5256"/>
             </a:avLst>
           </a:prstGeom>
           <a:solidFill>
-            <a:srgbClr val="EDF4F7"/>
-          </a:solidFill>
-          <a:ln w="19050">
+            <a:srgbClr val="57B9D9"/>
+          </a:solidFill>
+          <a:ln w="12700">
             <a:solidFill>
-              <a:srgbClr val="4FA6BE"/>
+              <a:srgbClr val="57B9D9"/>
             </a:solidFill>
             <a:prstDash val="solid"/>
           </a:ln>
@@ -1738,34 +1742,14 @@
       </p:sp>
       <p:sp>
         <p:nvSpPr>
-          <p:cNvPr id="9" name="Shape 7"/>
-          <p:cNvSpPr/>
-          <p:nvPr/>
-        </p:nvSpPr>
-        <p:spPr>
-          <a:xfrm>
-            <a:off x="5989320" y="2039112"/>
-            <a:ext cx="182880" cy="182880"/>
-          </a:xfrm>
-          <a:prstGeom prst="ellipse">
-            <a:avLst/>
-          </a:prstGeom>
-          <a:solidFill>
-            <a:srgbClr val="4FA6BE"/>
-          </a:solidFill>
-          <a:ln/>
-        </p:spPr>
-      </p:sp>
-      <p:sp>
-        <p:nvSpPr>
-          <p:cNvPr id="10" name="Text 8"/>
-          <p:cNvSpPr/>
-          <p:nvPr/>
-        </p:nvSpPr>
-        <p:spPr>
-          <a:xfrm>
-            <a:off x="4910328" y="2258568"/>
-            <a:ext cx="2340864" cy="365760"/>
+          <p:cNvPr id="14" name="Text 12"/>
+          <p:cNvSpPr/>
+          <p:nvPr/>
+        </p:nvSpPr>
+        <p:spPr>
+          <a:xfrm>
+            <a:off x="2772613" y="3154680"/>
+            <a:ext cx="1099261" cy="320040"/>
           </a:xfrm>
           <a:prstGeom prst="rect">
             <a:avLst/>
@@ -1777,13 +1761,55 @@
           <a:bodyPr wrap="square" lIns="0" tIns="0" rIns="0" bIns="0" rtlCol="0" anchor="ctr"/>
           <a:lstStyle/>
           <a:p>
-            <a:pPr algn="ctr" indent="0" marL="0">
-              <a:buNone/>
-            </a:pPr>
-            <a:r>
-              <a:rPr lang="en-US" sz="1450" b="1" dirty="0">
-                <a:solidFill>
-                  <a:srgbClr val="102A38"/>
+            <a:pPr indent="0" marL="0">
+              <a:buNone/>
+            </a:pPr>
+            <a:r>
+              <a:rPr lang="en-US" sz="1100" dirty="0">
+                <a:solidFill>
+                  <a:srgbClr val="111111"/>
+                </a:solidFill>
+                <a:latin typeface="Consolas" pitchFamily="34" charset="0"/>
+                <a:ea typeface="Consolas" pitchFamily="34" charset="-122"/>
+                <a:cs typeface="Consolas" pitchFamily="34" charset="-120"/>
+              </a:rPr>
+              <a:t>02</a:t>
+            </a:r>
+            <a:endParaRPr lang="en-US" sz="1100" dirty="0"/>
+          </a:p>
+        </p:txBody>
+      </p:sp>
+      <p:sp>
+        <p:nvSpPr>
+          <p:cNvPr id="15" name="Text 13"/>
+          <p:cNvSpPr/>
+          <p:nvPr/>
+        </p:nvSpPr>
+        <p:spPr>
+          <a:xfrm>
+            <a:off x="2772613" y="3593592"/>
+            <a:ext cx="1099261" cy="868680"/>
+          </a:xfrm>
+          <a:prstGeom prst="rect">
+            <a:avLst/>
+          </a:prstGeom>
+          <a:noFill/>
+          <a:ln/>
+        </p:spPr>
+        <p:txBody>
+          <a:bodyPr wrap="square" lIns="0" tIns="0" rIns="0" bIns="0" rtlCol="0" anchor="t"/>
+          <a:lstStyle/>
+          <a:p>
+            <a:pPr indent="0" marL="0">
+              <a:lnSpc>
+                <a:spcPct val="96000"/>
+              </a:lnSpc>
+              <a:buNone/>
+            </a:pPr>
+            <a:r>
+              <a:rPr lang="en-US" sz="1300" b="1" dirty="0">
+                <a:solidFill>
+                  <a:srgbClr val="111111"/>
                 </a:solidFill>
                 <a:latin typeface="Calibri" pitchFamily="34" charset="0"/>
                 <a:ea typeface="Calibri" pitchFamily="34" charset="-122"/>
@@ -1791,38 +1817,38 @@
               </a:rPr>
               <a:t>Fog gateway</a:t>
             </a:r>
-            <a:endParaRPr lang="en-US" sz="1450" dirty="0"/>
-          </a:p>
-        </p:txBody>
-      </p:sp>
-      <p:sp>
-        <p:nvSpPr>
-          <p:cNvPr id="11" name="Text 9"/>
-          <p:cNvSpPr/>
-          <p:nvPr/>
-        </p:nvSpPr>
-        <p:spPr>
-          <a:xfrm>
-            <a:off x="4937760" y="2606040"/>
-            <a:ext cx="2286000" cy="411480"/>
-          </a:xfrm>
-          <a:prstGeom prst="rect">
-            <a:avLst/>
-          </a:prstGeom>
-          <a:noFill/>
-          <a:ln/>
-        </p:spPr>
-        <p:txBody>
-          <a:bodyPr wrap="square" lIns="0" tIns="0" rIns="0" bIns="0" rtlCol="0" anchor="t"/>
-          <a:lstStyle/>
-          <a:p>
-            <a:pPr algn="ctr" indent="0" marL="0">
-              <a:buNone/>
-            </a:pPr>
-            <a:r>
-              <a:rPr lang="en-US" sz="1050" dirty="0">
-                <a:solidFill>
-                  <a:srgbClr val="567480"/>
+            <a:endParaRPr lang="en-US" sz="1300" dirty="0"/>
+          </a:p>
+        </p:txBody>
+      </p:sp>
+      <p:sp>
+        <p:nvSpPr>
+          <p:cNvPr id="16" name="Text 14"/>
+          <p:cNvSpPr/>
+          <p:nvPr/>
+        </p:nvSpPr>
+        <p:spPr>
+          <a:xfrm>
+            <a:off x="2772613" y="4453128"/>
+            <a:ext cx="1099261" cy="365760"/>
+          </a:xfrm>
+          <a:prstGeom prst="rect">
+            <a:avLst/>
+          </a:prstGeom>
+          <a:noFill/>
+          <a:ln/>
+        </p:spPr>
+        <p:txBody>
+          <a:bodyPr wrap="square" lIns="0" tIns="0" rIns="0" bIns="0" rtlCol="0" anchor="ctr"/>
+          <a:lstStyle/>
+          <a:p>
+            <a:pPr indent="0" marL="0">
+              <a:buNone/>
+            </a:pPr>
+            <a:r>
+              <a:rPr lang="en-US" sz="900" dirty="0">
+                <a:solidFill>
+                  <a:srgbClr val="111111"/>
                 </a:solidFill>
                 <a:latin typeface="Calibri" pitchFamily="34" charset="0"/>
                 <a:ea typeface="Calibri" pitchFamily="34" charset="-122"/>
@@ -1830,57 +1856,52 @@
               </a:rPr>
               <a:t>windows · 4 rules</a:t>
             </a:r>
-            <a:endParaRPr lang="en-US" sz="1050" dirty="0"/>
-          </a:p>
-        </p:txBody>
-      </p:sp>
-      <p:sp>
-        <p:nvSpPr>
-          <p:cNvPr id="12" name="Shape 10"/>
-          <p:cNvSpPr/>
-          <p:nvPr/>
-        </p:nvSpPr>
-        <p:spPr>
-          <a:xfrm>
-            <a:off x="7242048" y="2514600"/>
-            <a:ext cx="1975104" cy="0"/>
-          </a:xfrm>
-          <a:prstGeom prst="line">
-            <a:avLst/>
-          </a:prstGeom>
-          <a:noFill/>
-          <a:ln w="25400">
-            <a:solidFill>
-              <a:srgbClr val="4FA6BE"/>
-            </a:solidFill>
-            <a:prstDash val="solid"/>
-            <a:headEnd type="none"/>
-            <a:tailEnd type="triangle"/>
-          </a:ln>
-        </p:spPr>
-      </p:sp>
-      <p:sp>
-        <p:nvSpPr>
-          <p:cNvPr id="13" name="Shape 11"/>
-          <p:cNvSpPr/>
-          <p:nvPr/>
-        </p:nvSpPr>
-        <p:spPr>
-          <a:xfrm>
-            <a:off x="9235440" y="1874520"/>
-            <a:ext cx="2286000" cy="1280160"/>
+            <a:endParaRPr lang="en-US" sz="900" dirty="0"/>
+          </a:p>
+        </p:txBody>
+      </p:sp>
+      <p:sp>
+        <p:nvSpPr>
+          <p:cNvPr id="17" name="Shape 15"/>
+          <p:cNvSpPr/>
+          <p:nvPr/>
+        </p:nvSpPr>
+        <p:spPr>
+          <a:xfrm>
+            <a:off x="4091330" y="3845052"/>
+            <a:ext cx="310896" cy="219456"/>
+          </a:xfrm>
+          <a:prstGeom prst="rightArrow">
+            <a:avLst/>
+          </a:prstGeom>
+          <a:solidFill>
+            <a:srgbClr val="8B98A6"/>
+          </a:solidFill>
+          <a:ln/>
+        </p:spPr>
+      </p:sp>
+      <p:sp>
+        <p:nvSpPr>
+          <p:cNvPr id="18" name="Shape 16"/>
+          <p:cNvSpPr/>
+          <p:nvPr/>
+        </p:nvSpPr>
+        <p:spPr>
+          <a:xfrm>
+            <a:off x="4475378" y="2971800"/>
+            <a:ext cx="1391869" cy="1965960"/>
           </a:xfrm>
           <a:prstGeom prst="roundRect">
             <a:avLst>
-              <a:gd name="adj" fmla="val 7143"/>
+              <a:gd name="adj" fmla="val 5256"/>
             </a:avLst>
           </a:prstGeom>
           <a:solidFill>
-            <a:srgbClr val="EDF4F7"/>
-          </a:solidFill>
-          <a:ln w="19050">
+            <a:srgbClr val="123456"/>
+          </a:solidFill>
+          <a:ln w="12700">
             <a:solidFill>
-              <a:srgbClr val="0F5E7E"/>
+              <a:srgbClr val="26486A"/>
             </a:solidFill>
             <a:prstDash val="solid"/>
           </a:ln>
@@ -1888,34 +1909,14 @@
       </p:sp>
       <p:sp>
         <p:nvSpPr>
-          <p:cNvPr id="14" name="Shape 12"/>
-          <p:cNvSpPr/>
-          <p:nvPr/>
-        </p:nvSpPr>
-        <p:spPr>
-          <a:xfrm>
-            <a:off x="10287000" y="2039112"/>
-            <a:ext cx="182880" cy="182880"/>
-          </a:xfrm>
-          <a:prstGeom prst="ellipse">
-            <a:avLst/>
-          </a:prstGeom>
-          <a:solidFill>
-            <a:srgbClr val="0F5E7E"/>
-          </a:solidFill>
-          <a:ln/>
-        </p:spPr>
-      </p:sp>
-      <p:sp>
-        <p:nvSpPr>
-          <p:cNvPr id="15" name="Text 13"/>
-          <p:cNvSpPr/>
-          <p:nvPr/>
-        </p:nvSpPr>
-        <p:spPr>
-          <a:xfrm>
-            <a:off x="9208008" y="2258568"/>
-            <a:ext cx="2340864" cy="365760"/>
+          <p:cNvPr id="19" name="Text 17"/>
+          <p:cNvSpPr/>
+          <p:nvPr/>
+        </p:nvSpPr>
+        <p:spPr>
+          <a:xfrm>
+            <a:off x="4621682" y="3154680"/>
+            <a:ext cx="1099261" cy="320040"/>
           </a:xfrm>
           <a:prstGeom prst="rect">
             <a:avLst/>
@@ -1927,13 +1928,55 @@
           <a:bodyPr wrap="square" lIns="0" tIns="0" rIns="0" bIns="0" rtlCol="0" anchor="ctr"/>
           <a:lstStyle/>
           <a:p>
-            <a:pPr algn="ctr" indent="0" marL="0">
-              <a:buNone/>
-            </a:pPr>
-            <a:r>
-              <a:rPr lang="en-US" sz="1450" b="1" dirty="0">
-                <a:solidFill>
-                  <a:srgbClr val="102A38"/>
+            <a:pPr indent="0" marL="0">
+              <a:buNone/>
+            </a:pPr>
+            <a:r>
+              <a:rPr lang="en-US" sz="1100" dirty="0">
+                <a:solidFill>
+                  <a:srgbClr val="57B9D9"/>
+                </a:solidFill>
+                <a:latin typeface="Consolas" pitchFamily="34" charset="0"/>
+                <a:ea typeface="Consolas" pitchFamily="34" charset="-122"/>
+                <a:cs typeface="Consolas" pitchFamily="34" charset="-120"/>
+              </a:rPr>
+              <a:t>03</a:t>
+            </a:r>
+            <a:endParaRPr lang="en-US" sz="1100" dirty="0"/>
+          </a:p>
+        </p:txBody>
+      </p:sp>
+      <p:sp>
+        <p:nvSpPr>
+          <p:cNvPr id="20" name="Text 18"/>
+          <p:cNvSpPr/>
+          <p:nvPr/>
+        </p:nvSpPr>
+        <p:spPr>
+          <a:xfrm>
+            <a:off x="4621682" y="3593592"/>
+            <a:ext cx="1099261" cy="868680"/>
+          </a:xfrm>
+          <a:prstGeom prst="rect">
+            <a:avLst/>
+          </a:prstGeom>
+          <a:noFill/>
+          <a:ln/>
+        </p:spPr>
+        <p:txBody>
+          <a:bodyPr wrap="square" lIns="0" tIns="0" rIns="0" bIns="0" rtlCol="0" anchor="t"/>
+          <a:lstStyle/>
+          <a:p>
+            <a:pPr indent="0" marL="0">
+              <a:lnSpc>
+                <a:spcPct val="96000"/>
+              </a:lnSpc>
+              <a:buNone/>
+            </a:pPr>
+            <a:r>
+              <a:rPr lang="en-US" sz="1300" b="1" dirty="0">
+                <a:solidFill>
+                  <a:srgbClr val="EEF2F6"/>
                 </a:solidFill>
                 <a:latin typeface="Calibri" pitchFamily="34" charset="0"/>
                 <a:ea typeface="Calibri" pitchFamily="34" charset="-122"/>
@@ -1941,38 +1984,38 @@
               </a:rPr>
               <a:t>Amazon SQS</a:t>
             </a:r>
-            <a:endParaRPr lang="en-US" sz="1450" dirty="0"/>
-          </a:p>
-        </p:txBody>
-      </p:sp>
-      <p:sp>
-        <p:nvSpPr>
-          <p:cNvPr id="16" name="Text 14"/>
-          <p:cNvSpPr/>
-          <p:nvPr/>
-        </p:nvSpPr>
-        <p:spPr>
-          <a:xfrm>
-            <a:off x="9235440" y="2606040"/>
-            <a:ext cx="2286000" cy="411480"/>
-          </a:xfrm>
-          <a:prstGeom prst="rect">
-            <a:avLst/>
-          </a:prstGeom>
-          <a:noFill/>
-          <a:ln/>
-        </p:spPr>
-        <p:txBody>
-          <a:bodyPr wrap="square" lIns="0" tIns="0" rIns="0" bIns="0" rtlCol="0" anchor="t"/>
-          <a:lstStyle/>
-          <a:p>
-            <a:pPr algn="ctr" indent="0" marL="0">
-              <a:buNone/>
-            </a:pPr>
-            <a:r>
-              <a:rPr lang="en-US" sz="1050" dirty="0">
-                <a:solidFill>
-                  <a:srgbClr val="567480"/>
+            <a:endParaRPr lang="en-US" sz="1300" dirty="0"/>
+          </a:p>
+        </p:txBody>
+      </p:sp>
+      <p:sp>
+        <p:nvSpPr>
+          <p:cNvPr id="21" name="Text 19"/>
+          <p:cNvSpPr/>
+          <p:nvPr/>
+        </p:nvSpPr>
+        <p:spPr>
+          <a:xfrm>
+            <a:off x="4621682" y="4453128"/>
+            <a:ext cx="1099261" cy="365760"/>
+          </a:xfrm>
+          <a:prstGeom prst="rect">
+            <a:avLst/>
+          </a:prstGeom>
+          <a:noFill/>
+          <a:ln/>
+        </p:spPr>
+        <p:txBody>
+          <a:bodyPr wrap="square" lIns="0" tIns="0" rIns="0" bIns="0" rtlCol="0" anchor="ctr"/>
+          <a:lstStyle/>
+          <a:p>
+            <a:pPr indent="0" marL="0">
+              <a:buNone/>
+            </a:pPr>
+            <a:r>
+              <a:rPr lang="en-US" sz="900" dirty="0">
+                <a:solidFill>
+                  <a:srgbClr val="8B98A6"/>
                 </a:solidFill>
                 <a:latin typeface="Calibri" pitchFamily="34" charset="0"/>
                 <a:ea typeface="Calibri" pitchFamily="34" charset="-122"/>
@@ -1980,32 +2023,52 @@
               </a:rPr>
               <a:t>1 batched call / cycle</a:t>
             </a:r>
-            <a:endParaRPr lang="en-US" sz="1050" dirty="0"/>
-          </a:p>
-        </p:txBody>
-      </p:sp>
-      <p:sp>
-        <p:nvSpPr>
-          <p:cNvPr id="17" name="Shape 15"/>
-          <p:cNvSpPr/>
-          <p:nvPr/>
-        </p:nvSpPr>
-        <p:spPr>
-          <a:xfrm>
-            <a:off x="9235440" y="3520440"/>
-            <a:ext cx="2286000" cy="1280160"/>
+            <a:endParaRPr lang="en-US" sz="900" dirty="0"/>
+          </a:p>
+        </p:txBody>
+      </p:sp>
+      <p:sp>
+        <p:nvSpPr>
+          <p:cNvPr id="22" name="Shape 20"/>
+          <p:cNvSpPr/>
+          <p:nvPr/>
+        </p:nvSpPr>
+        <p:spPr>
+          <a:xfrm>
+            <a:off x="5940400" y="3845052"/>
+            <a:ext cx="310896" cy="219456"/>
+          </a:xfrm>
+          <a:prstGeom prst="rightArrow">
+            <a:avLst/>
+          </a:prstGeom>
+          <a:solidFill>
+            <a:srgbClr val="8B98A6"/>
+          </a:solidFill>
+          <a:ln/>
+        </p:spPr>
+      </p:sp>
+      <p:sp>
+        <p:nvSpPr>
+          <p:cNvPr id="23" name="Shape 21"/>
+          <p:cNvSpPr/>
+          <p:nvPr/>
+        </p:nvSpPr>
+        <p:spPr>
+          <a:xfrm>
+            <a:off x="6324448" y="2971800"/>
+            <a:ext cx="1391869" cy="1965960"/>
           </a:xfrm>
           <a:prstGeom prst="roundRect">
             <a:avLst>
-              <a:gd name="adj" fmla="val 7143"/>
+              <a:gd name="adj" fmla="val 5256"/>
             </a:avLst>
           </a:prstGeom>
           <a:solidFill>
-            <a:srgbClr val="EDF4F7"/>
-          </a:solidFill>
-          <a:ln w="19050">
+            <a:srgbClr val="123456"/>
+          </a:solidFill>
+          <a:ln w="12700">
             <a:solidFill>
-              <a:srgbClr val="0F5E7E"/>
+              <a:srgbClr val="26486A"/>
             </a:solidFill>
             <a:prstDash val="solid"/>
           </a:ln>
@@ -2013,34 +2076,14 @@
       </p:sp>
       <p:sp>
         <p:nvSpPr>
-          <p:cNvPr id="18" name="Shape 16"/>
-          <p:cNvSpPr/>
-          <p:nvPr/>
-        </p:nvSpPr>
-        <p:spPr>
-          <a:xfrm>
-            <a:off x="10287000" y="3685032"/>
-            <a:ext cx="182880" cy="182880"/>
-          </a:xfrm>
-          <a:prstGeom prst="ellipse">
-            <a:avLst/>
-          </a:prstGeom>
-          <a:solidFill>
-            <a:srgbClr val="0F5E7E"/>
-          </a:solidFill>
-          <a:ln/>
-        </p:spPr>
-      </p:sp>
-      <p:sp>
-        <p:nvSpPr>
-          <p:cNvPr id="19" name="Text 17"/>
-          <p:cNvSpPr/>
-          <p:nvPr/>
-        </p:nvSpPr>
-        <p:spPr>
-          <a:xfrm>
-            <a:off x="9208008" y="3904488"/>
-            <a:ext cx="2340864" cy="365760"/>
+          <p:cNvPr id="24" name="Text 22"/>
+          <p:cNvSpPr/>
+          <p:nvPr/>
+        </p:nvSpPr>
+        <p:spPr>
+          <a:xfrm>
+            <a:off x="6470752" y="3154680"/>
+            <a:ext cx="1099261" cy="320040"/>
           </a:xfrm>
           <a:prstGeom prst="rect">
             <a:avLst/>
@@ -2052,13 +2095,55 @@
           <a:bodyPr wrap="square" lIns="0" tIns="0" rIns="0" bIns="0" rtlCol="0" anchor="ctr"/>
           <a:lstStyle/>
           <a:p>
-            <a:pPr algn="ctr" indent="0" marL="0">
-              <a:buNone/>
-            </a:pPr>
-            <a:r>
-              <a:rPr lang="en-US" sz="1450" b="1" dirty="0">
-                <a:solidFill>
-                  <a:srgbClr val="102A38"/>
+            <a:pPr indent="0" marL="0">
+              <a:buNone/>
+            </a:pPr>
+            <a:r>
+              <a:rPr lang="en-US" sz="1100" dirty="0">
+                <a:solidFill>
+                  <a:srgbClr val="57B9D9"/>
+                </a:solidFill>
+                <a:latin typeface="Consolas" pitchFamily="34" charset="0"/>
+                <a:ea typeface="Consolas" pitchFamily="34" charset="-122"/>
+                <a:cs typeface="Consolas" pitchFamily="34" charset="-120"/>
+              </a:rPr>
+              <a:t>04</a:t>
+            </a:r>
+            <a:endParaRPr lang="en-US" sz="1100" dirty="0"/>
+          </a:p>
+        </p:txBody>
+      </p:sp>
+      <p:sp>
+        <p:nvSpPr>
+          <p:cNvPr id="25" name="Text 23"/>
+          <p:cNvSpPr/>
+          <p:nvPr/>
+        </p:nvSpPr>
+        <p:spPr>
+          <a:xfrm>
+            <a:off x="6470752" y="3593592"/>
+            <a:ext cx="1099261" cy="868680"/>
+          </a:xfrm>
+          <a:prstGeom prst="rect">
+            <a:avLst/>
+          </a:prstGeom>
+          <a:noFill/>
+          <a:ln/>
+        </p:spPr>
+        <p:txBody>
+          <a:bodyPr wrap="square" lIns="0" tIns="0" rIns="0" bIns="0" rtlCol="0" anchor="t"/>
+          <a:lstStyle/>
+          <a:p>
+            <a:pPr indent="0" marL="0">
+              <a:lnSpc>
+                <a:spcPct val="96000"/>
+              </a:lnSpc>
+              <a:buNone/>
+            </a:pPr>
+            <a:r>
+              <a:rPr lang="en-US" sz="1300" b="1" dirty="0">
+                <a:solidFill>
+                  <a:srgbClr val="EEF2F6"/>
                 </a:solidFill>
                 <a:latin typeface="Calibri" pitchFamily="34" charset="0"/>
                 <a:ea typeface="Calibri" pitchFamily="34" charset="-122"/>
@@ -2066,38 +2151,38 @@
               </a:rPr>
               <a:t>AWS Lambda</a:t>
             </a:r>
-            <a:endParaRPr lang="en-US" sz="1450" dirty="0"/>
-          </a:p>
-        </p:txBody>
-      </p:sp>
-      <p:sp>
-        <p:nvSpPr>
-          <p:cNvPr id="20" name="Text 18"/>
-          <p:cNvSpPr/>
-          <p:nvPr/>
-        </p:nvSpPr>
-        <p:spPr>
-          <a:xfrm>
-            <a:off x="9235440" y="4251960"/>
-            <a:ext cx="2286000" cy="411480"/>
-          </a:xfrm>
-          <a:prstGeom prst="rect">
-            <a:avLst/>
-          </a:prstGeom>
-          <a:noFill/>
-          <a:ln/>
-        </p:spPr>
-        <p:txBody>
-          <a:bodyPr wrap="square" lIns="0" tIns="0" rIns="0" bIns="0" rtlCol="0" anchor="t"/>
-          <a:lstStyle/>
-          <a:p>
-            <a:pPr algn="ctr" indent="0" marL="0">
-              <a:buNone/>
-            </a:pPr>
-            <a:r>
-              <a:rPr lang="en-US" sz="1050" dirty="0">
-                <a:solidFill>
-                  <a:srgbClr val="567480"/>
+            <a:endParaRPr lang="en-US" sz="1300" dirty="0"/>
+          </a:p>
+        </p:txBody>
+      </p:sp>
+      <p:sp>
+        <p:nvSpPr>
+          <p:cNvPr id="26" name="Text 24"/>
+          <p:cNvSpPr/>
+          <p:nvPr/>
+        </p:nvSpPr>
+        <p:spPr>
+          <a:xfrm>
+            <a:off x="6470752" y="4453128"/>
+            <a:ext cx="1099261" cy="365760"/>
+          </a:xfrm>
+          <a:prstGeom prst="rect">
+            <a:avLst/>
+          </a:prstGeom>
+          <a:noFill/>
+          <a:ln/>
+        </p:spPr>
+        <p:txBody>
+          <a:bodyPr wrap="square" lIns="0" tIns="0" rIns="0" bIns="0" rtlCol="0" anchor="ctr"/>
+          <a:lstStyle/>
+          <a:p>
+            <a:pPr indent="0" marL="0">
+              <a:buNone/>
+            </a:pPr>
+            <a:r>
+              <a:rPr lang="en-US" sz="900" dirty="0">
+                <a:solidFill>
+                  <a:srgbClr val="8B98A6"/>
                 </a:solidFill>
                 <a:latin typeface="Calibri" pitchFamily="34" charset="0"/>
                 <a:ea typeface="Calibri" pitchFamily="34" charset="-122"/>
@@ -2105,57 +2190,52 @@
               </a:rPr>
               <a:t>nodejs20 ingest</a:t>
             </a:r>
-            <a:endParaRPr lang="en-US" sz="1050" dirty="0"/>
-          </a:p>
-        </p:txBody>
-      </p:sp>
-      <p:sp>
-        <p:nvSpPr>
-          <p:cNvPr id="21" name="Shape 19"/>
-          <p:cNvSpPr/>
-          <p:nvPr/>
-        </p:nvSpPr>
-        <p:spPr>
-          <a:xfrm>
-            <a:off x="7242048" y="4160520"/>
-            <a:ext cx="1975104" cy="0"/>
-          </a:xfrm>
-          <a:prstGeom prst="line">
-            <a:avLst/>
-          </a:prstGeom>
-          <a:noFill/>
-          <a:ln w="25400">
-            <a:solidFill>
-              <a:srgbClr val="4FA6BE"/>
-            </a:solidFill>
-            <a:prstDash val="solid"/>
-            <a:headEnd type="triangle"/>
-            <a:tailEnd type="oval"/>
-          </a:ln>
-        </p:spPr>
-      </p:sp>
-      <p:sp>
-        <p:nvSpPr>
-          <p:cNvPr id="22" name="Shape 20"/>
-          <p:cNvSpPr/>
-          <p:nvPr/>
-        </p:nvSpPr>
-        <p:spPr>
-          <a:xfrm>
-            <a:off x="4937760" y="3520440"/>
-            <a:ext cx="2286000" cy="1280160"/>
+            <a:endParaRPr lang="en-US" sz="900" dirty="0"/>
+          </a:p>
+        </p:txBody>
+      </p:sp>
+      <p:sp>
+        <p:nvSpPr>
+          <p:cNvPr id="27" name="Shape 25"/>
+          <p:cNvSpPr/>
+          <p:nvPr/>
+        </p:nvSpPr>
+        <p:spPr>
+          <a:xfrm>
+            <a:off x="7789469" y="3845052"/>
+            <a:ext cx="310896" cy="219456"/>
+          </a:xfrm>
+          <a:prstGeom prst="rightArrow">
+            <a:avLst/>
+          </a:prstGeom>
+          <a:solidFill>
+            <a:srgbClr val="8B98A6"/>
+          </a:solidFill>
+          <a:ln/>
+        </p:spPr>
+      </p:sp>
+      <p:sp>
+        <p:nvSpPr>
+          <p:cNvPr id="28" name="Shape 26"/>
+          <p:cNvSpPr/>
+          <p:nvPr/>
+        </p:nvSpPr>
+        <p:spPr>
+          <a:xfrm>
+            <a:off x="8173517" y="2971800"/>
+            <a:ext cx="1391869" cy="1965960"/>
           </a:xfrm>
           <a:prstGeom prst="roundRect">
             <a:avLst>
-              <a:gd name="adj" fmla="val 7143"/>
+              <a:gd name="adj" fmla="val 5256"/>
             </a:avLst>
           </a:prstGeom>
           <a:solidFill>
-            <a:srgbClr val="EDF4F7"/>
-          </a:solidFill>
-          <a:ln w="19050">
+            <a:srgbClr val="123456"/>
+          </a:solidFill>
+          <a:ln w="12700">
             <a:solidFill>
-              <a:srgbClr val="0F5E7E"/>
+              <a:srgbClr val="26486A"/>
             </a:solidFill>
             <a:prstDash val="solid"/>
           </a:ln>
@@ -2163,34 +2243,14 @@
       </p:sp>
       <p:sp>
         <p:nvSpPr>
-          <p:cNvPr id="23" name="Shape 21"/>
-          <p:cNvSpPr/>
-          <p:nvPr/>
-        </p:nvSpPr>
-        <p:spPr>
-          <a:xfrm>
-            <a:off x="5989320" y="3685032"/>
-            <a:ext cx="182880" cy="182880"/>
-          </a:xfrm>
-          <a:prstGeom prst="ellipse">
-            <a:avLst/>
-          </a:prstGeom>
-          <a:solidFill>
-            <a:srgbClr val="0F5E7E"/>
-          </a:solidFill>
-          <a:ln/>
-        </p:spPr>
-      </p:sp>
-      <p:sp>
-        <p:nvSpPr>
-          <p:cNvPr id="24" name="Text 22"/>
-          <p:cNvSpPr/>
-          <p:nvPr/>
-        </p:nvSpPr>
-        <p:spPr>
-          <a:xfrm>
-            <a:off x="4910328" y="3904488"/>
-            <a:ext cx="2340864" cy="365760"/>
+          <p:cNvPr id="29" name="Text 27"/>
+          <p:cNvSpPr/>
+          <p:nvPr/>
+        </p:nvSpPr>
+        <p:spPr>
+          <a:xfrm>
+            <a:off x="8319821" y="3154680"/>
+            <a:ext cx="1099261" cy="320040"/>
           </a:xfrm>
           <a:prstGeom prst="rect">
             <a:avLst/>
@@ -2202,13 +2262,55 @@
           <a:bodyPr wrap="square" lIns="0" tIns="0" rIns="0" bIns="0" rtlCol="0" anchor="ctr"/>
           <a:lstStyle/>
           <a:p>
-            <a:pPr algn="ctr" indent="0" marL="0">
-              <a:buNone/>
-            </a:pPr>
-            <a:r>
-              <a:rPr lang="en-US" sz="1450" b="1" dirty="0">
-                <a:solidFill>
-                  <a:srgbClr val="102A38"/>
+            <a:pPr indent="0" marL="0">
+              <a:buNone/>
+            </a:pPr>
+            <a:r>
+              <a:rPr lang="en-US" sz="1100" dirty="0">
+                <a:solidFill>
+                  <a:srgbClr val="57B9D9"/>
+                </a:solidFill>
+                <a:latin typeface="Consolas" pitchFamily="34" charset="0"/>
+                <a:ea typeface="Consolas" pitchFamily="34" charset="-122"/>
+                <a:cs typeface="Consolas" pitchFamily="34" charset="-120"/>
+              </a:rPr>
+              <a:t>05</a:t>
+            </a:r>
+            <a:endParaRPr lang="en-US" sz="1100" dirty="0"/>
+          </a:p>
+        </p:txBody>
+      </p:sp>
+      <p:sp>
+        <p:nvSpPr>
+          <p:cNvPr id="30" name="Text 28"/>
+          <p:cNvSpPr/>
+          <p:nvPr/>
+        </p:nvSpPr>
+        <p:spPr>
+          <a:xfrm>
+            <a:off x="8319821" y="3593592"/>
+            <a:ext cx="1099261" cy="868680"/>
+          </a:xfrm>
+          <a:prstGeom prst="rect">
+            <a:avLst/>
+          </a:prstGeom>
+          <a:noFill/>
+          <a:ln/>
+        </p:spPr>
+        <p:txBody>
+          <a:bodyPr wrap="square" lIns="0" tIns="0" rIns="0" bIns="0" rtlCol="0" anchor="t"/>
+          <a:lstStyle/>
+          <a:p>
+            <a:pPr indent="0" marL="0">
+              <a:lnSpc>
+                <a:spcPct val="96000"/>
+              </a:lnSpc>
+              <a:buNone/>
+            </a:pPr>
+            <a:r>
+              <a:rPr lang="en-US" sz="1300" b="1" dirty="0">
+                <a:solidFill>
+                  <a:srgbClr val="EEF2F6"/>
                 </a:solidFill>
                 <a:latin typeface="Calibri" pitchFamily="34" charset="0"/>
                 <a:ea typeface="Calibri" pitchFamily="34" charset="-122"/>
@@ -2216,38 +2318,38 @@
               </a:rPr>
               <a:t>DynamoDB</a:t>
             </a:r>
-            <a:endParaRPr lang="en-US" sz="1450" dirty="0"/>
-          </a:p>
-        </p:txBody>
-      </p:sp>
-      <p:sp>
-        <p:nvSpPr>
-          <p:cNvPr id="25" name="Text 23"/>
-          <p:cNvSpPr/>
-          <p:nvPr/>
-        </p:nvSpPr>
-        <p:spPr>
-          <a:xfrm>
-            <a:off x="4937760" y="4251960"/>
-            <a:ext cx="2286000" cy="411480"/>
-          </a:xfrm>
-          <a:prstGeom prst="rect">
-            <a:avLst/>
-          </a:prstGeom>
-          <a:noFill/>
-          <a:ln/>
-        </p:spPr>
-        <p:txBody>
-          <a:bodyPr wrap="square" lIns="0" tIns="0" rIns="0" bIns="0" rtlCol="0" anchor="t"/>
-          <a:lstStyle/>
-          <a:p>
-            <a:pPr algn="ctr" indent="0" marL="0">
-              <a:buNone/>
-            </a:pPr>
-            <a:r>
-              <a:rPr lang="en-US" sz="1050" dirty="0">
-                <a:solidFill>
-                  <a:srgbClr val="567480"/>
+            <a:endParaRPr lang="en-US" sz="1300" dirty="0"/>
+          </a:p>
+        </p:txBody>
+      </p:sp>
+      <p:sp>
+        <p:nvSpPr>
+          <p:cNvPr id="31" name="Text 29"/>
+          <p:cNvSpPr/>
+          <p:nvPr/>
+        </p:nvSpPr>
+        <p:spPr>
+          <a:xfrm>
+            <a:off x="8319821" y="4453128"/>
+            <a:ext cx="1099261" cy="365760"/>
+          </a:xfrm>
+          <a:prstGeom prst="rect">
+            <a:avLst/>
+          </a:prstGeom>
+          <a:noFill/>
+          <a:ln/>
+        </p:spPr>
+        <p:txBody>
+          <a:bodyPr wrap="square" lIns="0" tIns="0" rIns="0" bIns="0" rtlCol="0" anchor="ctr"/>
+          <a:lstStyle/>
+          <a:p>
+            <a:pPr indent="0" marL="0">
+              <a:buNone/>
+            </a:pPr>
+            <a:r>
+              <a:rPr lang="en-US" sz="900" dirty="0">
+                <a:solidFill>
+                  <a:srgbClr val="8B98A6"/>
                 </a:solidFill>
                 <a:latin typeface="Calibri" pitchFamily="34" charset="0"/>
                 <a:ea typeface="Calibri" pitchFamily="34" charset="-122"/>
@@ -2255,57 +2357,52 @@
               </a:rPr>
               <a:t>time-ordered store</a:t>
             </a:r>
-            <a:endParaRPr lang="en-US" sz="1050" dirty="0"/>
-          </a:p>
-        </p:txBody>
-      </p:sp>
-      <p:sp>
-        <p:nvSpPr>
-          <p:cNvPr id="26" name="Shape 24"/>
-          <p:cNvSpPr/>
-          <p:nvPr/>
-        </p:nvSpPr>
-        <p:spPr>
-          <a:xfrm>
-            <a:off x="2944368" y="4160520"/>
-            <a:ext cx="1975104" cy="0"/>
-          </a:xfrm>
-          <a:prstGeom prst="line">
-            <a:avLst/>
-          </a:prstGeom>
-          <a:noFill/>
-          <a:ln w="25400">
-            <a:solidFill>
-              <a:srgbClr val="4FA6BE"/>
-            </a:solidFill>
-            <a:prstDash val="solid"/>
-            <a:headEnd type="triangle"/>
-            <a:tailEnd type="oval"/>
-          </a:ln>
-        </p:spPr>
-      </p:sp>
-      <p:sp>
-        <p:nvSpPr>
-          <p:cNvPr id="27" name="Shape 25"/>
-          <p:cNvSpPr/>
-          <p:nvPr/>
-        </p:nvSpPr>
-        <p:spPr>
-          <a:xfrm>
-            <a:off x="640080" y="3520440"/>
-            <a:ext cx="2286000" cy="1280160"/>
+            <a:endParaRPr lang="en-US" sz="900" dirty="0"/>
+          </a:p>
+        </p:txBody>
+      </p:sp>
+      <p:sp>
+        <p:nvSpPr>
+          <p:cNvPr id="32" name="Shape 30"/>
+          <p:cNvSpPr/>
+          <p:nvPr/>
+        </p:nvSpPr>
+        <p:spPr>
+          <a:xfrm>
+            <a:off x="9638538" y="3845052"/>
+            <a:ext cx="310896" cy="219456"/>
+          </a:xfrm>
+          <a:prstGeom prst="rightArrow">
+            <a:avLst/>
+          </a:prstGeom>
+          <a:solidFill>
+            <a:srgbClr val="8B98A6"/>
+          </a:solidFill>
+          <a:ln/>
+        </p:spPr>
+      </p:sp>
+      <p:sp>
+        <p:nvSpPr>
+          <p:cNvPr id="33" name="Shape 31"/>
+          <p:cNvSpPr/>
+          <p:nvPr/>
+        </p:nvSpPr>
+        <p:spPr>
+          <a:xfrm>
+            <a:off x="10022586" y="2971800"/>
+            <a:ext cx="1391869" cy="1965960"/>
           </a:xfrm>
           <a:prstGeom prst="roundRect">
             <a:avLst>
-              <a:gd name="adj" fmla="val 7143"/>
+              <a:gd name="adj" fmla="val 5256"/>
             </a:avLst>
           </a:prstGeom>
           <a:solidFill>
-            <a:srgbClr val="EDF4F7"/>
-          </a:solidFill>
-          <a:ln w="19050">
+            <a:srgbClr val="123456"/>
+          </a:solidFill>
+          <a:ln w="12700">
             <a:solidFill>
-              <a:srgbClr val="1E86A6"/>
+              <a:srgbClr val="26486A"/>
             </a:solidFill>
             <a:prstDash val="solid"/>
           </a:ln>
@@ -2313,34 +2410,14 @@
       </p:sp>
       <p:sp>
         <p:nvSpPr>
-          <p:cNvPr id="28" name="Shape 26"/>
-          <p:cNvSpPr/>
-          <p:nvPr/>
-        </p:nvSpPr>
-        <p:spPr>
-          <a:xfrm>
-            <a:off x="1691640" y="3685032"/>
-            <a:ext cx="182880" cy="182880"/>
-          </a:xfrm>
-          <a:prstGeom prst="ellipse">
-            <a:avLst/>
-          </a:prstGeom>
-          <a:solidFill>
-            <a:srgbClr val="1E86A6"/>
-          </a:solidFill>
-          <a:ln/>
-        </p:spPr>
-      </p:sp>
-      <p:sp>
-        <p:nvSpPr>
-          <p:cNvPr id="29" name="Text 27"/>
-          <p:cNvSpPr/>
-          <p:nvPr/>
-        </p:nvSpPr>
-        <p:spPr>
-          <a:xfrm>
-            <a:off x="612648" y="3904488"/>
-            <a:ext cx="2340864" cy="365760"/>
+          <p:cNvPr id="34" name="Text 32"/>
+          <p:cNvSpPr/>
+          <p:nvPr/>
+        </p:nvSpPr>
+        <p:spPr>
+          <a:xfrm>
+            <a:off x="10168890" y="3154680"/>
+            <a:ext cx="1099261" cy="320040"/>
           </a:xfrm>
           <a:prstGeom prst="rect">
             <a:avLst/>
@@ -2352,13 +2429,55 @@
           <a:bodyPr wrap="square" lIns="0" tIns="0" rIns="0" bIns="0" rtlCol="0" anchor="ctr"/>
           <a:lstStyle/>
           <a:p>
-            <a:pPr algn="ctr" indent="0" marL="0">
-              <a:buNone/>
-            </a:pPr>
-            <a:r>
-              <a:rPr lang="en-US" sz="1450" b="1" dirty="0">
-                <a:solidFill>
-                  <a:srgbClr val="102A38"/>
+            <a:pPr indent="0" marL="0">
+              <a:buNone/>
+            </a:pPr>
+            <a:r>
+              <a:rPr lang="en-US" sz="1100" dirty="0">
+                <a:solidFill>
+                  <a:srgbClr val="57B9D9"/>
+                </a:solidFill>
+                <a:latin typeface="Consolas" pitchFamily="34" charset="0"/>
+                <a:ea typeface="Consolas" pitchFamily="34" charset="-122"/>
+                <a:cs typeface="Consolas" pitchFamily="34" charset="-120"/>
+              </a:rPr>
+              <a:t>06</a:t>
+            </a:r>
+            <a:endParaRPr lang="en-US" sz="1100" dirty="0"/>
+          </a:p>
+        </p:txBody>
+      </p:sp>
+      <p:sp>
+        <p:nvSpPr>
+          <p:cNvPr id="35" name="Text 33"/>
+          <p:cNvSpPr/>
+          <p:nvPr/>
+        </p:nvSpPr>
+        <p:spPr>
+          <a:xfrm>
+            <a:off x="10168890" y="3593592"/>
+            <a:ext cx="1099261" cy="868680"/>
+          </a:xfrm>
+          <a:prstGeom prst="rect">
+            <a:avLst/>
+          </a:prstGeom>
+          <a:noFill/>
+          <a:ln/>
+        </p:spPr>
+        <p:txBody>
+          <a:bodyPr wrap="square" lIns="0" tIns="0" rIns="0" bIns="0" rtlCol="0" anchor="t"/>
+          <a:lstStyle/>
+          <a:p>
+            <a:pPr indent="0" marL="0">
+              <a:lnSpc>
+                <a:spcPct val="96000"/>
+              </a:lnSpc>
+              <a:buNone/>
+            </a:pPr>
+            <a:r>
+              <a:rPr lang="en-US" sz="1300" b="1" dirty="0">
+                <a:solidFill>
+                  <a:srgbClr val="EEF2F6"/>
                 </a:solidFill>
                 <a:latin typeface="Calibri" pitchFamily="34" charset="0"/>
                 <a:ea typeface="Calibri" pitchFamily="34" charset="-122"/>
@@ -2366,38 +2485,38 @@
               </a:rPr>
               <a:t>API GW + S3</a:t>
             </a:r>
-            <a:endParaRPr lang="en-US" sz="1450" dirty="0"/>
-          </a:p>
-        </p:txBody>
-      </p:sp>
-      <p:sp>
-        <p:nvSpPr>
-          <p:cNvPr id="30" name="Text 28"/>
-          <p:cNvSpPr/>
-          <p:nvPr/>
-        </p:nvSpPr>
-        <p:spPr>
-          <a:xfrm>
-            <a:off x="640080" y="4251960"/>
-            <a:ext cx="2286000" cy="411480"/>
-          </a:xfrm>
-          <a:prstGeom prst="rect">
-            <a:avLst/>
-          </a:prstGeom>
-          <a:noFill/>
-          <a:ln/>
-        </p:spPr>
-        <p:txBody>
-          <a:bodyPr wrap="square" lIns="0" tIns="0" rIns="0" bIns="0" rtlCol="0" anchor="t"/>
-          <a:lstStyle/>
-          <a:p>
-            <a:pPr algn="ctr" indent="0" marL="0">
-              <a:buNone/>
-            </a:pPr>
-            <a:r>
-              <a:rPr lang="en-US" sz="1050" dirty="0">
-                <a:solidFill>
-                  <a:srgbClr val="567480"/>
+            <a:endParaRPr lang="en-US" sz="1300" dirty="0"/>
+          </a:p>
+        </p:txBody>
+      </p:sp>
+      <p:sp>
+        <p:nvSpPr>
+          <p:cNvPr id="36" name="Text 34"/>
+          <p:cNvSpPr/>
+          <p:nvPr/>
+        </p:nvSpPr>
+        <p:spPr>
+          <a:xfrm>
+            <a:off x="10168890" y="4453128"/>
+            <a:ext cx="1099261" cy="365760"/>
+          </a:xfrm>
+          <a:prstGeom prst="rect">
+            <a:avLst/>
+          </a:prstGeom>
+          <a:noFill/>
+          <a:ln/>
+        </p:spPr>
+        <p:txBody>
+          <a:bodyPr wrap="square" lIns="0" tIns="0" rIns="0" bIns="0" rtlCol="0" anchor="ctr"/>
+          <a:lstStyle/>
+          <a:p>
+            <a:pPr indent="0" marL="0">
+              <a:buNone/>
+            </a:pPr>
+            <a:r>
+              <a:rPr lang="en-US" sz="900" dirty="0">
+                <a:solidFill>
+                  <a:srgbClr val="8B98A6"/>
                 </a:solidFill>
                 <a:latin typeface="Calibri" pitchFamily="34" charset="0"/>
                 <a:ea typeface="Calibri" pitchFamily="34" charset="-122"/>
@@ -2405,70 +2524,7 @@
               </a:rPr>
               <a:t>live dashboard</a:t>
             </a:r>
-            <a:endParaRPr lang="en-US" sz="1050" dirty="0"/>
-          </a:p>
-        </p:txBody>
-      </p:sp>
-      <p:sp>
-        <p:nvSpPr>
-          <p:cNvPr id="31" name="Shape 29"/>
-          <p:cNvSpPr/>
-          <p:nvPr/>
-        </p:nvSpPr>
-        <p:spPr>
-          <a:xfrm>
-            <a:off x="10378440" y="3154680"/>
-            <a:ext cx="0" cy="365760"/>
-          </a:xfrm>
-          <a:prstGeom prst="line">
-            <a:avLst/>
-          </a:prstGeom>
-          <a:noFill/>
-          <a:ln w="25400">
-            <a:solidFill>
-              <a:srgbClr val="4FA6BE"/>
-            </a:solidFill>
-            <a:prstDash val="solid"/>
-            <a:tailEnd type="triangle"/>
-          </a:ln>
-        </p:spPr>
-      </p:sp>
-      <p:sp>
-        <p:nvSpPr>
-          <p:cNvPr id="32" name="Text 30"/>
-          <p:cNvSpPr/>
-          <p:nvPr/>
-        </p:nvSpPr>
-        <p:spPr>
-          <a:xfrm>
-            <a:off x="640080" y="5257800"/>
-            <a:ext cx="10972800" cy="731520"/>
-          </a:xfrm>
-          <a:prstGeom prst="rect">
-            <a:avLst/>
-          </a:prstGeom>
-          <a:noFill/>
-          <a:ln/>
-        </p:spPr>
-        <p:txBody>
-          <a:bodyPr wrap="square" rtlCol="0" anchor="ctr"/>
-          <a:lstStyle/>
-          <a:p>
-            <a:pPr algn="ctr" indent="0" marL="0">
-              <a:buNone/>
-            </a:pPr>
-            <a:r>
-              <a:rPr lang="en-US" sz="1500" i="1" dirty="0">
-                <a:solidFill>
-                  <a:srgbClr val="0F5E7E"/>
-                </a:solidFill>
-                <a:latin typeface="Calibri" pitchFamily="34" charset="0"/>
-                <a:ea typeface="Calibri" pitchFamily="34" charset="-122"/>
-                <a:cs typeface="Calibri" pitchFamily="34" charset="-120"/>
-              </a:rPr>
-              <a:t>Four condition rules run at the edge, so a fault is flagged in the same window it appears; only compact summaries cross the limited sea link.</a:t>
-            </a:r>
-            <a:endParaRPr lang="en-US" sz="1500" dirty="0"/>
+            <a:endParaRPr lang="en-US" sz="900" dirty="0"/>
           </a:p>
         </p:txBody>
       </p:sp>
@@ -2486,7 +2542,7 @@
     <p:bg>
       <p:bgPr>
         <a:solidFill>
-          <a:srgbClr val="FFFFFF"/>
+          <a:srgbClr val="0A2540"/>
         </a:solidFill>
       </p:bgPr>
     </p:bg>
@@ -2506,14 +2562,197 @@
       </p:grpSpPr>
       <p:sp>
         <p:nvSpPr>
-          <p:cNvPr id="2" name="Text 0"/>
-          <p:cNvSpPr/>
-          <p:nvPr/>
-        </p:nvSpPr>
-        <p:spPr>
-          <a:xfrm>
-            <a:off x="640080" y="457200"/>
-            <a:ext cx="7315200" cy="640080"/>
+          <p:cNvPr id="2" name="Shape 0"/>
+          <p:cNvSpPr/>
+          <p:nvPr/>
+        </p:nvSpPr>
+        <p:spPr>
+          <a:xfrm>
+            <a:off x="9265615" y="457200"/>
+            <a:ext cx="2194560" cy="1005840"/>
+          </a:xfrm>
+          <a:prstGeom prst="roundRect">
+            <a:avLst>
+              <a:gd name="adj" fmla="val 9091"/>
+            </a:avLst>
+          </a:prstGeom>
+          <a:solidFill>
+            <a:srgbClr val="2F91B1"/>
+          </a:solidFill>
+          <a:ln/>
+        </p:spPr>
+      </p:sp>
+      <p:sp>
+        <p:nvSpPr>
+          <p:cNvPr id="3" name="Shape 1"/>
+          <p:cNvSpPr/>
+          <p:nvPr/>
+        </p:nvSpPr>
+        <p:spPr>
+          <a:xfrm>
+            <a:off x="9585655" y="777240"/>
+            <a:ext cx="2194560" cy="1005840"/>
+          </a:xfrm>
+          <a:prstGeom prst="roundRect">
+            <a:avLst>
+              <a:gd name="adj" fmla="val 9091"/>
+            </a:avLst>
+          </a:prstGeom>
+          <a:solidFill>
+            <a:srgbClr val="2F91B1"/>
+          </a:solidFill>
+          <a:ln/>
+        </p:spPr>
+      </p:sp>
+      <p:sp>
+        <p:nvSpPr>
+          <p:cNvPr id="4" name="Shape 2"/>
+          <p:cNvSpPr/>
+          <p:nvPr/>
+        </p:nvSpPr>
+        <p:spPr>
+          <a:xfrm>
+            <a:off x="9905695" y="1097280"/>
+            <a:ext cx="2194560" cy="1005840"/>
+          </a:xfrm>
+          <a:prstGeom prst="roundRect">
+            <a:avLst>
+              <a:gd name="adj" fmla="val 9091"/>
+            </a:avLst>
+          </a:prstGeom>
+          <a:solidFill>
+            <a:srgbClr val="57B9D9"/>
+          </a:solidFill>
+          <a:ln/>
+        </p:spPr>
+      </p:sp>
+      <p:sp>
+        <p:nvSpPr>
+          <p:cNvPr id="5" name="Text 3"/>
+          <p:cNvSpPr/>
+          <p:nvPr/>
+        </p:nvSpPr>
+        <p:spPr>
+          <a:xfrm>
+            <a:off x="777240" y="731520"/>
+            <a:ext cx="914400" cy="640080"/>
+          </a:xfrm>
+          <a:prstGeom prst="rect">
+            <a:avLst/>
+          </a:prstGeom>
+          <a:noFill/>
+          <a:ln/>
+        </p:spPr>
+        <p:txBody>
+          <a:bodyPr wrap="square" lIns="0" tIns="0" rIns="0" bIns="0" rtlCol="0" anchor="ctr"/>
+          <a:lstStyle/>
+          <a:p>
+            <a:pPr indent="0" marL="0">
+              <a:buNone/>
+            </a:pPr>
+            <a:r>
+              <a:rPr lang="en-US" sz="3000" b="1" dirty="0">
+                <a:solidFill>
+                  <a:srgbClr val="57B9D9"/>
+                </a:solidFill>
+                <a:latin typeface="Calibri" pitchFamily="34" charset="0"/>
+                <a:ea typeface="Calibri" pitchFamily="34" charset="-122"/>
+                <a:cs typeface="Calibri" pitchFamily="34" charset="-120"/>
+              </a:rPr>
+              <a:t>02</a:t>
+            </a:r>
+            <a:endParaRPr lang="en-US" sz="3000" dirty="0"/>
+          </a:p>
+        </p:txBody>
+      </p:sp>
+      <p:sp>
+        <p:nvSpPr>
+          <p:cNvPr id="6" name="Text 4"/>
+          <p:cNvSpPr/>
+          <p:nvPr/>
+        </p:nvSpPr>
+        <p:spPr>
+          <a:xfrm>
+            <a:off x="1645920" y="905256"/>
+            <a:ext cx="9768535" cy="274320"/>
+          </a:xfrm>
+          <a:prstGeom prst="rect">
+            <a:avLst/>
+          </a:prstGeom>
+          <a:noFill/>
+          <a:ln/>
+        </p:spPr>
+        <p:txBody>
+          <a:bodyPr wrap="square" lIns="0" tIns="0" rIns="0" bIns="0" rtlCol="0" anchor="ctr"/>
+          <a:lstStyle/>
+          <a:p>
+            <a:pPr indent="0" marL="0">
+              <a:buNone/>
+            </a:pPr>
+            <a:r>
+              <a:rPr lang="en-US" sz="1100" b="1" spc="200" kern="0" dirty="0">
+                <a:solidFill>
+                  <a:srgbClr val="8B98A6"/>
+                </a:solidFill>
+                <a:latin typeface="Calibri" pitchFamily="34" charset="0"/>
+                <a:ea typeface="Calibri" pitchFamily="34" charset="-122"/>
+                <a:cs typeface="Calibri" pitchFamily="34" charset="-120"/>
+              </a:rPr>
+              <a:t>LIVE DEMO</a:t>
+            </a:r>
+            <a:endParaRPr lang="en-US" sz="1100" dirty="0"/>
+          </a:p>
+        </p:txBody>
+      </p:sp>
+      <p:sp>
+        <p:nvSpPr>
+          <p:cNvPr id="7" name="Text 5"/>
+          <p:cNvSpPr/>
+          <p:nvPr/>
+        </p:nvSpPr>
+        <p:spPr>
+          <a:xfrm>
+            <a:off x="777240" y="1380744"/>
+            <a:ext cx="10637215" cy="640080"/>
+          </a:xfrm>
+          <a:prstGeom prst="rect">
+            <a:avLst/>
+          </a:prstGeom>
+          <a:noFill/>
+          <a:ln/>
+        </p:spPr>
+        <p:txBody>
+          <a:bodyPr wrap="square" lIns="0" tIns="0" rIns="0" bIns="0" rtlCol="0" anchor="ctr"/>
+          <a:lstStyle/>
+          <a:p>
+            <a:pPr indent="0" marL="0">
+              <a:buNone/>
+            </a:pPr>
+            <a:r>
+              <a:rPr lang="en-US" sz="2300" b="1" dirty="0">
+                <a:solidFill>
+                  <a:srgbClr val="EEF2F6"/>
+                </a:solidFill>
+                <a:latin typeface="Calibri" pitchFamily="34" charset="0"/>
+                <a:ea typeface="Calibri" pitchFamily="34" charset="-122"/>
+                <a:cs typeface="Calibri" pitchFamily="34" charset="-120"/>
+              </a:rPr>
+              <a:t>See it running on AWS</a:t>
+            </a:r>
+            <a:endParaRPr lang="en-US" sz="2300" dirty="0"/>
+          </a:p>
+        </p:txBody>
+      </p:sp>
+      <p:sp>
+        <p:nvSpPr>
+          <p:cNvPr id="8" name="Text 6"/>
+          <p:cNvSpPr/>
+          <p:nvPr/>
+        </p:nvSpPr>
+        <p:spPr>
+          <a:xfrm>
+            <a:off x="777240" y="1901952"/>
+            <a:ext cx="10637215" cy="274320"/>
           </a:xfrm>
           <a:prstGeom prst="rect">
             <a:avLst/>
@@ -2529,48 +2768,9 @@
               <a:buNone/>
             </a:pPr>
             <a:r>
-              <a:rPr lang="en-US" sz="3000" b="1" dirty="0">
-                <a:solidFill>
-                  <a:srgbClr val="102A38"/>
-                </a:solidFill>
-                <a:latin typeface="Bookman Old Style" pitchFamily="34" charset="0"/>
-                <a:ea typeface="Bookman Old Style" pitchFamily="34" charset="-122"/>
-                <a:cs typeface="Bookman Old Style" pitchFamily="34" charset="-120"/>
-              </a:rPr>
-              <a:t>Live Demo</a:t>
-            </a:r>
-            <a:endParaRPr lang="en-US" sz="3000" dirty="0"/>
-          </a:p>
-        </p:txBody>
-      </p:sp>
-      <p:sp>
-        <p:nvSpPr>
-          <p:cNvPr id="3" name="Text 1"/>
-          <p:cNvSpPr/>
-          <p:nvPr/>
-        </p:nvSpPr>
-        <p:spPr>
-          <a:xfrm>
-            <a:off x="658368" y="1143000"/>
-            <a:ext cx="10972800" cy="365760"/>
-          </a:xfrm>
-          <a:prstGeom prst="rect">
-            <a:avLst/>
-          </a:prstGeom>
-          <a:noFill/>
-          <a:ln/>
-        </p:spPr>
-        <p:txBody>
-          <a:bodyPr wrap="square" rtlCol="0" anchor="ctr"/>
-          <a:lstStyle/>
-          <a:p>
-            <a:pPr indent="0" marL="0">
-              <a:buNone/>
-            </a:pPr>
-            <a:r>
-              <a:rPr lang="en-US" sz="1400" dirty="0">
-                <a:solidFill>
-                  <a:srgbClr val="1E86A6"/>
+              <a:rPr lang="en-US" sz="1100" dirty="0">
+                <a:solidFill>
+                  <a:srgbClr val="57B9D9"/>
                 </a:solidFill>
                 <a:latin typeface="Consolas" pitchFamily="34" charset="0"/>
                 <a:ea typeface="Consolas" pitchFamily="34" charset="-122"/>
@@ -2578,32 +2778,32 @@
               </a:rPr>
               <a:t>owf-frontend-015611713565.s3.us-east-1.amazonaws.com</a:t>
             </a:r>
-            <a:endParaRPr lang="en-US" sz="1400" dirty="0"/>
-          </a:p>
-        </p:txBody>
-      </p:sp>
-      <p:sp>
-        <p:nvSpPr>
-          <p:cNvPr id="4" name="Shape 2"/>
-          <p:cNvSpPr/>
-          <p:nvPr/>
-        </p:nvSpPr>
-        <p:spPr>
-          <a:xfrm>
-            <a:off x="640080" y="1874520"/>
-            <a:ext cx="3502152" cy="3977640"/>
+            <a:endParaRPr lang="en-US" sz="1100" dirty="0"/>
+          </a:p>
+        </p:txBody>
+      </p:sp>
+      <p:sp>
+        <p:nvSpPr>
+          <p:cNvPr id="9" name="Shape 7"/>
+          <p:cNvSpPr/>
+          <p:nvPr/>
+        </p:nvSpPr>
+        <p:spPr>
+          <a:xfrm>
+            <a:off x="777240" y="2514600"/>
+            <a:ext cx="3301898" cy="3566160"/>
           </a:xfrm>
           <a:prstGeom prst="roundRect">
             <a:avLst>
-              <a:gd name="adj" fmla="val 2611"/>
+              <a:gd name="adj" fmla="val 2215"/>
             </a:avLst>
           </a:prstGeom>
           <a:solidFill>
-            <a:srgbClr val="EDF4F7"/>
-          </a:solidFill>
-          <a:ln w="15240">
+            <a:srgbClr val="123456"/>
+          </a:solidFill>
+          <a:ln w="12700">
             <a:solidFill>
-              <a:srgbClr val="1E86A6"/>
+              <a:srgbClr val="26486A"/>
             </a:solidFill>
             <a:prstDash val="solid"/>
           </a:ln>
@@ -2611,34 +2811,14 @@
       </p:sp>
       <p:sp>
         <p:nvSpPr>
-          <p:cNvPr id="5" name="Shape 3"/>
-          <p:cNvSpPr/>
-          <p:nvPr/>
-        </p:nvSpPr>
-        <p:spPr>
-          <a:xfrm>
-            <a:off x="914400" y="2148840"/>
-            <a:ext cx="603504" cy="603504"/>
-          </a:xfrm>
-          <a:prstGeom prst="ellipse">
-            <a:avLst/>
-          </a:prstGeom>
-          <a:solidFill>
-            <a:srgbClr val="0F5E7E"/>
-          </a:solidFill>
-          <a:ln/>
-        </p:spPr>
-      </p:sp>
-      <p:sp>
-        <p:nvSpPr>
-          <p:cNvPr id="6" name="Text 4"/>
-          <p:cNvSpPr/>
-          <p:nvPr/>
-        </p:nvSpPr>
-        <p:spPr>
-          <a:xfrm>
-            <a:off x="914400" y="2148840"/>
-            <a:ext cx="603504" cy="603504"/>
+          <p:cNvPr id="10" name="Text 8"/>
+          <p:cNvSpPr/>
+          <p:nvPr/>
+        </p:nvSpPr>
+        <p:spPr>
+          <a:xfrm>
+            <a:off x="1051560" y="2752344"/>
+            <a:ext cx="1828800" cy="777240"/>
           </a:xfrm>
           <a:prstGeom prst="rect">
             <a:avLst/>
@@ -2650,127 +2830,130 @@
           <a:bodyPr wrap="square" lIns="0" tIns="0" rIns="0" bIns="0" rtlCol="0" anchor="ctr"/>
           <a:lstStyle/>
           <a:p>
-            <a:pPr algn="ctr" indent="0" marL="0">
-              <a:buNone/>
-            </a:pPr>
-            <a:r>
-              <a:rPr lang="en-US" sz="2200" b="1" dirty="0">
-                <a:solidFill>
-                  <a:srgbClr val="FFFFFF"/>
-                </a:solidFill>
-                <a:latin typeface="Bookman Old Style" pitchFamily="34" charset="0"/>
-                <a:ea typeface="Bookman Old Style" pitchFamily="34" charset="-122"/>
-                <a:cs typeface="Bookman Old Style" pitchFamily="34" charset="-120"/>
-              </a:rPr>
-              <a:t>1</a:t>
-            </a:r>
-            <a:endParaRPr lang="en-US" sz="2200" dirty="0"/>
-          </a:p>
-        </p:txBody>
-      </p:sp>
-      <p:sp>
-        <p:nvSpPr>
-          <p:cNvPr id="7" name="Text 5"/>
-          <p:cNvSpPr/>
-          <p:nvPr/>
-        </p:nvSpPr>
-        <p:spPr>
-          <a:xfrm>
-            <a:off x="914400" y="2898648"/>
-            <a:ext cx="2953512" cy="777240"/>
-          </a:xfrm>
-          <a:prstGeom prst="rect">
-            <a:avLst/>
-          </a:prstGeom>
-          <a:noFill/>
-          <a:ln/>
-        </p:spPr>
-        <p:txBody>
-          <a:bodyPr wrap="square" lIns="0" tIns="0" rIns="0" bIns="0" rtlCol="0" anchor="ctr"/>
-          <a:lstStyle/>
-          <a:p>
-            <a:pPr indent="0" marL="0">
-              <a:buNone/>
-            </a:pPr>
-            <a:r>
-              <a:rPr lang="en-US" sz="1600" b="1" dirty="0">
-                <a:solidFill>
-                  <a:srgbClr val="102A38"/>
+            <a:pPr indent="0" marL="0">
+              <a:buNone/>
+            </a:pPr>
+            <a:r>
+              <a:rPr lang="en-US" sz="3800" b="1" dirty="0">
+                <a:solidFill>
+                  <a:srgbClr val="57B9D9"/>
                 </a:solidFill>
                 <a:latin typeface="Calibri" pitchFamily="34" charset="0"/>
                 <a:ea typeface="Calibri" pitchFamily="34" charset="-122"/>
                 <a:cs typeface="Calibri" pitchFamily="34" charset="-120"/>
               </a:rPr>
-              <a:t>Both turbines, five metrics</a:t>
-            </a:r>
-            <a:endParaRPr lang="en-US" sz="1600" dirty="0"/>
-          </a:p>
-        </p:txBody>
-      </p:sp>
-      <p:sp>
-        <p:nvSpPr>
-          <p:cNvPr id="8" name="Text 6"/>
-          <p:cNvSpPr/>
-          <p:nvPr/>
-        </p:nvSpPr>
-        <p:spPr>
-          <a:xfrm>
-            <a:off x="914400" y="3657600"/>
-            <a:ext cx="2953512" cy="2011680"/>
-          </a:xfrm>
-          <a:prstGeom prst="rect">
-            <a:avLst/>
-          </a:prstGeom>
-          <a:noFill/>
-          <a:ln/>
-        </p:spPr>
-        <p:txBody>
-          <a:bodyPr wrap="square" lIns="0" tIns="0" rIns="0" bIns="0" rtlCol="0" anchor="ctr"/>
+              <a:t>01</a:t>
+            </a:r>
+            <a:endParaRPr lang="en-US" sz="3800" dirty="0"/>
+          </a:p>
+        </p:txBody>
+      </p:sp>
+      <p:sp>
+        <p:nvSpPr>
+          <p:cNvPr id="11" name="Text 9"/>
+          <p:cNvSpPr/>
+          <p:nvPr/>
+        </p:nvSpPr>
+        <p:spPr>
+          <a:xfrm>
+            <a:off x="1069848" y="3566160"/>
+            <a:ext cx="2753258" cy="868680"/>
+          </a:xfrm>
+          <a:prstGeom prst="rect">
+            <a:avLst/>
+          </a:prstGeom>
+          <a:noFill/>
+          <a:ln/>
+        </p:spPr>
+        <p:txBody>
+          <a:bodyPr wrap="square" lIns="0" tIns="0" rIns="0" bIns="0" rtlCol="0" anchor="t"/>
           <a:lstStyle/>
           <a:p>
             <a:pPr indent="0" marL="0">
               <a:lnSpc>
-                <a:spcPct val="106000"/>
+                <a:spcPct val="100000"/>
               </a:lnSpc>
               <a:buNone/>
             </a:pPr>
             <a:r>
-              <a:rPr lang="en-US" sz="1250" dirty="0">
-                <a:solidFill>
-                  <a:srgbClr val="567480"/>
+              <a:rPr lang="en-US" sz="1550" b="1" dirty="0">
+                <a:solidFill>
+                  <a:srgbClr val="EEF2F6"/>
                 </a:solidFill>
                 <a:latin typeface="Calibri" pitchFamily="34" charset="0"/>
                 <a:ea typeface="Calibri" pitchFamily="34" charset="-122"/>
                 <a:cs typeface="Calibri" pitchFamily="34" charset="-120"/>
               </a:rPr>
+              <a:t>Both turbines, five metrics</a:t>
+            </a:r>
+            <a:endParaRPr lang="en-US" sz="1550" dirty="0"/>
+          </a:p>
+        </p:txBody>
+      </p:sp>
+      <p:sp>
+        <p:nvSpPr>
+          <p:cNvPr id="12" name="Text 10"/>
+          <p:cNvSpPr/>
+          <p:nvPr/>
+        </p:nvSpPr>
+        <p:spPr>
+          <a:xfrm>
+            <a:off x="1069848" y="4434840"/>
+            <a:ext cx="2753258" cy="1463040"/>
+          </a:xfrm>
+          <a:prstGeom prst="rect">
+            <a:avLst/>
+          </a:prstGeom>
+          <a:noFill/>
+          <a:ln/>
+        </p:spPr>
+        <p:txBody>
+          <a:bodyPr wrap="square" lIns="0" tIns="0" rIns="0" bIns="0" rtlCol="0" anchor="ctr"/>
+          <a:lstStyle/>
+          <a:p>
+            <a:pPr indent="0" marL="0">
+              <a:lnSpc>
+                <a:spcPct val="120000"/>
+              </a:lnSpc>
+              <a:buNone/>
+            </a:pPr>
+            <a:r>
+              <a:rPr lang="en-US" sz="1200" dirty="0">
+                <a:solidFill>
+                  <a:srgbClr val="8B98A6"/>
+                </a:solidFill>
+                <a:latin typeface="Calibri" pitchFamily="34" charset="0"/>
+                <a:ea typeface="Calibri" pitchFamily="34" charset="-122"/>
+                <a:cs typeface="Calibri" pitchFamily="34" charset="-120"/>
+              </a:rPr>
               <a:t>Wind speed, blade vibration, generator temperature, power output and gearbox pressure live for both turbines.</a:t>
             </a:r>
-            <a:endParaRPr lang="en-US" sz="1250" dirty="0"/>
-          </a:p>
-        </p:txBody>
-      </p:sp>
-      <p:sp>
-        <p:nvSpPr>
-          <p:cNvPr id="9" name="Shape 7"/>
-          <p:cNvSpPr/>
-          <p:nvPr/>
-        </p:nvSpPr>
-        <p:spPr>
-          <a:xfrm>
-            <a:off x="4416552" y="1874520"/>
-            <a:ext cx="3502152" cy="3977640"/>
+            <a:endParaRPr lang="en-US" sz="1200" dirty="0"/>
+          </a:p>
+        </p:txBody>
+      </p:sp>
+      <p:sp>
+        <p:nvSpPr>
+          <p:cNvPr id="13" name="Shape 11"/>
+          <p:cNvSpPr/>
+          <p:nvPr/>
+        </p:nvSpPr>
+        <p:spPr>
+          <a:xfrm>
+            <a:off x="4444898" y="2514600"/>
+            <a:ext cx="3301898" cy="3566160"/>
           </a:xfrm>
           <a:prstGeom prst="roundRect">
             <a:avLst>
-              <a:gd name="adj" fmla="val 2611"/>
+              <a:gd name="adj" fmla="val 2215"/>
             </a:avLst>
           </a:prstGeom>
           <a:solidFill>
-            <a:srgbClr val="EDF4F7"/>
-          </a:solidFill>
-          <a:ln w="15240">
+            <a:srgbClr val="123456"/>
+          </a:solidFill>
+          <a:ln w="12700">
             <a:solidFill>
-              <a:srgbClr val="1E86A6"/>
+              <a:srgbClr val="26486A"/>
             </a:solidFill>
             <a:prstDash val="solid"/>
           </a:ln>
@@ -2778,34 +2961,14 @@
       </p:sp>
       <p:sp>
         <p:nvSpPr>
-          <p:cNvPr id="10" name="Shape 8"/>
-          <p:cNvSpPr/>
-          <p:nvPr/>
-        </p:nvSpPr>
-        <p:spPr>
-          <a:xfrm>
-            <a:off x="4690872" y="2148840"/>
-            <a:ext cx="603504" cy="603504"/>
-          </a:xfrm>
-          <a:prstGeom prst="ellipse">
-            <a:avLst/>
-          </a:prstGeom>
-          <a:solidFill>
-            <a:srgbClr val="0F5E7E"/>
-          </a:solidFill>
-          <a:ln/>
-        </p:spPr>
-      </p:sp>
-      <p:sp>
-        <p:nvSpPr>
-          <p:cNvPr id="11" name="Text 9"/>
-          <p:cNvSpPr/>
-          <p:nvPr/>
-        </p:nvSpPr>
-        <p:spPr>
-          <a:xfrm>
-            <a:off x="4690872" y="2148840"/>
-            <a:ext cx="603504" cy="603504"/>
+          <p:cNvPr id="14" name="Text 12"/>
+          <p:cNvSpPr/>
+          <p:nvPr/>
+        </p:nvSpPr>
+        <p:spPr>
+          <a:xfrm>
+            <a:off x="4719218" y="2752344"/>
+            <a:ext cx="1828800" cy="777240"/>
           </a:xfrm>
           <a:prstGeom prst="rect">
             <a:avLst/>
@@ -2817,127 +2980,130 @@
           <a:bodyPr wrap="square" lIns="0" tIns="0" rIns="0" bIns="0" rtlCol="0" anchor="ctr"/>
           <a:lstStyle/>
           <a:p>
-            <a:pPr algn="ctr" indent="0" marL="0">
-              <a:buNone/>
-            </a:pPr>
-            <a:r>
-              <a:rPr lang="en-US" sz="2200" b="1" dirty="0">
-                <a:solidFill>
-                  <a:srgbClr val="FFFFFF"/>
-                </a:solidFill>
-                <a:latin typeface="Bookman Old Style" pitchFamily="34" charset="0"/>
-                <a:ea typeface="Bookman Old Style" pitchFamily="34" charset="-122"/>
-                <a:cs typeface="Bookman Old Style" pitchFamily="34" charset="-120"/>
-              </a:rPr>
-              <a:t>2</a:t>
-            </a:r>
-            <a:endParaRPr lang="en-US" sz="2200" dirty="0"/>
-          </a:p>
-        </p:txBody>
-      </p:sp>
-      <p:sp>
-        <p:nvSpPr>
-          <p:cNvPr id="12" name="Text 10"/>
-          <p:cNvSpPr/>
-          <p:nvPr/>
-        </p:nvSpPr>
-        <p:spPr>
-          <a:xfrm>
-            <a:off x="4690872" y="2898648"/>
-            <a:ext cx="2953512" cy="777240"/>
-          </a:xfrm>
-          <a:prstGeom prst="rect">
-            <a:avLst/>
-          </a:prstGeom>
-          <a:noFill/>
-          <a:ln/>
-        </p:spPr>
-        <p:txBody>
-          <a:bodyPr wrap="square" lIns="0" tIns="0" rIns="0" bIns="0" rtlCol="0" anchor="ctr"/>
-          <a:lstStyle/>
-          <a:p>
-            <a:pPr indent="0" marL="0">
-              <a:buNone/>
-            </a:pPr>
-            <a:r>
-              <a:rPr lang="en-US" sz="1600" b="1" dirty="0">
-                <a:solidFill>
-                  <a:srgbClr val="102A38"/>
+            <a:pPr indent="0" marL="0">
+              <a:buNone/>
+            </a:pPr>
+            <a:r>
+              <a:rPr lang="en-US" sz="3800" b="1" dirty="0">
+                <a:solidFill>
+                  <a:srgbClr val="57B9D9"/>
                 </a:solidFill>
                 <a:latin typeface="Calibri" pitchFamily="34" charset="0"/>
                 <a:ea typeface="Calibri" pitchFamily="34" charset="-122"/>
                 <a:cs typeface="Calibri" pitchFamily="34" charset="-120"/>
               </a:rPr>
-              <a:t>Gearbox pressure on the window minimum</a:t>
-            </a:r>
-            <a:endParaRPr lang="en-US" sz="1600" dirty="0"/>
-          </a:p>
-        </p:txBody>
-      </p:sp>
-      <p:sp>
-        <p:nvSpPr>
-          <p:cNvPr id="13" name="Text 11"/>
-          <p:cNvSpPr/>
-          <p:nvPr/>
-        </p:nvSpPr>
-        <p:spPr>
-          <a:xfrm>
-            <a:off x="4690872" y="3657600"/>
-            <a:ext cx="2953512" cy="2011680"/>
-          </a:xfrm>
-          <a:prstGeom prst="rect">
-            <a:avLst/>
-          </a:prstGeom>
-          <a:noFill/>
-          <a:ln/>
-        </p:spPr>
-        <p:txBody>
-          <a:bodyPr wrap="square" lIns="0" tIns="0" rIns="0" bIns="0" rtlCol="0" anchor="ctr"/>
+              <a:t>02</a:t>
+            </a:r>
+            <a:endParaRPr lang="en-US" sz="3800" dirty="0"/>
+          </a:p>
+        </p:txBody>
+      </p:sp>
+      <p:sp>
+        <p:nvSpPr>
+          <p:cNvPr id="15" name="Text 13"/>
+          <p:cNvSpPr/>
+          <p:nvPr/>
+        </p:nvSpPr>
+        <p:spPr>
+          <a:xfrm>
+            <a:off x="4737506" y="3566160"/>
+            <a:ext cx="2753258" cy="868680"/>
+          </a:xfrm>
+          <a:prstGeom prst="rect">
+            <a:avLst/>
+          </a:prstGeom>
+          <a:noFill/>
+          <a:ln/>
+        </p:spPr>
+        <p:txBody>
+          <a:bodyPr wrap="square" lIns="0" tIns="0" rIns="0" bIns="0" rtlCol="0" anchor="t"/>
           <a:lstStyle/>
           <a:p>
             <a:pPr indent="0" marL="0">
               <a:lnSpc>
-                <a:spcPct val="106000"/>
+                <a:spcPct val="100000"/>
               </a:lnSpc>
               <a:buNone/>
             </a:pPr>
             <a:r>
-              <a:rPr lang="en-US" sz="1250" dirty="0">
-                <a:solidFill>
-                  <a:srgbClr val="567480"/>
+              <a:rPr lang="en-US" sz="1550" b="1" dirty="0">
+                <a:solidFill>
+                  <a:srgbClr val="EEF2F6"/>
                 </a:solidFill>
                 <a:latin typeface="Calibri" pitchFamily="34" charset="0"/>
                 <a:ea typeface="Calibri" pitchFamily="34" charset="-122"/>
                 <a:cs typeface="Calibri" pitchFamily="34" charset="-120"/>
               </a:rPr>
+              <a:t>Gearbox pressure on the window minimum</a:t>
+            </a:r>
+            <a:endParaRPr lang="en-US" sz="1550" dirty="0"/>
+          </a:p>
+        </p:txBody>
+      </p:sp>
+      <p:sp>
+        <p:nvSpPr>
+          <p:cNvPr id="16" name="Text 14"/>
+          <p:cNvSpPr/>
+          <p:nvPr/>
+        </p:nvSpPr>
+        <p:spPr>
+          <a:xfrm>
+            <a:off x="4737506" y="4434840"/>
+            <a:ext cx="2753258" cy="1463040"/>
+          </a:xfrm>
+          <a:prstGeom prst="rect">
+            <a:avLst/>
+          </a:prstGeom>
+          <a:noFill/>
+          <a:ln/>
+        </p:spPr>
+        <p:txBody>
+          <a:bodyPr wrap="square" lIns="0" tIns="0" rIns="0" bIns="0" rtlCol="0" anchor="ctr"/>
+          <a:lstStyle/>
+          <a:p>
+            <a:pPr indent="0" marL="0">
+              <a:lnSpc>
+                <a:spcPct val="120000"/>
+              </a:lnSpc>
+              <a:buNone/>
+            </a:pPr>
+            <a:r>
+              <a:rPr lang="en-US" sz="1200" dirty="0">
+                <a:solidFill>
+                  <a:srgbClr val="8B98A6"/>
+                </a:solidFill>
+                <a:latin typeface="Calibri" pitchFamily="34" charset="0"/>
+                <a:ea typeface="Calibri" pitchFamily="34" charset="-122"/>
+                <a:cs typeface="Calibri" pitchFamily="34" charset="-120"/>
+              </a:rPr>
               <a:t>A momentary dip below 2.5 bar is a lubrication fault — the rule reads the worst reading in each window, so a single dip cannot hide in an average.</a:t>
             </a:r>
-            <a:endParaRPr lang="en-US" sz="1250" dirty="0"/>
-          </a:p>
-        </p:txBody>
-      </p:sp>
-      <p:sp>
-        <p:nvSpPr>
-          <p:cNvPr id="14" name="Shape 12"/>
-          <p:cNvSpPr/>
-          <p:nvPr/>
-        </p:nvSpPr>
-        <p:spPr>
-          <a:xfrm>
-            <a:off x="8193024" y="1874520"/>
-            <a:ext cx="3502152" cy="3977640"/>
+            <a:endParaRPr lang="en-US" sz="1200" dirty="0"/>
+          </a:p>
+        </p:txBody>
+      </p:sp>
+      <p:sp>
+        <p:nvSpPr>
+          <p:cNvPr id="17" name="Shape 15"/>
+          <p:cNvSpPr/>
+          <p:nvPr/>
+        </p:nvSpPr>
+        <p:spPr>
+          <a:xfrm>
+            <a:off x="8112557" y="2514600"/>
+            <a:ext cx="3301898" cy="3566160"/>
           </a:xfrm>
           <a:prstGeom prst="roundRect">
             <a:avLst>
-              <a:gd name="adj" fmla="val 2611"/>
+              <a:gd name="adj" fmla="val 2215"/>
             </a:avLst>
           </a:prstGeom>
           <a:solidFill>
-            <a:srgbClr val="EDF4F7"/>
-          </a:solidFill>
-          <a:ln w="15240">
+            <a:srgbClr val="123456"/>
+          </a:solidFill>
+          <a:ln w="12700">
             <a:solidFill>
-              <a:srgbClr val="1E86A6"/>
+              <a:srgbClr val="26486A"/>
             </a:solidFill>
             <a:prstDash val="solid"/>
           </a:ln>
@@ -2945,34 +3111,14 @@
       </p:sp>
       <p:sp>
         <p:nvSpPr>
-          <p:cNvPr id="15" name="Shape 13"/>
-          <p:cNvSpPr/>
-          <p:nvPr/>
-        </p:nvSpPr>
-        <p:spPr>
-          <a:xfrm>
-            <a:off x="8467344" y="2148840"/>
-            <a:ext cx="603504" cy="603504"/>
-          </a:xfrm>
-          <a:prstGeom prst="ellipse">
-            <a:avLst/>
-          </a:prstGeom>
-          <a:solidFill>
-            <a:srgbClr val="0F5E7E"/>
-          </a:solidFill>
-          <a:ln/>
-        </p:spPr>
-      </p:sp>
-      <p:sp>
-        <p:nvSpPr>
-          <p:cNvPr id="16" name="Text 14"/>
-          <p:cNvSpPr/>
-          <p:nvPr/>
-        </p:nvSpPr>
-        <p:spPr>
-          <a:xfrm>
-            <a:off x="8467344" y="2148840"/>
-            <a:ext cx="603504" cy="603504"/>
+          <p:cNvPr id="18" name="Text 16"/>
+          <p:cNvSpPr/>
+          <p:nvPr/>
+        </p:nvSpPr>
+        <p:spPr>
+          <a:xfrm>
+            <a:off x="8386877" y="2752344"/>
+            <a:ext cx="1828800" cy="777240"/>
           </a:xfrm>
           <a:prstGeom prst="rect">
             <a:avLst/>
@@ -2984,102 +3130,105 @@
           <a:bodyPr wrap="square" lIns="0" tIns="0" rIns="0" bIns="0" rtlCol="0" anchor="ctr"/>
           <a:lstStyle/>
           <a:p>
-            <a:pPr algn="ctr" indent="0" marL="0">
-              <a:buNone/>
-            </a:pPr>
-            <a:r>
-              <a:rPr lang="en-US" sz="2200" b="1" dirty="0">
-                <a:solidFill>
-                  <a:srgbClr val="FFFFFF"/>
-                </a:solidFill>
-                <a:latin typeface="Bookman Old Style" pitchFamily="34" charset="0"/>
-                <a:ea typeface="Bookman Old Style" pitchFamily="34" charset="-122"/>
-                <a:cs typeface="Bookman Old Style" pitchFamily="34" charset="-120"/>
-              </a:rPr>
-              <a:t>3</a:t>
-            </a:r>
-            <a:endParaRPr lang="en-US" sz="2200" dirty="0"/>
-          </a:p>
-        </p:txBody>
-      </p:sp>
-      <p:sp>
-        <p:nvSpPr>
-          <p:cNvPr id="17" name="Text 15"/>
-          <p:cNvSpPr/>
-          <p:nvPr/>
-        </p:nvSpPr>
-        <p:spPr>
-          <a:xfrm>
-            <a:off x="8467344" y="2898648"/>
-            <a:ext cx="2953512" cy="777240"/>
-          </a:xfrm>
-          <a:prstGeom prst="rect">
-            <a:avLst/>
-          </a:prstGeom>
-          <a:noFill/>
-          <a:ln/>
-        </p:spPr>
-        <p:txBody>
-          <a:bodyPr wrap="square" lIns="0" tIns="0" rIns="0" bIns="0" rtlCol="0" anchor="ctr"/>
-          <a:lstStyle/>
-          <a:p>
-            <a:pPr indent="0" marL="0">
-              <a:buNone/>
-            </a:pPr>
-            <a:r>
-              <a:rPr lang="en-US" sz="1600" b="1" dirty="0">
-                <a:solidFill>
-                  <a:srgbClr val="102A38"/>
+            <a:pPr indent="0" marL="0">
+              <a:buNone/>
+            </a:pPr>
+            <a:r>
+              <a:rPr lang="en-US" sz="3800" b="1" dirty="0">
+                <a:solidFill>
+                  <a:srgbClr val="57B9D9"/>
                 </a:solidFill>
                 <a:latin typeface="Calibri" pitchFamily="34" charset="0"/>
                 <a:ea typeface="Calibri" pitchFamily="34" charset="-122"/>
                 <a:cs typeface="Calibri" pitchFamily="34" charset="-120"/>
               </a:rPr>
-              <a:t>A cross-turbine power trend, climbing live</a:t>
-            </a:r>
-            <a:endParaRPr lang="en-US" sz="1600" dirty="0"/>
-          </a:p>
-        </p:txBody>
-      </p:sp>
-      <p:sp>
-        <p:nvSpPr>
-          <p:cNvPr id="18" name="Text 16"/>
-          <p:cNvSpPr/>
-          <p:nvPr/>
-        </p:nvSpPr>
-        <p:spPr>
-          <a:xfrm>
-            <a:off x="8467344" y="3657600"/>
-            <a:ext cx="2953512" cy="2011680"/>
-          </a:xfrm>
-          <a:prstGeom prst="rect">
-            <a:avLst/>
-          </a:prstGeom>
-          <a:noFill/>
-          <a:ln/>
-        </p:spPr>
-        <p:txBody>
-          <a:bodyPr wrap="square" lIns="0" tIns="0" rIns="0" bIns="0" rtlCol="0" anchor="ctr"/>
+              <a:t>03</a:t>
+            </a:r>
+            <a:endParaRPr lang="en-US" sz="3800" dirty="0"/>
+          </a:p>
+        </p:txBody>
+      </p:sp>
+      <p:sp>
+        <p:nvSpPr>
+          <p:cNvPr id="19" name="Text 17"/>
+          <p:cNvSpPr/>
+          <p:nvPr/>
+        </p:nvSpPr>
+        <p:spPr>
+          <a:xfrm>
+            <a:off x="8405165" y="3566160"/>
+            <a:ext cx="2753258" cy="868680"/>
+          </a:xfrm>
+          <a:prstGeom prst="rect">
+            <a:avLst/>
+          </a:prstGeom>
+          <a:noFill/>
+          <a:ln/>
+        </p:spPr>
+        <p:txBody>
+          <a:bodyPr wrap="square" lIns="0" tIns="0" rIns="0" bIns="0" rtlCol="0" anchor="t"/>
           <a:lstStyle/>
           <a:p>
             <a:pPr indent="0" marL="0">
               <a:lnSpc>
-                <a:spcPct val="106000"/>
+                <a:spcPct val="100000"/>
               </a:lnSpc>
               <a:buNone/>
             </a:pPr>
             <a:r>
-              <a:rPr lang="en-US" sz="1250" dirty="0">
-                <a:solidFill>
-                  <a:srgbClr val="567480"/>
+              <a:rPr lang="en-US" sz="1550" b="1" dirty="0">
+                <a:solidFill>
+                  <a:srgbClr val="EEF2F6"/>
                 </a:solidFill>
                 <a:latin typeface="Calibri" pitchFamily="34" charset="0"/>
                 <a:ea typeface="Calibri" pitchFamily="34" charset="-122"/>
                 <a:cs typeface="Calibri" pitchFamily="34" charset="-120"/>
               </a:rPr>
+              <a:t>A cross-turbine power trend, climbing live</a:t>
+            </a:r>
+            <a:endParaRPr lang="en-US" sz="1550" dirty="0"/>
+          </a:p>
+        </p:txBody>
+      </p:sp>
+      <p:sp>
+        <p:nvSpPr>
+          <p:cNvPr id="20" name="Text 18"/>
+          <p:cNvSpPr/>
+          <p:nvPr/>
+        </p:nvSpPr>
+        <p:spPr>
+          <a:xfrm>
+            <a:off x="8405165" y="4434840"/>
+            <a:ext cx="2753258" cy="1463040"/>
+          </a:xfrm>
+          <a:prstGeom prst="rect">
+            <a:avLst/>
+          </a:prstGeom>
+          <a:noFill/>
+          <a:ln/>
+        </p:spPr>
+        <p:txBody>
+          <a:bodyPr wrap="square" lIns="0" tIns="0" rIns="0" bIns="0" rtlCol="0" anchor="ctr"/>
+          <a:lstStyle/>
+          <a:p>
+            <a:pPr indent="0" marL="0">
+              <a:lnSpc>
+                <a:spcPct val="120000"/>
+              </a:lnSpc>
+              <a:buNone/>
+            </a:pPr>
+            <a:r>
+              <a:rPr lang="en-US" sz="1200" dirty="0">
+                <a:solidFill>
+                  <a:srgbClr val="8B98A6"/>
+                </a:solidFill>
+                <a:latin typeface="Calibri" pitchFamily="34" charset="0"/>
+                <a:ea typeface="Calibri" pitchFamily="34" charset="-122"/>
+                <a:cs typeface="Calibri" pitchFamily="34" charset="-120"/>
+              </a:rPr>
               <a:t>The power chart tracks both turbines together, and the stored count climbs 17 to 132 to 204 across refreshes, so the data is genuinely live.</a:t>
             </a:r>
-            <a:endParaRPr lang="en-US" sz="1250" dirty="0"/>
+            <a:endParaRPr lang="en-US" sz="1200" dirty="0"/>
           </a:p>
         </p:txBody>
       </p:sp>
@@ -3097,7 +3246,7 @@
     <p:bg>
       <p:bgPr>
         <a:solidFill>
-          <a:srgbClr val="FFFFFF"/>
+          <a:srgbClr val="0A2540"/>
         </a:solidFill>
       </p:bgPr>
     </p:bg>
@@ -3117,65 +3266,209 @@
       </p:grpSpPr>
       <p:sp>
         <p:nvSpPr>
-          <p:cNvPr id="2" name="Text 0"/>
-          <p:cNvSpPr/>
-          <p:nvPr/>
-        </p:nvSpPr>
-        <p:spPr>
-          <a:xfrm>
-            <a:off x="640080" y="502920"/>
-            <a:ext cx="10972800" cy="822960"/>
-          </a:xfrm>
-          <a:prstGeom prst="rect">
-            <a:avLst/>
-          </a:prstGeom>
-          <a:noFill/>
-          <a:ln/>
-        </p:spPr>
-        <p:txBody>
-          <a:bodyPr wrap="square" rtlCol="0" anchor="t"/>
-          <a:lstStyle/>
-          <a:p>
-            <a:pPr indent="0" marL="0">
-              <a:buNone/>
-            </a:pPr>
-            <a:r>
-              <a:rPr lang="en-US" sz="2800" b="1" dirty="0">
-                <a:solidFill>
-                  <a:srgbClr val="102A38"/>
-                </a:solidFill>
-                <a:latin typeface="Bookman Old Style" pitchFamily="34" charset="0"/>
-                <a:ea typeface="Bookman Old Style" pitchFamily="34" charset="-122"/>
-                <a:cs typeface="Bookman Old Style" pitchFamily="34" charset="-120"/>
-              </a:rPr>
-              <a:t>Hardest Part — the credential trap</a:t>
-            </a:r>
-            <a:endParaRPr lang="en-US" sz="2800" dirty="0"/>
-          </a:p>
-        </p:txBody>
-      </p:sp>
-      <p:sp>
-        <p:nvSpPr>
-          <p:cNvPr id="3" name="Shape 1"/>
-          <p:cNvSpPr/>
-          <p:nvPr/>
-        </p:nvSpPr>
-        <p:spPr>
-          <a:xfrm>
-            <a:off x="731520" y="1920240"/>
-            <a:ext cx="10698480" cy="1965960"/>
+          <p:cNvPr id="2" name="Shape 0"/>
+          <p:cNvSpPr/>
+          <p:nvPr/>
+        </p:nvSpPr>
+        <p:spPr>
+          <a:xfrm>
+            <a:off x="9265615" y="457200"/>
+            <a:ext cx="2194560" cy="1005840"/>
           </a:xfrm>
           <a:prstGeom prst="roundRect">
             <a:avLst>
-              <a:gd name="adj" fmla="val 4651"/>
+              <a:gd name="adj" fmla="val 9091"/>
             </a:avLst>
           </a:prstGeom>
           <a:solidFill>
-            <a:srgbClr val="EDF4F7"/>
-          </a:solidFill>
-          <a:ln w="19050">
+            <a:srgbClr val="2F91B1"/>
+          </a:solidFill>
+          <a:ln/>
+        </p:spPr>
+      </p:sp>
+      <p:sp>
+        <p:nvSpPr>
+          <p:cNvPr id="3" name="Shape 1"/>
+          <p:cNvSpPr/>
+          <p:nvPr/>
+        </p:nvSpPr>
+        <p:spPr>
+          <a:xfrm>
+            <a:off x="9585655" y="777240"/>
+            <a:ext cx="2194560" cy="1005840"/>
+          </a:xfrm>
+          <a:prstGeom prst="roundRect">
+            <a:avLst>
+              <a:gd name="adj" fmla="val 9091"/>
+            </a:avLst>
+          </a:prstGeom>
+          <a:solidFill>
+            <a:srgbClr val="2F91B1"/>
+          </a:solidFill>
+          <a:ln/>
+        </p:spPr>
+      </p:sp>
+      <p:sp>
+        <p:nvSpPr>
+          <p:cNvPr id="4" name="Shape 2"/>
+          <p:cNvSpPr/>
+          <p:nvPr/>
+        </p:nvSpPr>
+        <p:spPr>
+          <a:xfrm>
+            <a:off x="9905695" y="1097280"/>
+            <a:ext cx="2194560" cy="1005840"/>
+          </a:xfrm>
+          <a:prstGeom prst="roundRect">
+            <a:avLst>
+              <a:gd name="adj" fmla="val 9091"/>
+            </a:avLst>
+          </a:prstGeom>
+          <a:solidFill>
+            <a:srgbClr val="57B9D9"/>
+          </a:solidFill>
+          <a:ln/>
+        </p:spPr>
+      </p:sp>
+      <p:sp>
+        <p:nvSpPr>
+          <p:cNvPr id="5" name="Text 3"/>
+          <p:cNvSpPr/>
+          <p:nvPr/>
+        </p:nvSpPr>
+        <p:spPr>
+          <a:xfrm>
+            <a:off x="777240" y="731520"/>
+            <a:ext cx="914400" cy="640080"/>
+          </a:xfrm>
+          <a:prstGeom prst="rect">
+            <a:avLst/>
+          </a:prstGeom>
+          <a:noFill/>
+          <a:ln/>
+        </p:spPr>
+        <p:txBody>
+          <a:bodyPr wrap="square" lIns="0" tIns="0" rIns="0" bIns="0" rtlCol="0" anchor="ctr"/>
+          <a:lstStyle/>
+          <a:p>
+            <a:pPr indent="0" marL="0">
+              <a:buNone/>
+            </a:pPr>
+            <a:r>
+              <a:rPr lang="en-US" sz="3000" b="1" dirty="0">
+                <a:solidFill>
+                  <a:srgbClr val="57B9D9"/>
+                </a:solidFill>
+                <a:latin typeface="Calibri" pitchFamily="34" charset="0"/>
+                <a:ea typeface="Calibri" pitchFamily="34" charset="-122"/>
+                <a:cs typeface="Calibri" pitchFamily="34" charset="-120"/>
+              </a:rPr>
+              <a:t>03</a:t>
+            </a:r>
+            <a:endParaRPr lang="en-US" sz="3000" dirty="0"/>
+          </a:p>
+        </p:txBody>
+      </p:sp>
+      <p:sp>
+        <p:nvSpPr>
+          <p:cNvPr id="6" name="Text 4"/>
+          <p:cNvSpPr/>
+          <p:nvPr/>
+        </p:nvSpPr>
+        <p:spPr>
+          <a:xfrm>
+            <a:off x="1645920" y="905256"/>
+            <a:ext cx="9768535" cy="274320"/>
+          </a:xfrm>
+          <a:prstGeom prst="rect">
+            <a:avLst/>
+          </a:prstGeom>
+          <a:noFill/>
+          <a:ln/>
+        </p:spPr>
+        <p:txBody>
+          <a:bodyPr wrap="square" lIns="0" tIns="0" rIns="0" bIns="0" rtlCol="0" anchor="ctr"/>
+          <a:lstStyle/>
+          <a:p>
+            <a:pPr indent="0" marL="0">
+              <a:buNone/>
+            </a:pPr>
+            <a:r>
+              <a:rPr lang="en-US" sz="1100" b="1" spc="200" kern="0" dirty="0">
+                <a:solidFill>
+                  <a:srgbClr val="8B98A6"/>
+                </a:solidFill>
+                <a:latin typeface="Calibri" pitchFamily="34" charset="0"/>
+                <a:ea typeface="Calibri" pitchFamily="34" charset="-122"/>
+                <a:cs typeface="Calibri" pitchFamily="34" charset="-120"/>
+              </a:rPr>
+              <a:t>CHALLENGE</a:t>
+            </a:r>
+            <a:endParaRPr lang="en-US" sz="1100" dirty="0"/>
+          </a:p>
+        </p:txBody>
+      </p:sp>
+      <p:sp>
+        <p:nvSpPr>
+          <p:cNvPr id="7" name="Text 5"/>
+          <p:cNvSpPr/>
+          <p:nvPr/>
+        </p:nvSpPr>
+        <p:spPr>
+          <a:xfrm>
+            <a:off x="777240" y="1380744"/>
+            <a:ext cx="10637215" cy="640080"/>
+          </a:xfrm>
+          <a:prstGeom prst="rect">
+            <a:avLst/>
+          </a:prstGeom>
+          <a:noFill/>
+          <a:ln/>
+        </p:spPr>
+        <p:txBody>
+          <a:bodyPr wrap="square" lIns="0" tIns="0" rIns="0" bIns="0" rtlCol="0" anchor="ctr"/>
+          <a:lstStyle/>
+          <a:p>
+            <a:pPr indent="0" marL="0">
+              <a:buNone/>
+            </a:pPr>
+            <a:r>
+              <a:rPr lang="en-US" sz="2300" b="1" dirty="0">
+                <a:solidFill>
+                  <a:srgbClr val="EEF2F6"/>
+                </a:solidFill>
+                <a:latin typeface="Calibri" pitchFamily="34" charset="0"/>
+                <a:ea typeface="Calibri" pitchFamily="34" charset="-122"/>
+                <a:cs typeface="Calibri" pitchFamily="34" charset="-120"/>
+              </a:rPr>
+              <a:t>reuse the app, don't clone it</a:t>
+            </a:r>
+            <a:endParaRPr lang="en-US" sz="2300" dirty="0"/>
+          </a:p>
+        </p:txBody>
+      </p:sp>
+      <p:sp>
+        <p:nvSpPr>
+          <p:cNvPr id="8" name="Shape 6"/>
+          <p:cNvSpPr/>
+          <p:nvPr/>
+        </p:nvSpPr>
+        <p:spPr>
+          <a:xfrm>
+            <a:off x="777240" y="2423160"/>
+            <a:ext cx="5090008" cy="3657600"/>
+          </a:xfrm>
+          <a:prstGeom prst="roundRect">
+            <a:avLst>
+              <a:gd name="adj" fmla="val 2000"/>
+            </a:avLst>
+          </a:prstGeom>
+          <a:solidFill>
+            <a:srgbClr val="123456"/>
+          </a:solidFill>
+          <a:ln w="12700">
             <a:solidFill>
-              <a:srgbClr val="EBB13C"/>
+              <a:srgbClr val="26486A"/>
             </a:solidFill>
             <a:prstDash val="solid"/>
           </a:ln>
@@ -3183,14 +3476,14 @@
       </p:sp>
       <p:sp>
         <p:nvSpPr>
-          <p:cNvPr id="4" name="Text 2"/>
-          <p:cNvSpPr/>
-          <p:nvPr/>
-        </p:nvSpPr>
-        <p:spPr>
-          <a:xfrm>
-            <a:off x="1005840" y="2103120"/>
-            <a:ext cx="3657600" cy="457200"/>
+          <p:cNvPr id="9" name="Text 7"/>
+          <p:cNvSpPr/>
+          <p:nvPr/>
+        </p:nvSpPr>
+        <p:spPr>
+          <a:xfrm>
+            <a:off x="1097280" y="2697480"/>
+            <a:ext cx="4449928" cy="320040"/>
           </a:xfrm>
           <a:prstGeom prst="rect">
             <a:avLst/>
@@ -3206,84 +3499,38 @@
               <a:buNone/>
             </a:pPr>
             <a:r>
-              <a:rPr lang="en-US" sz="1900" b="1" dirty="0">
-                <a:solidFill>
-                  <a:srgbClr val="EBB13C"/>
-                </a:solidFill>
-                <a:latin typeface="Bookman Old Style" pitchFamily="34" charset="0"/>
-                <a:ea typeface="Bookman Old Style" pitchFamily="34" charset="-122"/>
-                <a:cs typeface="Bookman Old Style" pitchFamily="34" charset="-120"/>
-              </a:rPr>
-              <a:t>Problem</a:t>
-            </a:r>
-            <a:endParaRPr lang="en-US" sz="1900" dirty="0"/>
-          </a:p>
-        </p:txBody>
-      </p:sp>
-      <p:sp>
-        <p:nvSpPr>
-          <p:cNvPr id="5" name="Text 3"/>
-          <p:cNvSpPr/>
-          <p:nvPr/>
-        </p:nvSpPr>
-        <p:spPr>
-          <a:xfrm>
-            <a:off x="1005840" y="2578608"/>
-            <a:ext cx="9966960" cy="1188720"/>
-          </a:xfrm>
-          <a:prstGeom prst="rect">
-            <a:avLst/>
-          </a:prstGeom>
-          <a:noFill/>
-          <a:ln/>
-        </p:spPr>
-        <p:txBody>
-          <a:bodyPr wrap="square" lIns="0" tIns="0" rIns="0" bIns="0" rtlCol="0" anchor="ctr"/>
-          <a:lstStyle/>
-          <a:p>
-            <a:pPr indent="0" marL="0">
-              <a:lnSpc>
-                <a:spcPct val="105000"/>
-              </a:lnSpc>
-              <a:buNone/>
-            </a:pPr>
-            <a:r>
-              <a:rPr lang="en-US" sz="1300" dirty="0">
-                <a:solidFill>
-                  <a:srgbClr val="102A38"/>
+              <a:rPr lang="en-US" sz="1200" b="1" spc="200" kern="0" dirty="0">
+                <a:solidFill>
+                  <a:srgbClr val="D1584E"/>
                 </a:solidFill>
                 <a:latin typeface="Calibri" pitchFamily="34" charset="0"/>
                 <a:ea typeface="Calibri" pitchFamily="34" charset="-122"/>
                 <a:cs typeface="Calibri" pitchFamily="34" charset="-120"/>
               </a:rPr>
-              <a:t>Two cloud-facing modules decided they must be in local testing whenever the standard access-key variable was present, and swapped in fake, emulator-only credentials. But the serverless platform always injects that same variable to deliver a function's real credentials — so in production both functions would discard their real identity and fail their first call, while every local test kept passing. The same signal meant opposite things in the two environments.</a:t>
-            </a:r>
-            <a:endParaRPr lang="en-US" sz="1300" dirty="0"/>
-          </a:p>
-        </p:txBody>
-      </p:sp>
-      <p:sp>
-        <p:nvSpPr>
-          <p:cNvPr id="6" name="Shape 4"/>
-          <p:cNvSpPr/>
-          <p:nvPr/>
-        </p:nvSpPr>
-        <p:spPr>
-          <a:xfrm>
-            <a:off x="731520" y="4041648"/>
-            <a:ext cx="10698480" cy="1965960"/>
-          </a:xfrm>
-          <a:prstGeom prst="roundRect">
-            <a:avLst>
-              <a:gd name="adj" fmla="val 4651"/>
-            </a:avLst>
-          </a:prstGeom>
-          <a:solidFill>
-            <a:srgbClr val="EDF4F7"/>
-          </a:solidFill>
+              <a:t>PROBLEM</a:t>
+            </a:r>
+            <a:endParaRPr lang="en-US" sz="1200" dirty="0"/>
+          </a:p>
+        </p:txBody>
+      </p:sp>
+      <p:sp>
+        <p:nvSpPr>
+          <p:cNvPr id="10" name="Shape 8"/>
+          <p:cNvSpPr/>
+          <p:nvPr/>
+        </p:nvSpPr>
+        <p:spPr>
+          <a:xfrm>
+            <a:off x="1097280" y="3081528"/>
+            <a:ext cx="4449928" cy="0"/>
+          </a:xfrm>
+          <a:prstGeom prst="line">
+            <a:avLst/>
+          </a:prstGeom>
+          <a:noFill/>
           <a:ln w="19050">
             <a:solidFill>
-              <a:srgbClr val="1E86A6"/>
+              <a:srgbClr val="D1584E"/>
             </a:solidFill>
             <a:prstDash val="solid"/>
           </a:ln>
@@ -3291,82 +3538,174 @@
       </p:sp>
       <p:sp>
         <p:nvSpPr>
-          <p:cNvPr id="7" name="Text 5"/>
-          <p:cNvSpPr/>
-          <p:nvPr/>
-        </p:nvSpPr>
-        <p:spPr>
-          <a:xfrm>
-            <a:off x="1005840" y="4224528"/>
-            <a:ext cx="3657600" cy="457200"/>
-          </a:xfrm>
-          <a:prstGeom prst="rect">
-            <a:avLst/>
-          </a:prstGeom>
-          <a:noFill/>
-          <a:ln/>
-        </p:spPr>
-        <p:txBody>
-          <a:bodyPr wrap="square" lIns="0" tIns="0" rIns="0" bIns="0" rtlCol="0" anchor="ctr"/>
-          <a:lstStyle/>
-          <a:p>
-            <a:pPr indent="0" marL="0">
-              <a:buNone/>
-            </a:pPr>
-            <a:r>
-              <a:rPr lang="en-US" sz="1900" b="1" dirty="0">
-                <a:solidFill>
-                  <a:srgbClr val="1E86A6"/>
-                </a:solidFill>
-                <a:latin typeface="Bookman Old Style" pitchFamily="34" charset="0"/>
-                <a:ea typeface="Bookman Old Style" pitchFamily="34" charset="-122"/>
-                <a:cs typeface="Bookman Old Style" pitchFamily="34" charset="-120"/>
-              </a:rPr>
-              <a:t>Solution</a:t>
-            </a:r>
-            <a:endParaRPr lang="en-US" sz="1900" dirty="0"/>
-          </a:p>
-        </p:txBody>
-      </p:sp>
-      <p:sp>
-        <p:nvSpPr>
-          <p:cNvPr id="8" name="Text 6"/>
-          <p:cNvSpPr/>
-          <p:nvPr/>
-        </p:nvSpPr>
-        <p:spPr>
-          <a:xfrm>
-            <a:off x="1005840" y="4700016"/>
-            <a:ext cx="9966960" cy="1188720"/>
-          </a:xfrm>
-          <a:prstGeom prst="rect">
-            <a:avLst/>
-          </a:prstGeom>
-          <a:noFill/>
-          <a:ln/>
-        </p:spPr>
-        <p:txBody>
-          <a:bodyPr wrap="square" lIns="0" tIns="0" rIns="0" bIns="0" rtlCol="0" anchor="ctr"/>
+          <p:cNvPr id="11" name="Text 9"/>
+          <p:cNvSpPr/>
+          <p:nvPr/>
+        </p:nvSpPr>
+        <p:spPr>
+          <a:xfrm>
+            <a:off x="1097280" y="3246120"/>
+            <a:ext cx="4449928" cy="2651760"/>
+          </a:xfrm>
+          <a:prstGeom prst="rect">
+            <a:avLst/>
+          </a:prstGeom>
+          <a:noFill/>
+          <a:ln/>
+        </p:spPr>
+        <p:txBody>
+          <a:bodyPr wrap="square" lIns="0" tIns="0" rIns="0" bIns="0" rtlCol="0" anchor="t"/>
           <a:lstStyle/>
           <a:p>
             <a:pPr indent="0" marL="0">
               <a:lnSpc>
-                <a:spcPct val="105000"/>
+                <a:spcPct val="128000"/>
               </a:lnSpc>
               <a:buNone/>
             </a:pPr>
             <a:r>
-              <a:rPr lang="en-US" sz="1300" dirty="0">
-                <a:solidFill>
-                  <a:srgbClr val="102A38"/>
+              <a:rPr lang="en-US" sz="1350" dirty="0">
+                <a:solidFill>
+                  <a:srgbClr val="EEF2F6"/>
                 </a:solidFill>
                 <a:latin typeface="Calibri" pitchFamily="34" charset="0"/>
                 <a:ea typeface="Calibri" pitchFamily="34" charset="-122"/>
                 <a:cs typeface="Calibri" pitchFamily="34" charset="-120"/>
               </a:rPr>
-              <a:t>Gate on the local-emulator endpoint variable instead — the one signal that genuinely means local. Deployed functions now fall through to the platform's default credential chain and pick up their real execution-role identity. A pre-deployment audit caught this plus two more; all three were fixed before the first deploy, and every health check was green on the first live poll.</a:t>
-            </a:r>
-            <a:endParaRPr lang="en-US" sz="1300" dirty="0"/>
+              <a:t>The dashboard is an Express application that already serves every route locally. Deploying it as a cloud function tempted a second, parallel set of routes for the function — two code paths for the same logic that would inevitably drift apart as either side changed.</a:t>
+            </a:r>
+            <a:endParaRPr lang="en-US" sz="1350" dirty="0"/>
+          </a:p>
+        </p:txBody>
+      </p:sp>
+      <p:sp>
+        <p:nvSpPr>
+          <p:cNvPr id="12" name="Shape 10"/>
+          <p:cNvSpPr/>
+          <p:nvPr/>
+        </p:nvSpPr>
+        <p:spPr>
+          <a:xfrm>
+            <a:off x="6324448" y="2423160"/>
+            <a:ext cx="5090008" cy="3657600"/>
+          </a:xfrm>
+          <a:prstGeom prst="roundRect">
+            <a:avLst>
+              <a:gd name="adj" fmla="val 2000"/>
+            </a:avLst>
+          </a:prstGeom>
+          <a:solidFill>
+            <a:srgbClr val="123456"/>
+          </a:solidFill>
+          <a:ln w="12700">
+            <a:solidFill>
+              <a:srgbClr val="26486A"/>
+            </a:solidFill>
+            <a:prstDash val="solid"/>
+          </a:ln>
+        </p:spPr>
+      </p:sp>
+      <p:sp>
+        <p:nvSpPr>
+          <p:cNvPr id="13" name="Text 11"/>
+          <p:cNvSpPr/>
+          <p:nvPr/>
+        </p:nvSpPr>
+        <p:spPr>
+          <a:xfrm>
+            <a:off x="6644488" y="2697480"/>
+            <a:ext cx="4449928" cy="320040"/>
+          </a:xfrm>
+          <a:prstGeom prst="rect">
+            <a:avLst/>
+          </a:prstGeom>
+          <a:noFill/>
+          <a:ln/>
+        </p:spPr>
+        <p:txBody>
+          <a:bodyPr wrap="square" lIns="0" tIns="0" rIns="0" bIns="0" rtlCol="0" anchor="ctr"/>
+          <a:lstStyle/>
+          <a:p>
+            <a:pPr indent="0" marL="0">
+              <a:buNone/>
+            </a:pPr>
+            <a:r>
+              <a:rPr lang="en-US" sz="1200" b="1" spc="200" kern="0" dirty="0">
+                <a:solidFill>
+                  <a:srgbClr val="3FAE82"/>
+                </a:solidFill>
+                <a:latin typeface="Calibri" pitchFamily="34" charset="0"/>
+                <a:ea typeface="Calibri" pitchFamily="34" charset="-122"/>
+                <a:cs typeface="Calibri" pitchFamily="34" charset="-120"/>
+              </a:rPr>
+              <a:t>SOLUTION</a:t>
+            </a:r>
+            <a:endParaRPr lang="en-US" sz="1200" dirty="0"/>
+          </a:p>
+        </p:txBody>
+      </p:sp>
+      <p:sp>
+        <p:nvSpPr>
+          <p:cNvPr id="14" name="Shape 12"/>
+          <p:cNvSpPr/>
+          <p:nvPr/>
+        </p:nvSpPr>
+        <p:spPr>
+          <a:xfrm>
+            <a:off x="6644488" y="3081528"/>
+            <a:ext cx="4449928" cy="0"/>
+          </a:xfrm>
+          <a:prstGeom prst="line">
+            <a:avLst/>
+          </a:prstGeom>
+          <a:noFill/>
+          <a:ln w="19050">
+            <a:solidFill>
+              <a:srgbClr val="3FAE82"/>
+            </a:solidFill>
+            <a:prstDash val="solid"/>
+          </a:ln>
+        </p:spPr>
+      </p:sp>
+      <p:sp>
+        <p:nvSpPr>
+          <p:cNvPr id="15" name="Text 13"/>
+          <p:cNvSpPr/>
+          <p:nvPr/>
+        </p:nvSpPr>
+        <p:spPr>
+          <a:xfrm>
+            <a:off x="6644488" y="3246120"/>
+            <a:ext cx="4449928" cy="2651760"/>
+          </a:xfrm>
+          <a:prstGeom prst="rect">
+            <a:avLst/>
+          </a:prstGeom>
+          <a:noFill/>
+          <a:ln/>
+        </p:spPr>
+        <p:txBody>
+          <a:bodyPr wrap="square" lIns="0" tIns="0" rIns="0" bIns="0" rtlCol="0" anchor="t"/>
+          <a:lstStyle/>
+          <a:p>
+            <a:pPr indent="0" marL="0">
+              <a:lnSpc>
+                <a:spcPct val="128000"/>
+              </a:lnSpc>
+              <a:buNone/>
+            </a:pPr>
+            <a:r>
+              <a:rPr lang="en-US" sz="1350" dirty="0">
+                <a:solidFill>
+                  <a:srgbClr val="EEF2F6"/>
+                </a:solidFill>
+                <a:latin typeface="Calibri" pitchFamily="34" charset="0"/>
+                <a:ea typeface="Calibri" pitchFamily="34" charset="-122"/>
+                <a:cs typeface="Calibri" pitchFamily="34" charset="-120"/>
+              </a:rPr>
+              <a:t>Instead of duplicating routes, each event from the managed gateway is bridged into the request and response pair Express expects; the application handles it exactly as a local request, and the result is translated back to the gateway's shape. Business logic lives in one place, the bridge carries its own tests, and every reply — including errors — attaches the cross-origin header so the browser accepts responses from a different origin.</a:t>
+            </a:r>
+            <a:endParaRPr lang="en-US" sz="1350" dirty="0"/>
           </a:p>
         </p:txBody>
       </p:sp>
